--- a/本体应用设计.pptx
+++ b/本体应用设计.pptx
@@ -10,7 +10,7 @@
     <p:notesMasterId r:id="rId6"/>
   </p:notesMasterIdLst>
   <p:handoutMasterIdLst>
-    <p:handoutMasterId r:id="rId24"/>
+    <p:handoutMasterId r:id="rId26"/>
   </p:handoutMasterIdLst>
   <p:sldIdLst>
     <p:sldId id="278" r:id="rId5"/>
@@ -23,14 +23,16 @@
     <p:sldId id="613" r:id="rId13"/>
     <p:sldId id="620" r:id="rId14"/>
     <p:sldId id="619" r:id="rId15"/>
-    <p:sldId id="624" r:id="rId16"/>
-    <p:sldId id="621" r:id="rId17"/>
-    <p:sldId id="635" r:id="rId18"/>
-    <p:sldId id="631" r:id="rId19"/>
-    <p:sldId id="625" r:id="rId20"/>
-    <p:sldId id="629" r:id="rId21"/>
-    <p:sldId id="630" r:id="rId22"/>
-    <p:sldId id="616" r:id="rId23"/>
+    <p:sldId id="636" r:id="rId16"/>
+    <p:sldId id="637" r:id="rId17"/>
+    <p:sldId id="624" r:id="rId18"/>
+    <p:sldId id="621" r:id="rId19"/>
+    <p:sldId id="635" r:id="rId20"/>
+    <p:sldId id="631" r:id="rId21"/>
+    <p:sldId id="625" r:id="rId22"/>
+    <p:sldId id="629" r:id="rId23"/>
+    <p:sldId id="630" r:id="rId24"/>
+    <p:sldId id="616" r:id="rId25"/>
   </p:sldIdLst>
   <p:sldSz cx="12195175" cy="6859270"/>
   <p:notesSz cx="6858000" cy="9144000"/>
@@ -148,6 +150,8 @@
             <p14:sldId id="613"/>
             <p14:sldId id="620"/>
             <p14:sldId id="619"/>
+            <p14:sldId id="636"/>
+            <p14:sldId id="637"/>
             <p14:sldId id="624"/>
             <p14:sldId id="621"/>
             <p14:sldId id="635"/>
@@ -182,12 +186,12 @@
             <a:srgbClr val="A4A3A4"/>
           </p15:clr>
         </p15:guide>
-        <p15:guide id="5" pos="400" userDrawn="1">
+        <p15:guide id="5" pos="500" userDrawn="1">
           <p15:clr>
             <a:srgbClr val="A4A3A4"/>
           </p15:clr>
         </p15:guide>
-        <p15:guide id="6" pos="7436" userDrawn="1">
+        <p15:guide id="6" pos="7414" userDrawn="1">
           <p15:clr>
             <a:srgbClr val="A4A3A4"/>
           </p15:clr>
@@ -8982,6 +8986,5449 @@
         <p:nvPr/>
       </p:nvGrpSpPr>
       <p:grpSpPr/>
+      <p:grpSp>
+        <p:nvGrpSpPr>
+          <p:cNvPr id="89" name="组合 88"/>
+          <p:cNvGrpSpPr/>
+          <p:nvPr/>
+        </p:nvGrpSpPr>
+        <p:grpSpPr>
+          <a:xfrm>
+            <a:off x="3268980" y="1773555"/>
+            <a:ext cx="4552315" cy="4108450"/>
+            <a:chOff x="5148" y="2793"/>
+            <a:chExt cx="7169" cy="6470"/>
+          </a:xfrm>
+        </p:grpSpPr>
+        <p:pic>
+          <p:nvPicPr>
+            <p:cNvPr id="88" name="图片 87" descr="本体概念及工业应用介绍 (5)"/>
+            <p:cNvPicPr>
+              <a:picLocks noChangeAspect="1"/>
+            </p:cNvPicPr>
+            <p:nvPr/>
+          </p:nvPicPr>
+          <p:blipFill>
+            <a:blip r:embed="rId1"/>
+            <a:stretch>
+              <a:fillRect/>
+            </a:stretch>
+          </p:blipFill>
+          <p:spPr>
+            <a:xfrm>
+              <a:off x="5747" y="2793"/>
+              <a:ext cx="6571" cy="6383"/>
+            </a:xfrm>
+            <a:prstGeom prst="rect">
+              <a:avLst/>
+            </a:prstGeom>
+          </p:spPr>
+        </p:pic>
+        <p:sp>
+          <p:nvSpPr>
+            <p:cNvPr id="5" name="文本框 4"/>
+            <p:cNvSpPr txBox="1"/>
+            <p:nvPr>
+              <p:custDataLst>
+                <p:tags r:id="rId2"/>
+              </p:custDataLst>
+            </p:nvPr>
+          </p:nvSpPr>
+          <p:spPr>
+            <a:xfrm>
+              <a:off x="5747" y="3588"/>
+              <a:ext cx="1873" cy="461"/>
+            </a:xfrm>
+            <a:prstGeom prst="rect">
+              <a:avLst/>
+            </a:prstGeom>
+            <a:noFill/>
+          </p:spPr>
+          <p:txBody>
+            <a:bodyPr wrap="square" rtlCol="0" anchor="t">
+              <a:noAutofit/>
+            </a:bodyPr>
+            <a:p>
+              <a:pPr algn="ctr"/>
+              <a:r>
+                <a:rPr sz="900" b="1">
+                  <a:solidFill>
+                    <a:srgbClr val="0A1F3D">
+                      <a:alpha val="100000"/>
+                    </a:srgbClr>
+                  </a:solidFill>
+                  <a:latin typeface="微软雅黑" panose="020B0503020204020204" pitchFamily="34" charset="-122"/>
+                  <a:ea typeface="微软雅黑" panose="020B0503020204020204" pitchFamily="34" charset="-122"/>
+                  <a:cs typeface="微软雅黑" panose="020B0503020204020204" pitchFamily="34" charset="-122"/>
+                  <a:sym typeface="+mn-ea"/>
+                </a:rPr>
+                <a:t>流程编排层</a:t>
+              </a:r>
+              <a:endParaRPr sz="900" b="1">
+                <a:solidFill>
+                  <a:srgbClr val="0A1F3D">
+                    <a:alpha val="100000"/>
+                  </a:srgbClr>
+                </a:solidFill>
+                <a:latin typeface="微软雅黑" panose="020B0503020204020204" pitchFamily="34" charset="-122"/>
+                <a:ea typeface="微软雅黑" panose="020B0503020204020204" pitchFamily="34" charset="-122"/>
+                <a:cs typeface="微软雅黑" panose="020B0503020204020204" pitchFamily="34" charset="-122"/>
+                <a:sym typeface="+mn-ea"/>
+              </a:endParaRPr>
+            </a:p>
+            <a:p>
+              <a:pPr algn="ctr"/>
+              <a:r>
+                <a:rPr lang="zh-CN" altLang="en-US" sz="900" b="1">
+                  <a:solidFill>
+                    <a:srgbClr val="0A1F3D">
+                      <a:alpha val="100000"/>
+                    </a:srgbClr>
+                  </a:solidFill>
+                  <a:latin typeface="微软雅黑" panose="020B0503020204020204" pitchFamily="34" charset="-122"/>
+                  <a:ea typeface="微软雅黑" panose="020B0503020204020204" pitchFamily="34" charset="-122"/>
+                  <a:cs typeface="微软雅黑" panose="020B0503020204020204" pitchFamily="34" charset="-122"/>
+                  <a:sym typeface="+mn-ea"/>
+                </a:rPr>
+                <a:t>（</a:t>
+              </a:r>
+              <a:r>
+                <a:rPr lang="en-US" altLang="zh-CN" sz="900" b="1">
+                  <a:solidFill>
+                    <a:srgbClr val="0A1F3D">
+                      <a:alpha val="100000"/>
+                    </a:srgbClr>
+                  </a:solidFill>
+                  <a:latin typeface="微软雅黑" panose="020B0503020204020204" pitchFamily="34" charset="-122"/>
+                  <a:ea typeface="微软雅黑" panose="020B0503020204020204" pitchFamily="34" charset="-122"/>
+                  <a:cs typeface="微软雅黑" panose="020B0503020204020204" pitchFamily="34" charset="-122"/>
+                  <a:sym typeface="+mn-ea"/>
+                </a:rPr>
+                <a:t>Action</a:t>
+              </a:r>
+              <a:r>
+                <a:rPr lang="zh-CN" altLang="en-US" sz="900" b="1">
+                  <a:solidFill>
+                    <a:srgbClr val="0A1F3D">
+                      <a:alpha val="100000"/>
+                    </a:srgbClr>
+                  </a:solidFill>
+                  <a:latin typeface="微软雅黑" panose="020B0503020204020204" pitchFamily="34" charset="-122"/>
+                  <a:ea typeface="微软雅黑" panose="020B0503020204020204" pitchFamily="34" charset="-122"/>
+                  <a:cs typeface="微软雅黑" panose="020B0503020204020204" pitchFamily="34" charset="-122"/>
+                  <a:sym typeface="+mn-ea"/>
+                </a:rPr>
+                <a:t>：</a:t>
+              </a:r>
+              <a:r>
+                <a:rPr lang="en-US" altLang="zh-CN" sz="900" b="1">
+                  <a:solidFill>
+                    <a:srgbClr val="0A1F3D">
+                      <a:alpha val="100000"/>
+                    </a:srgbClr>
+                  </a:solidFill>
+                  <a:latin typeface="微软雅黑" panose="020B0503020204020204" pitchFamily="34" charset="-122"/>
+                  <a:ea typeface="微软雅黑" panose="020B0503020204020204" pitchFamily="34" charset="-122"/>
+                  <a:cs typeface="微软雅黑" panose="020B0503020204020204" pitchFamily="34" charset="-122"/>
+                  <a:sym typeface="+mn-ea"/>
+                </a:rPr>
+                <a:t>BPMN</a:t>
+              </a:r>
+              <a:r>
+                <a:rPr lang="zh-CN" altLang="en-US" sz="900" b="1">
+                  <a:solidFill>
+                    <a:srgbClr val="0A1F3D">
+                      <a:alpha val="100000"/>
+                    </a:srgbClr>
+                  </a:solidFill>
+                  <a:latin typeface="微软雅黑" panose="020B0503020204020204" pitchFamily="34" charset="-122"/>
+                  <a:ea typeface="微软雅黑" panose="020B0503020204020204" pitchFamily="34" charset="-122"/>
+                  <a:cs typeface="微软雅黑" panose="020B0503020204020204" pitchFamily="34" charset="-122"/>
+                  <a:sym typeface="+mn-ea"/>
+                </a:rPr>
+                <a:t>）</a:t>
+              </a:r>
+              <a:endParaRPr lang="zh-CN" altLang="en-US" sz="900" b="1">
+                <a:solidFill>
+                  <a:srgbClr val="0A1F3D">
+                    <a:alpha val="100000"/>
+                  </a:srgbClr>
+                </a:solidFill>
+                <a:latin typeface="微软雅黑" panose="020B0503020204020204" pitchFamily="34" charset="-122"/>
+                <a:ea typeface="微软雅黑" panose="020B0503020204020204" pitchFamily="34" charset="-122"/>
+                <a:cs typeface="微软雅黑" panose="020B0503020204020204" pitchFamily="34" charset="-122"/>
+                <a:sym typeface="+mn-ea"/>
+              </a:endParaRPr>
+            </a:p>
+          </p:txBody>
+        </p:sp>
+        <p:sp>
+          <p:nvSpPr>
+            <p:cNvPr id="6" name="文本框 5"/>
+            <p:cNvSpPr txBox="1"/>
+            <p:nvPr>
+              <p:custDataLst>
+                <p:tags r:id="rId3"/>
+              </p:custDataLst>
+            </p:nvPr>
+          </p:nvSpPr>
+          <p:spPr>
+            <a:xfrm>
+              <a:off x="5148" y="5401"/>
+              <a:ext cx="3232" cy="794"/>
+            </a:xfrm>
+            <a:prstGeom prst="rect">
+              <a:avLst/>
+            </a:prstGeom>
+            <a:noFill/>
+          </p:spPr>
+          <p:txBody>
+            <a:bodyPr wrap="square" rtlCol="0" anchor="t">
+              <a:noAutofit/>
+            </a:bodyPr>
+            <a:p>
+              <a:pPr algn="ctr"/>
+              <a:r>
+                <a:rPr sz="900" b="1">
+                  <a:solidFill>
+                    <a:srgbClr val="0A1F3D">
+                      <a:alpha val="100000"/>
+                    </a:srgbClr>
+                  </a:solidFill>
+                  <a:latin typeface="微软雅黑" panose="020B0503020204020204" pitchFamily="34" charset="-122"/>
+                  <a:ea typeface="微软雅黑" panose="020B0503020204020204" pitchFamily="34" charset="-122"/>
+                  <a:cs typeface="微软雅黑" panose="020B0503020204020204" pitchFamily="34" charset="-122"/>
+                  <a:sym typeface="+mn-ea"/>
+                </a:rPr>
+                <a:t>本体推理层</a:t>
+              </a:r>
+              <a:endParaRPr sz="900" b="1">
+                <a:solidFill>
+                  <a:srgbClr val="0A1F3D">
+                    <a:alpha val="100000"/>
+                  </a:srgbClr>
+                </a:solidFill>
+                <a:latin typeface="微软雅黑" panose="020B0503020204020204" pitchFamily="34" charset="-122"/>
+                <a:ea typeface="微软雅黑" panose="020B0503020204020204" pitchFamily="34" charset="-122"/>
+                <a:cs typeface="微软雅黑" panose="020B0503020204020204" pitchFamily="34" charset="-122"/>
+                <a:sym typeface="+mn-ea"/>
+              </a:endParaRPr>
+            </a:p>
+            <a:p>
+              <a:pPr algn="ctr"/>
+              <a:r>
+                <a:rPr lang="zh-CN" altLang="en-US" sz="900" b="1">
+                  <a:solidFill>
+                    <a:srgbClr val="0A1F3D">
+                      <a:alpha val="100000"/>
+                    </a:srgbClr>
+                  </a:solidFill>
+                  <a:latin typeface="微软雅黑" panose="020B0503020204020204" pitchFamily="34" charset="-122"/>
+                  <a:ea typeface="微软雅黑" panose="020B0503020204020204" pitchFamily="34" charset="-122"/>
+                  <a:cs typeface="微软雅黑" panose="020B0503020204020204" pitchFamily="34" charset="-122"/>
+                  <a:sym typeface="+mn-ea"/>
+                </a:rPr>
+                <a:t>（</a:t>
+              </a:r>
+              <a:r>
+                <a:rPr lang="en-US" altLang="zh-CN" sz="900" b="1">
+                  <a:solidFill>
+                    <a:srgbClr val="0A1F3D">
+                      <a:alpha val="100000"/>
+                    </a:srgbClr>
+                  </a:solidFill>
+                  <a:latin typeface="微软雅黑" panose="020B0503020204020204" pitchFamily="34" charset="-122"/>
+                  <a:ea typeface="微软雅黑" panose="020B0503020204020204" pitchFamily="34" charset="-122"/>
+                  <a:cs typeface="微软雅黑" panose="020B0503020204020204" pitchFamily="34" charset="-122"/>
+                  <a:sym typeface="+mn-ea"/>
+                </a:rPr>
+                <a:t>Data: RDF/OWL/SKOS/ODRL</a:t>
+              </a:r>
+              <a:endParaRPr lang="en-US" altLang="zh-CN" sz="900" b="1">
+                <a:solidFill>
+                  <a:srgbClr val="0A1F3D">
+                    <a:alpha val="100000"/>
+                  </a:srgbClr>
+                </a:solidFill>
+                <a:latin typeface="微软雅黑" panose="020B0503020204020204" pitchFamily="34" charset="-122"/>
+                <a:ea typeface="微软雅黑" panose="020B0503020204020204" pitchFamily="34" charset="-122"/>
+                <a:cs typeface="微软雅黑" panose="020B0503020204020204" pitchFamily="34" charset="-122"/>
+                <a:sym typeface="+mn-ea"/>
+              </a:endParaRPr>
+            </a:p>
+            <a:p>
+              <a:pPr algn="ctr"/>
+              <a:r>
+                <a:rPr lang="en-US" altLang="zh-CN" sz="900" b="1">
+                  <a:solidFill>
+                    <a:srgbClr val="0A1F3D">
+                      <a:alpha val="100000"/>
+                    </a:srgbClr>
+                  </a:solidFill>
+                  <a:latin typeface="微软雅黑" panose="020B0503020204020204" pitchFamily="34" charset="-122"/>
+                  <a:ea typeface="微软雅黑" panose="020B0503020204020204" pitchFamily="34" charset="-122"/>
+                  <a:cs typeface="微软雅黑" panose="020B0503020204020204" pitchFamily="34" charset="-122"/>
+                  <a:sym typeface="+mn-ea"/>
+                </a:rPr>
+                <a:t>Logic: SWRL</a:t>
+              </a:r>
+              <a:r>
+                <a:rPr lang="zh-CN" altLang="en-US" sz="900" b="1">
+                  <a:solidFill>
+                    <a:srgbClr val="0A1F3D">
+                      <a:alpha val="100000"/>
+                    </a:srgbClr>
+                  </a:solidFill>
+                  <a:latin typeface="微软雅黑" panose="020B0503020204020204" pitchFamily="34" charset="-122"/>
+                  <a:ea typeface="微软雅黑" panose="020B0503020204020204" pitchFamily="34" charset="-122"/>
+                  <a:cs typeface="微软雅黑" panose="020B0503020204020204" pitchFamily="34" charset="-122"/>
+                  <a:sym typeface="+mn-ea"/>
+                </a:rPr>
+                <a:t>）</a:t>
+              </a:r>
+              <a:endParaRPr lang="zh-CN" altLang="en-US" sz="900" b="1">
+                <a:solidFill>
+                  <a:srgbClr val="0A1F3D">
+                    <a:alpha val="100000"/>
+                  </a:srgbClr>
+                </a:solidFill>
+                <a:latin typeface="微软雅黑" panose="020B0503020204020204" pitchFamily="34" charset="-122"/>
+                <a:ea typeface="微软雅黑" panose="020B0503020204020204" pitchFamily="34" charset="-122"/>
+                <a:cs typeface="微软雅黑" panose="020B0503020204020204" pitchFamily="34" charset="-122"/>
+                <a:sym typeface="+mn-ea"/>
+              </a:endParaRPr>
+            </a:p>
+          </p:txBody>
+        </p:sp>
+        <p:sp>
+          <p:nvSpPr>
+            <p:cNvPr id="8" name="文本框 7"/>
+            <p:cNvSpPr txBox="1"/>
+            <p:nvPr>
+              <p:custDataLst>
+                <p:tags r:id="rId4"/>
+              </p:custDataLst>
+            </p:nvPr>
+          </p:nvSpPr>
+          <p:spPr>
+            <a:xfrm>
+              <a:off x="5747" y="7256"/>
+              <a:ext cx="1873" cy="461"/>
+            </a:xfrm>
+            <a:prstGeom prst="rect">
+              <a:avLst/>
+            </a:prstGeom>
+            <a:noFill/>
+          </p:spPr>
+          <p:txBody>
+            <a:bodyPr wrap="square" rtlCol="0" anchor="t">
+              <a:noAutofit/>
+            </a:bodyPr>
+            <a:p>
+              <a:pPr algn="ctr"/>
+              <a:r>
+                <a:rPr lang="zh-CN" sz="900" b="1">
+                  <a:solidFill>
+                    <a:srgbClr val="0A1F3D">
+                      <a:alpha val="100000"/>
+                    </a:srgbClr>
+                  </a:solidFill>
+                  <a:latin typeface="微软雅黑" panose="020B0503020204020204" pitchFamily="34" charset="-122"/>
+                  <a:ea typeface="微软雅黑" panose="020B0503020204020204" pitchFamily="34" charset="-122"/>
+                  <a:cs typeface="微软雅黑" panose="020B0503020204020204" pitchFamily="34" charset="-122"/>
+                  <a:sym typeface="+mn-ea"/>
+                </a:rPr>
+                <a:t>语义映射</a:t>
+              </a:r>
+              <a:r>
+                <a:rPr sz="900" b="1">
+                  <a:solidFill>
+                    <a:srgbClr val="0A1F3D">
+                      <a:alpha val="100000"/>
+                    </a:srgbClr>
+                  </a:solidFill>
+                  <a:latin typeface="微软雅黑" panose="020B0503020204020204" pitchFamily="34" charset="-122"/>
+                  <a:ea typeface="微软雅黑" panose="020B0503020204020204" pitchFamily="34" charset="-122"/>
+                  <a:cs typeface="微软雅黑" panose="020B0503020204020204" pitchFamily="34" charset="-122"/>
+                  <a:sym typeface="+mn-ea"/>
+                </a:rPr>
+                <a:t>层</a:t>
+              </a:r>
+              <a:endParaRPr sz="900" b="1">
+                <a:solidFill>
+                  <a:srgbClr val="0A1F3D">
+                    <a:alpha val="100000"/>
+                  </a:srgbClr>
+                </a:solidFill>
+                <a:latin typeface="微软雅黑" panose="020B0503020204020204" pitchFamily="34" charset="-122"/>
+                <a:ea typeface="微软雅黑" panose="020B0503020204020204" pitchFamily="34" charset="-122"/>
+                <a:cs typeface="微软雅黑" panose="020B0503020204020204" pitchFamily="34" charset="-122"/>
+                <a:sym typeface="+mn-ea"/>
+              </a:endParaRPr>
+            </a:p>
+            <a:p>
+              <a:pPr algn="ctr"/>
+              <a:r>
+                <a:rPr lang="zh-CN" altLang="en-US" sz="900" b="1">
+                  <a:solidFill>
+                    <a:srgbClr val="0A1F3D">
+                      <a:alpha val="100000"/>
+                    </a:srgbClr>
+                  </a:solidFill>
+                  <a:latin typeface="微软雅黑" panose="020B0503020204020204" pitchFamily="34" charset="-122"/>
+                  <a:ea typeface="微软雅黑" panose="020B0503020204020204" pitchFamily="34" charset="-122"/>
+                  <a:cs typeface="微软雅黑" panose="020B0503020204020204" pitchFamily="34" charset="-122"/>
+                  <a:sym typeface="+mn-ea"/>
+                </a:rPr>
+                <a:t>（</a:t>
+              </a:r>
+              <a:r>
+                <a:rPr lang="en-US" altLang="zh-CN" sz="900" b="1">
+                  <a:solidFill>
+                    <a:srgbClr val="0A1F3D">
+                      <a:alpha val="100000"/>
+                    </a:srgbClr>
+                  </a:solidFill>
+                  <a:latin typeface="微软雅黑" panose="020B0503020204020204" pitchFamily="34" charset="-122"/>
+                  <a:ea typeface="微软雅黑" panose="020B0503020204020204" pitchFamily="34" charset="-122"/>
+                  <a:cs typeface="微软雅黑" panose="020B0503020204020204" pitchFamily="34" charset="-122"/>
+                  <a:sym typeface="+mn-ea"/>
+                </a:rPr>
+                <a:t>SPARQL</a:t>
+              </a:r>
+              <a:r>
+                <a:rPr lang="zh-CN" altLang="en-US" sz="900" b="1">
+                  <a:solidFill>
+                    <a:srgbClr val="0A1F3D">
+                      <a:alpha val="100000"/>
+                    </a:srgbClr>
+                  </a:solidFill>
+                  <a:latin typeface="微软雅黑" panose="020B0503020204020204" pitchFamily="34" charset="-122"/>
+                  <a:ea typeface="微软雅黑" panose="020B0503020204020204" pitchFamily="34" charset="-122"/>
+                  <a:cs typeface="微软雅黑" panose="020B0503020204020204" pitchFamily="34" charset="-122"/>
+                  <a:sym typeface="+mn-ea"/>
+                </a:rPr>
+                <a:t>）</a:t>
+              </a:r>
+              <a:endParaRPr lang="zh-CN" altLang="en-US" sz="900" b="1">
+                <a:solidFill>
+                  <a:srgbClr val="0A1F3D">
+                    <a:alpha val="100000"/>
+                  </a:srgbClr>
+                </a:solidFill>
+                <a:latin typeface="微软雅黑" panose="020B0503020204020204" pitchFamily="34" charset="-122"/>
+                <a:ea typeface="微软雅黑" panose="020B0503020204020204" pitchFamily="34" charset="-122"/>
+                <a:cs typeface="微软雅黑" panose="020B0503020204020204" pitchFamily="34" charset="-122"/>
+                <a:sym typeface="+mn-ea"/>
+              </a:endParaRPr>
+            </a:p>
+          </p:txBody>
+        </p:sp>
+        <p:sp>
+          <p:nvSpPr>
+            <p:cNvPr id="9" name="文本框 8"/>
+            <p:cNvSpPr txBox="1"/>
+            <p:nvPr>
+              <p:custDataLst>
+                <p:tags r:id="rId5"/>
+              </p:custDataLst>
+            </p:nvPr>
+          </p:nvSpPr>
+          <p:spPr>
+            <a:xfrm>
+              <a:off x="5747" y="8803"/>
+              <a:ext cx="1873" cy="461"/>
+            </a:xfrm>
+            <a:prstGeom prst="rect">
+              <a:avLst/>
+            </a:prstGeom>
+            <a:noFill/>
+          </p:spPr>
+          <p:txBody>
+            <a:bodyPr wrap="square" rtlCol="0" anchor="t">
+              <a:noAutofit/>
+            </a:bodyPr>
+            <a:p>
+              <a:pPr algn="ctr"/>
+              <a:r>
+                <a:rPr lang="zh-CN" sz="900" b="1">
+                  <a:solidFill>
+                    <a:srgbClr val="0A1F3D">
+                      <a:alpha val="100000"/>
+                    </a:srgbClr>
+                  </a:solidFill>
+                  <a:latin typeface="微软雅黑" panose="020B0503020204020204" pitchFamily="34" charset="-122"/>
+                  <a:ea typeface="微软雅黑" panose="020B0503020204020204" pitchFamily="34" charset="-122"/>
+                  <a:cs typeface="微软雅黑" panose="020B0503020204020204" pitchFamily="34" charset="-122"/>
+                  <a:sym typeface="+mn-ea"/>
+                </a:rPr>
+                <a:t>数据存储</a:t>
+              </a:r>
+              <a:r>
+                <a:rPr sz="900" b="1">
+                  <a:solidFill>
+                    <a:srgbClr val="0A1F3D">
+                      <a:alpha val="100000"/>
+                    </a:srgbClr>
+                  </a:solidFill>
+                  <a:latin typeface="微软雅黑" panose="020B0503020204020204" pitchFamily="34" charset="-122"/>
+                  <a:ea typeface="微软雅黑" panose="020B0503020204020204" pitchFamily="34" charset="-122"/>
+                  <a:cs typeface="微软雅黑" panose="020B0503020204020204" pitchFamily="34" charset="-122"/>
+                  <a:sym typeface="+mn-ea"/>
+                </a:rPr>
+                <a:t>层</a:t>
+              </a:r>
+              <a:endParaRPr lang="zh-CN" altLang="en-US" sz="900" b="1">
+                <a:solidFill>
+                  <a:srgbClr val="0A1F3D">
+                    <a:alpha val="100000"/>
+                  </a:srgbClr>
+                </a:solidFill>
+                <a:latin typeface="微软雅黑" panose="020B0503020204020204" pitchFamily="34" charset="-122"/>
+                <a:ea typeface="微软雅黑" panose="020B0503020204020204" pitchFamily="34" charset="-122"/>
+                <a:cs typeface="微软雅黑" panose="020B0503020204020204" pitchFamily="34" charset="-122"/>
+                <a:sym typeface="+mn-ea"/>
+              </a:endParaRPr>
+            </a:p>
+          </p:txBody>
+        </p:sp>
+      </p:grpSp>
+    </p:spTree>
+  </p:cSld>
+  <p:clrMapOvr>
+    <a:masterClrMapping/>
+  </p:clrMapOvr>
+</p:sld>
+</file>
+
+<file path=ppt/slides/slide12.xml><?xml version="1.0" encoding="utf-8"?>
+<p:sld xmlns:a="http://schemas.openxmlformats.org/drawingml/2006/main" xmlns:r="http://schemas.openxmlformats.org/officeDocument/2006/relationships" xmlns:p="http://schemas.openxmlformats.org/presentationml/2006/main">
+  <p:cSld>
+    <p:spTree>
+      <p:nvGrpSpPr>
+        <p:cNvPr id="1" name=""/>
+        <p:cNvGrpSpPr/>
+        <p:nvPr/>
+      </p:nvGrpSpPr>
+      <p:grpSpPr/>
+      <p:sp>
+        <p:nvSpPr>
+          <p:cNvPr id="118" name="AutoShape 7"/>
+          <p:cNvSpPr/>
+          <p:nvPr/>
+        </p:nvSpPr>
+        <p:spPr>
+          <a:xfrm>
+            <a:off x="418996" y="1317883"/>
+            <a:ext cx="5561209" cy="4847332"/>
+          </a:xfrm>
+          <a:prstGeom prst="rect">
+            <a:avLst/>
+          </a:prstGeom>
+          <a:solidFill>
+            <a:schemeClr val="bg1"/>
+          </a:solidFill>
+          <a:ln w="9525">
+            <a:solidFill>
+              <a:srgbClr val="D4CEC4">
+                <a:alpha val="100000"/>
+              </a:srgbClr>
+            </a:solidFill>
+            <a:prstDash val="solid"/>
+            <a:headEnd type="none"/>
+            <a:tailEnd type="none"/>
+          </a:ln>
+        </p:spPr>
+      </p:sp>
+      <p:sp>
+        <p:nvSpPr>
+          <p:cNvPr id="119" name="AutoShape 8"/>
+          <p:cNvSpPr/>
+          <p:nvPr/>
+        </p:nvSpPr>
+        <p:spPr>
+          <a:xfrm>
+            <a:off x="418996" y="1317883"/>
+            <a:ext cx="5561209" cy="9525"/>
+          </a:xfrm>
+          <a:prstGeom prst="line">
+            <a:avLst/>
+          </a:prstGeom>
+          <a:ln w="28575">
+            <a:solidFill>
+              <a:srgbClr val="C00000">
+                <a:alpha val="100000"/>
+              </a:srgbClr>
+            </a:solidFill>
+            <a:prstDash val="solid"/>
+            <a:headEnd type="none"/>
+            <a:tailEnd type="none"/>
+          </a:ln>
+        </p:spPr>
+      </p:sp>
+      <p:sp>
+        <p:nvSpPr>
+          <p:cNvPr id="120" name="AutoShape 9"/>
+          <p:cNvSpPr/>
+          <p:nvPr/>
+        </p:nvSpPr>
+        <p:spPr>
+          <a:xfrm>
+            <a:off x="583037" y="1479490"/>
+            <a:ext cx="152362" cy="152400"/>
+          </a:xfrm>
+          <a:custGeom>
+            <a:avLst/>
+            <a:gdLst/>
+            <a:ahLst/>
+            <a:cxnLst/>
+            <a:rect l="l" t="t" r="r" b="b"/>
+            <a:pathLst>
+              <a:path w="9998" h="10000">
+                <a:moveTo>
+                  <a:pt x="1111" y="3853"/>
+                </a:moveTo>
+                <a:lnTo>
+                  <a:pt x="1111" y="5000"/>
+                </a:lnTo>
+                <a:cubicBezTo>
+                  <a:pt x="1111" y="5091"/>
+                  <a:pt x="1177" y="5200"/>
+                  <a:pt x="1311" y="5326"/>
+                </a:cubicBezTo>
+                <a:cubicBezTo>
+                  <a:pt x="1466" y="5466"/>
+                  <a:pt x="1684" y="5603"/>
+                  <a:pt x="1966" y="5737"/>
+                </a:cubicBezTo>
+                <a:cubicBezTo>
+                  <a:pt x="2351" y="5919"/>
+                  <a:pt x="2807" y="6061"/>
+                  <a:pt x="3333" y="6163"/>
+                </a:cubicBezTo>
+                <a:cubicBezTo>
+                  <a:pt x="3858" y="6265"/>
+                  <a:pt x="4413" y="6316"/>
+                  <a:pt x="4999" y="6316"/>
+                </a:cubicBezTo>
+                <a:cubicBezTo>
+                  <a:pt x="5584" y="6316"/>
+                  <a:pt x="6139" y="6265"/>
+                  <a:pt x="6665" y="6163"/>
+                </a:cubicBezTo>
+                <a:cubicBezTo>
+                  <a:pt x="7191" y="6061"/>
+                  <a:pt x="7646" y="5919"/>
+                  <a:pt x="8032" y="5737"/>
+                </a:cubicBezTo>
+                <a:cubicBezTo>
+                  <a:pt x="8313" y="5603"/>
+                  <a:pt x="8531" y="5466"/>
+                  <a:pt x="8687" y="5326"/>
+                </a:cubicBezTo>
+                <a:cubicBezTo>
+                  <a:pt x="8820" y="5200"/>
+                  <a:pt x="8887" y="5091"/>
+                  <a:pt x="8887" y="5000"/>
+                </a:cubicBezTo>
+                <a:lnTo>
+                  <a:pt x="8887" y="3853"/>
+                </a:lnTo>
+                <a:cubicBezTo>
+                  <a:pt x="8420" y="4126"/>
+                  <a:pt x="7853" y="4340"/>
+                  <a:pt x="7187" y="4495"/>
+                </a:cubicBezTo>
+                <a:cubicBezTo>
+                  <a:pt x="6498" y="4656"/>
+                  <a:pt x="5769" y="4737"/>
+                  <a:pt x="4999" y="4737"/>
+                </a:cubicBezTo>
+                <a:cubicBezTo>
+                  <a:pt x="4229" y="4737"/>
+                  <a:pt x="3499" y="4656"/>
+                  <a:pt x="2811" y="4495"/>
+                </a:cubicBezTo>
+                <a:cubicBezTo>
+                  <a:pt x="2144" y="4340"/>
+                  <a:pt x="1577" y="4126"/>
+                  <a:pt x="1111" y="3853"/>
+                </a:cubicBezTo>
+                <a:moveTo>
+                  <a:pt x="8887" y="7632"/>
+                </a:moveTo>
+                <a:lnTo>
+                  <a:pt x="8887" y="6484"/>
+                </a:lnTo>
+                <a:cubicBezTo>
+                  <a:pt x="8420" y="6758"/>
+                  <a:pt x="7853" y="6972"/>
+                  <a:pt x="7187" y="7126"/>
+                </a:cubicBezTo>
+                <a:cubicBezTo>
+                  <a:pt x="6498" y="7287"/>
+                  <a:pt x="5769" y="7368"/>
+                  <a:pt x="4999" y="7368"/>
+                </a:cubicBezTo>
+                <a:cubicBezTo>
+                  <a:pt x="4229" y="7368"/>
+                  <a:pt x="3499" y="7287"/>
+                  <a:pt x="2811" y="7126"/>
+                </a:cubicBezTo>
+                <a:cubicBezTo>
+                  <a:pt x="2144" y="6972"/>
+                  <a:pt x="1577" y="6758"/>
+                  <a:pt x="1111" y="6484"/>
+                </a:cubicBezTo>
+                <a:lnTo>
+                  <a:pt x="1111" y="7632"/>
+                </a:lnTo>
+                <a:cubicBezTo>
+                  <a:pt x="1111" y="7722"/>
+                  <a:pt x="1177" y="7831"/>
+                  <a:pt x="1311" y="7958"/>
+                </a:cubicBezTo>
+                <a:cubicBezTo>
+                  <a:pt x="1466" y="8098"/>
+                  <a:pt x="1684" y="8234"/>
+                  <a:pt x="1966" y="8368"/>
+                </a:cubicBezTo>
+                <a:cubicBezTo>
+                  <a:pt x="2351" y="8550"/>
+                  <a:pt x="2807" y="8693"/>
+                  <a:pt x="3333" y="8795"/>
+                </a:cubicBezTo>
+                <a:cubicBezTo>
+                  <a:pt x="3858" y="8896"/>
+                  <a:pt x="4413" y="8947"/>
+                  <a:pt x="4999" y="8947"/>
+                </a:cubicBezTo>
+                <a:cubicBezTo>
+                  <a:pt x="5584" y="8947"/>
+                  <a:pt x="6139" y="8896"/>
+                  <a:pt x="6665" y="8795"/>
+                </a:cubicBezTo>
+                <a:cubicBezTo>
+                  <a:pt x="7191" y="8693"/>
+                  <a:pt x="7646" y="8550"/>
+                  <a:pt x="8032" y="8368"/>
+                </a:cubicBezTo>
+                <a:cubicBezTo>
+                  <a:pt x="8313" y="8234"/>
+                  <a:pt x="8531" y="8098"/>
+                  <a:pt x="8687" y="7958"/>
+                </a:cubicBezTo>
+                <a:cubicBezTo>
+                  <a:pt x="8820" y="7831"/>
+                  <a:pt x="8887" y="7722"/>
+                  <a:pt x="8887" y="7632"/>
+                </a:cubicBezTo>
+                <a:moveTo>
+                  <a:pt x="0" y="7632"/>
+                </a:moveTo>
+                <a:lnTo>
+                  <a:pt x="0" y="2368"/>
+                </a:lnTo>
+                <a:cubicBezTo>
+                  <a:pt x="0" y="1940"/>
+                  <a:pt x="226" y="1540"/>
+                  <a:pt x="678" y="1168"/>
+                </a:cubicBezTo>
+                <a:cubicBezTo>
+                  <a:pt x="1122" y="817"/>
+                  <a:pt x="1721" y="536"/>
+                  <a:pt x="2477" y="326"/>
+                </a:cubicBezTo>
+                <a:cubicBezTo>
+                  <a:pt x="3255" y="108"/>
+                  <a:pt x="4095" y="0"/>
+                  <a:pt x="4999" y="0"/>
+                </a:cubicBezTo>
+                <a:cubicBezTo>
+                  <a:pt x="5902" y="0"/>
+                  <a:pt x="6743" y="108"/>
+                  <a:pt x="7521" y="326"/>
+                </a:cubicBezTo>
+                <a:cubicBezTo>
+                  <a:pt x="8276" y="536"/>
+                  <a:pt x="8876" y="817"/>
+                  <a:pt x="9320" y="1168"/>
+                </a:cubicBezTo>
+                <a:cubicBezTo>
+                  <a:pt x="9772" y="1540"/>
+                  <a:pt x="9998" y="1940"/>
+                  <a:pt x="9998" y="2368"/>
+                </a:cubicBezTo>
+                <a:lnTo>
+                  <a:pt x="9998" y="7632"/>
+                </a:lnTo>
+                <a:cubicBezTo>
+                  <a:pt x="9998" y="8060"/>
+                  <a:pt x="9772" y="8460"/>
+                  <a:pt x="9320" y="8832"/>
+                </a:cubicBezTo>
+                <a:cubicBezTo>
+                  <a:pt x="8876" y="9182"/>
+                  <a:pt x="8276" y="9463"/>
+                  <a:pt x="7521" y="9674"/>
+                </a:cubicBezTo>
+                <a:cubicBezTo>
+                  <a:pt x="6743" y="9891"/>
+                  <a:pt x="5902" y="10000"/>
+                  <a:pt x="4999" y="10000"/>
+                </a:cubicBezTo>
+                <a:cubicBezTo>
+                  <a:pt x="4095" y="10000"/>
+                  <a:pt x="3255" y="9891"/>
+                  <a:pt x="2477" y="9674"/>
+                </a:cubicBezTo>
+                <a:cubicBezTo>
+                  <a:pt x="1721" y="9463"/>
+                  <a:pt x="1122" y="9182"/>
+                  <a:pt x="678" y="8832"/>
+                </a:cubicBezTo>
+                <a:cubicBezTo>
+                  <a:pt x="226" y="8460"/>
+                  <a:pt x="0" y="8060"/>
+                  <a:pt x="0" y="7632"/>
+                </a:cubicBezTo>
+                <a:moveTo>
+                  <a:pt x="4999" y="3684"/>
+                </a:moveTo>
+                <a:cubicBezTo>
+                  <a:pt x="5584" y="3684"/>
+                  <a:pt x="6139" y="3633"/>
+                  <a:pt x="6665" y="3532"/>
+                </a:cubicBezTo>
+                <a:cubicBezTo>
+                  <a:pt x="7191" y="3430"/>
+                  <a:pt x="7646" y="3287"/>
+                  <a:pt x="8032" y="3105"/>
+                </a:cubicBezTo>
+                <a:cubicBezTo>
+                  <a:pt x="8313" y="2971"/>
+                  <a:pt x="8531" y="2835"/>
+                  <a:pt x="8687" y="2695"/>
+                </a:cubicBezTo>
+                <a:cubicBezTo>
+                  <a:pt x="8820" y="2568"/>
+                  <a:pt x="8887" y="2459"/>
+                  <a:pt x="8887" y="2368"/>
+                </a:cubicBezTo>
+                <a:cubicBezTo>
+                  <a:pt x="8887" y="2277"/>
+                  <a:pt x="8820" y="2168"/>
+                  <a:pt x="8687" y="2042"/>
+                </a:cubicBezTo>
+                <a:cubicBezTo>
+                  <a:pt x="8531" y="1902"/>
+                  <a:pt x="8313" y="1765"/>
+                  <a:pt x="8032" y="1632"/>
+                </a:cubicBezTo>
+                <a:cubicBezTo>
+                  <a:pt x="7646" y="1449"/>
+                  <a:pt x="7191" y="1307"/>
+                  <a:pt x="6665" y="1205"/>
+                </a:cubicBezTo>
+                <a:cubicBezTo>
+                  <a:pt x="6139" y="1103"/>
+                  <a:pt x="5584" y="1053"/>
+                  <a:pt x="4999" y="1053"/>
+                </a:cubicBezTo>
+                <a:cubicBezTo>
+                  <a:pt x="4413" y="1053"/>
+                  <a:pt x="3858" y="1103"/>
+                  <a:pt x="3333" y="1205"/>
+                </a:cubicBezTo>
+                <a:cubicBezTo>
+                  <a:pt x="2807" y="1307"/>
+                  <a:pt x="2351" y="1449"/>
+                  <a:pt x="1966" y="1632"/>
+                </a:cubicBezTo>
+                <a:cubicBezTo>
+                  <a:pt x="1684" y="1765"/>
+                  <a:pt x="1466" y="1902"/>
+                  <a:pt x="1311" y="2042"/>
+                </a:cubicBezTo>
+                <a:cubicBezTo>
+                  <a:pt x="1177" y="2168"/>
+                  <a:pt x="1111" y="2277"/>
+                  <a:pt x="1111" y="2368"/>
+                </a:cubicBezTo>
+                <a:cubicBezTo>
+                  <a:pt x="1111" y="2459"/>
+                  <a:pt x="1177" y="2568"/>
+                  <a:pt x="1311" y="2695"/>
+                </a:cubicBezTo>
+                <a:cubicBezTo>
+                  <a:pt x="1466" y="2835"/>
+                  <a:pt x="1684" y="2971"/>
+                  <a:pt x="1966" y="3105"/>
+                </a:cubicBezTo>
+                <a:cubicBezTo>
+                  <a:pt x="2351" y="3287"/>
+                  <a:pt x="2807" y="3430"/>
+                  <a:pt x="3333" y="3532"/>
+                </a:cubicBezTo>
+                <a:cubicBezTo>
+                  <a:pt x="3858" y="3633"/>
+                  <a:pt x="4413" y="3684"/>
+                  <a:pt x="4999" y="3684"/>
+                </a:cubicBezTo>
+              </a:path>
+            </a:pathLst>
+          </a:custGeom>
+          <a:solidFill>
+            <a:srgbClr val="2B4C9B">
+              <a:alpha val="100000"/>
+            </a:srgbClr>
+          </a:solidFill>
+          <a:ln>
+            <a:solidFill>
+              <a:srgbClr val="C00000"/>
+            </a:solidFill>
+            <a:headEnd type="none"/>
+            <a:tailEnd type="none"/>
+          </a:ln>
+        </p:spPr>
+      </p:sp>
+      <p:sp>
+        <p:nvSpPr>
+          <p:cNvPr id="121" name="TextBox 10"/>
+          <p:cNvSpPr txBox="1"/>
+          <p:nvPr/>
+        </p:nvSpPr>
+        <p:spPr>
+          <a:xfrm>
+            <a:off x="794692" y="1455678"/>
+            <a:ext cx="1733266" cy="190500"/>
+          </a:xfrm>
+          <a:prstGeom prst="rect">
+            <a:avLst/>
+          </a:prstGeom>
+          <a:ln>
+            <a:headEnd type="none"/>
+            <a:tailEnd type="none"/>
+          </a:ln>
+        </p:spPr>
+        <p:txBody>
+          <a:bodyPr vert="horz" wrap="none" lIns="0" tIns="0" rIns="0" bIns="0" rtlCol="0" anchor="t" anchorCtr="0"/>
+          <a:lstStyle/>
+          <a:p>
+            <a:pPr algn="l">
+              <a:defRPr/>
+            </a:pPr>
+            <a:r>
+              <a:rPr lang="en-US" sz="1300" b="1" i="0" strike="noStrike">
+                <a:solidFill>
+                  <a:srgbClr val="1A1A1A">
+                    <a:alpha val="100000"/>
+                  </a:srgbClr>
+                </a:solidFill>
+                <a:latin typeface="微软雅黑" panose="020B0503020204020204" pitchFamily="34" charset="-122"/>
+                <a:ea typeface="微软雅黑" panose="020B0503020204020204" pitchFamily="34" charset="-122"/>
+                <a:cs typeface="Source Han Serif CN" panose="02020400000000000000" charset="-122"/>
+              </a:rPr>
+              <a:t>本体</a:t>
+            </a:r>
+            <a:r>
+              <a:rPr lang="zh-CN" altLang="en-US" sz="1300" b="1" i="0" strike="noStrike">
+                <a:solidFill>
+                  <a:srgbClr val="1A1A1A">
+                    <a:alpha val="100000"/>
+                  </a:srgbClr>
+                </a:solidFill>
+                <a:latin typeface="微软雅黑" panose="020B0503020204020204" pitchFamily="34" charset="-122"/>
+                <a:ea typeface="微软雅黑" panose="020B0503020204020204" pitchFamily="34" charset="-122"/>
+                <a:cs typeface="Source Han Serif CN" panose="02020400000000000000" charset="-122"/>
+              </a:rPr>
+              <a:t>开发</a:t>
+            </a:r>
+            <a:endParaRPr lang="zh-CN" altLang="en-US" sz="1300" b="1" i="0" strike="noStrike">
+              <a:solidFill>
+                <a:srgbClr val="1A1A1A">
+                  <a:alpha val="100000"/>
+                </a:srgbClr>
+              </a:solidFill>
+              <a:latin typeface="微软雅黑" panose="020B0503020204020204" pitchFamily="34" charset="-122"/>
+              <a:ea typeface="微软雅黑" panose="020B0503020204020204" pitchFamily="34" charset="-122"/>
+              <a:cs typeface="Source Han Serif CN" panose="02020400000000000000" charset="-122"/>
+            </a:endParaRPr>
+          </a:p>
+        </p:txBody>
+      </p:sp>
+      <p:sp>
+        <p:nvSpPr>
+          <p:cNvPr id="122" name="AutoShape 19"/>
+          <p:cNvSpPr/>
+          <p:nvPr/>
+        </p:nvSpPr>
+        <p:spPr>
+          <a:xfrm>
+            <a:off x="6208747" y="1317883"/>
+            <a:ext cx="5561209" cy="4847332"/>
+          </a:xfrm>
+          <a:prstGeom prst="rect">
+            <a:avLst/>
+          </a:prstGeom>
+          <a:solidFill>
+            <a:schemeClr val="bg1"/>
+          </a:solidFill>
+          <a:ln w="9525">
+            <a:solidFill>
+              <a:srgbClr val="D4CEC4">
+                <a:alpha val="100000"/>
+              </a:srgbClr>
+            </a:solidFill>
+            <a:prstDash val="solid"/>
+            <a:headEnd type="none"/>
+            <a:tailEnd type="none"/>
+          </a:ln>
+        </p:spPr>
+      </p:sp>
+      <p:sp>
+        <p:nvSpPr>
+          <p:cNvPr id="123" name="AutoShape 20"/>
+          <p:cNvSpPr/>
+          <p:nvPr/>
+        </p:nvSpPr>
+        <p:spPr>
+          <a:xfrm>
+            <a:off x="6208747" y="1317883"/>
+            <a:ext cx="5561209" cy="9525"/>
+          </a:xfrm>
+          <a:prstGeom prst="line">
+            <a:avLst/>
+          </a:prstGeom>
+          <a:ln w="28575">
+            <a:solidFill>
+              <a:srgbClr val="C00000">
+                <a:alpha val="100000"/>
+              </a:srgbClr>
+            </a:solidFill>
+            <a:prstDash val="solid"/>
+            <a:headEnd type="none"/>
+            <a:tailEnd type="none"/>
+          </a:ln>
+        </p:spPr>
+      </p:sp>
+      <p:grpSp>
+        <p:nvGrpSpPr>
+          <p:cNvPr id="117" name="组合 116"/>
+          <p:cNvGrpSpPr/>
+          <p:nvPr/>
+        </p:nvGrpSpPr>
+        <p:grpSpPr>
+          <a:xfrm>
+            <a:off x="509270" y="1886585"/>
+            <a:ext cx="5296535" cy="4135120"/>
+            <a:chOff x="124" y="2971"/>
+            <a:chExt cx="8341" cy="6512"/>
+          </a:xfrm>
+        </p:grpSpPr>
+        <p:grpSp>
+          <p:nvGrpSpPr>
+            <p:cNvPr id="116" name="组合 115"/>
+            <p:cNvGrpSpPr/>
+            <p:nvPr/>
+          </p:nvGrpSpPr>
+          <p:grpSpPr>
+            <a:xfrm>
+              <a:off x="124" y="2971"/>
+              <a:ext cx="1072" cy="6510"/>
+              <a:chOff x="124" y="2971"/>
+              <a:chExt cx="878" cy="6510"/>
+            </a:xfrm>
+          </p:grpSpPr>
+          <p:grpSp>
+            <p:nvGrpSpPr>
+              <p:cNvPr id="95" name="组合 94"/>
+              <p:cNvGrpSpPr/>
+              <p:nvPr/>
+            </p:nvGrpSpPr>
+            <p:grpSpPr>
+              <a:xfrm rot="0">
+                <a:off x="124" y="2971"/>
+                <a:ext cx="878" cy="1492"/>
+                <a:chOff x="193" y="2971"/>
+                <a:chExt cx="966" cy="552"/>
+              </a:xfrm>
+            </p:grpSpPr>
+            <p:sp>
+              <p:nvSpPr>
+                <p:cNvPr id="12" name="AutoShape 8"/>
+                <p:cNvSpPr/>
+                <p:nvPr/>
+              </p:nvSpPr>
+              <p:spPr>
+                <a:xfrm>
+                  <a:off x="193" y="2971"/>
+                  <a:ext cx="966" cy="553"/>
+                </a:xfrm>
+                <a:prstGeom prst="roundRect">
+                  <a:avLst>
+                    <a:gd name="adj" fmla="val 7692"/>
+                  </a:avLst>
+                </a:prstGeom>
+                <a:solidFill>
+                  <a:srgbClr val="008CDC">
+                    <a:alpha val="25000"/>
+                  </a:srgbClr>
+                </a:solidFill>
+                <a:ln w="12700" cap="flat" cmpd="sng">
+                  <a:solidFill>
+                    <a:srgbClr val="008CDC">
+                      <a:alpha val="70000"/>
+                    </a:srgbClr>
+                  </a:solidFill>
+                  <a:prstDash val="solid"/>
+                  <a:round/>
+                </a:ln>
+              </p:spPr>
+              <p:txBody>
+                <a:bodyPr vert="horz" wrap="square" lIns="63500" tIns="63500" rIns="63500" bIns="63500" rtlCol="0" anchor="ctr"/>
+                <a:lstStyle/>
+                <a:p>
+                  <a:pPr algn="ctr">
+                    <a:defRPr/>
+                  </a:pPr>
+                  <a:endParaRPr sz="1800">
+                    <a:solidFill>
+                      <a:schemeClr val="tx1"/>
+                    </a:solidFill>
+                  </a:endParaRPr>
+                </a:p>
+              </p:txBody>
+            </p:sp>
+            <p:sp>
+              <p:nvSpPr>
+                <p:cNvPr id="13" name="AutoShape 9"/>
+                <p:cNvSpPr/>
+                <p:nvPr/>
+              </p:nvSpPr>
+              <p:spPr>
+                <a:xfrm>
+                  <a:off x="193" y="3063"/>
+                  <a:ext cx="966" cy="369"/>
+                </a:xfrm>
+                <a:prstGeom prst="rect">
+                  <a:avLst/>
+                </a:prstGeom>
+                <a:noFill/>
+                <a:ln w="12700" cap="flat" cmpd="sng">
+                  <a:noFill/>
+                  <a:prstDash val="solid"/>
+                  <a:round/>
+                </a:ln>
+              </p:spPr>
+              <p:txBody>
+                <a:bodyPr vert="horz" wrap="square" lIns="0" tIns="0" rIns="0" bIns="0" rtlCol="0" anchor="ctr" anchorCtr="0"/>
+                <a:lstStyle/>
+                <a:p>
+                  <a:pPr marL="0" indent="0" algn="ctr">
+                    <a:lnSpc>
+                      <a:spcPct val="108000"/>
+                    </a:lnSpc>
+                    <a:defRPr/>
+                  </a:pPr>
+                  <a:r>
+                    <a:rPr lang="zh-CN" altLang="en-US" sz="1200" b="1" i="0" u="none" strike="noStrike">
+                      <a:solidFill>
+                        <a:schemeClr val="tx1"/>
+                      </a:solidFill>
+                      <a:latin typeface="Noto Sans SC" panose="020B0200000000000000" charset="-122"/>
+                      <a:ea typeface="Noto Sans SC" panose="020B0200000000000000" charset="-122"/>
+                      <a:cs typeface="Noto Sans SC" panose="020B0200000000000000" charset="-122"/>
+                      <a:sym typeface="Noto Sans SC" panose="020B0200000000000000" charset="-122"/>
+                    </a:rPr>
+                    <a:t>本体</a:t>
+                  </a:r>
+                  <a:endParaRPr lang="zh-CN" altLang="en-US" sz="1200" b="1" i="0" u="none" strike="noStrike">
+                    <a:solidFill>
+                      <a:schemeClr val="tx1"/>
+                    </a:solidFill>
+                    <a:latin typeface="Noto Sans SC" panose="020B0200000000000000" charset="-122"/>
+                    <a:ea typeface="Noto Sans SC" panose="020B0200000000000000" charset="-122"/>
+                    <a:cs typeface="Noto Sans SC" panose="020B0200000000000000" charset="-122"/>
+                    <a:sym typeface="Noto Sans SC" panose="020B0200000000000000" charset="-122"/>
+                  </a:endParaRPr>
+                </a:p>
+                <a:p>
+                  <a:pPr marL="0" indent="0" algn="ctr">
+                    <a:lnSpc>
+                      <a:spcPct val="108000"/>
+                    </a:lnSpc>
+                    <a:defRPr/>
+                  </a:pPr>
+                  <a:r>
+                    <a:rPr lang="zh-CN" altLang="en-US" sz="1200" b="1" i="0" u="none" strike="noStrike">
+                      <a:solidFill>
+                        <a:schemeClr val="tx1"/>
+                      </a:solidFill>
+                      <a:latin typeface="Noto Sans SC" panose="020B0200000000000000" charset="-122"/>
+                      <a:ea typeface="Noto Sans SC" panose="020B0200000000000000" charset="-122"/>
+                      <a:cs typeface="Noto Sans SC" panose="020B0200000000000000" charset="-122"/>
+                      <a:sym typeface="Noto Sans SC" panose="020B0200000000000000" charset="-122"/>
+                    </a:rPr>
+                    <a:t>设计</a:t>
+                  </a:r>
+                  <a:endParaRPr lang="zh-CN" altLang="en-US" sz="1200" b="1" i="0" u="none" strike="noStrike">
+                    <a:solidFill>
+                      <a:schemeClr val="tx1"/>
+                    </a:solidFill>
+                    <a:latin typeface="Noto Sans SC" panose="020B0200000000000000" charset="-122"/>
+                    <a:ea typeface="Noto Sans SC" panose="020B0200000000000000" charset="-122"/>
+                    <a:cs typeface="Noto Sans SC" panose="020B0200000000000000" charset="-122"/>
+                    <a:sym typeface="Noto Sans SC" panose="020B0200000000000000" charset="-122"/>
+                  </a:endParaRPr>
+                </a:p>
+              </p:txBody>
+            </p:sp>
+          </p:grpSp>
+          <p:grpSp>
+            <p:nvGrpSpPr>
+              <p:cNvPr id="100" name="组合 99"/>
+              <p:cNvGrpSpPr/>
+              <p:nvPr/>
+            </p:nvGrpSpPr>
+            <p:grpSpPr>
+              <a:xfrm rot="0">
+                <a:off x="124" y="4986"/>
+                <a:ext cx="878" cy="1551"/>
+                <a:chOff x="165" y="4701"/>
+                <a:chExt cx="966" cy="552"/>
+              </a:xfrm>
+            </p:grpSpPr>
+            <p:sp>
+              <p:nvSpPr>
+                <p:cNvPr id="34" name="AutoShape 30"/>
+                <p:cNvSpPr/>
+                <p:nvPr/>
+              </p:nvSpPr>
+              <p:spPr>
+                <a:xfrm>
+                  <a:off x="165" y="4701"/>
+                  <a:ext cx="966" cy="553"/>
+                </a:xfrm>
+                <a:prstGeom prst="roundRect">
+                  <a:avLst>
+                    <a:gd name="adj" fmla="val 7692"/>
+                  </a:avLst>
+                </a:prstGeom>
+                <a:solidFill>
+                  <a:srgbClr val="C81E28">
+                    <a:alpha val="25000"/>
+                  </a:srgbClr>
+                </a:solidFill>
+                <a:ln w="12700" cap="flat" cmpd="sng">
+                  <a:solidFill>
+                    <a:srgbClr val="C81E28">
+                      <a:alpha val="70000"/>
+                    </a:srgbClr>
+                  </a:solidFill>
+                  <a:prstDash val="solid"/>
+                  <a:round/>
+                </a:ln>
+              </p:spPr>
+              <p:txBody>
+                <a:bodyPr vert="horz" wrap="square" lIns="63500" tIns="63500" rIns="63500" bIns="63500" rtlCol="0" anchor="ctr"/>
+                <a:lstStyle/>
+                <a:p>
+                  <a:pPr algn="ctr">
+                    <a:defRPr/>
+                  </a:pPr>
+                  <a:endParaRPr sz="1800"/>
+                </a:p>
+              </p:txBody>
+            </p:sp>
+            <p:sp>
+              <p:nvSpPr>
+                <p:cNvPr id="35" name="AutoShape 31"/>
+                <p:cNvSpPr/>
+                <p:nvPr/>
+              </p:nvSpPr>
+              <p:spPr>
+                <a:xfrm>
+                  <a:off x="165" y="4794"/>
+                  <a:ext cx="966" cy="369"/>
+                </a:xfrm>
+                <a:prstGeom prst="rect">
+                  <a:avLst/>
+                </a:prstGeom>
+                <a:noFill/>
+                <a:ln w="12700" cap="flat" cmpd="sng">
+                  <a:noFill/>
+                  <a:prstDash val="solid"/>
+                  <a:round/>
+                </a:ln>
+              </p:spPr>
+              <p:txBody>
+                <a:bodyPr vert="horz" wrap="square" lIns="0" tIns="0" rIns="0" bIns="0" rtlCol="0" anchor="ctr" anchorCtr="0"/>
+                <a:lstStyle/>
+                <a:p>
+                  <a:pPr marL="0" indent="0" algn="ctr">
+                    <a:lnSpc>
+                      <a:spcPct val="108000"/>
+                    </a:lnSpc>
+                    <a:defRPr/>
+                  </a:pPr>
+                  <a:r>
+                    <a:rPr lang="zh-CN" altLang="en-US" sz="1200" b="1" i="0" u="none" strike="noStrike">
+                      <a:solidFill>
+                        <a:schemeClr val="tx1"/>
+                      </a:solidFill>
+                      <a:latin typeface="Noto Sans SC" panose="020B0200000000000000" charset="-122"/>
+                      <a:ea typeface="Noto Sans SC" panose="020B0200000000000000" charset="-122"/>
+                      <a:cs typeface="Noto Sans SC" panose="020B0200000000000000" charset="-122"/>
+                      <a:sym typeface="Noto Sans SC" panose="020B0200000000000000" charset="-122"/>
+                    </a:rPr>
+                    <a:t>本体</a:t>
+                  </a:r>
+                  <a:endParaRPr lang="en-US" sz="1200">
+                    <a:solidFill>
+                      <a:schemeClr val="tx1"/>
+                    </a:solidFill>
+                  </a:endParaRPr>
+                </a:p>
+                <a:p>
+                  <a:pPr marL="0" indent="0" algn="ctr">
+                    <a:lnSpc>
+                      <a:spcPct val="108000"/>
+                    </a:lnSpc>
+                  </a:pPr>
+                  <a:r>
+                    <a:rPr lang="zh-CN" altLang="en-US" sz="1200" b="1" i="0" u="none" strike="noStrike">
+                      <a:solidFill>
+                        <a:schemeClr val="tx1"/>
+                      </a:solidFill>
+                      <a:latin typeface="Noto Sans SC" panose="020B0200000000000000" charset="-122"/>
+                      <a:ea typeface="Noto Sans SC" panose="020B0200000000000000" charset="-122"/>
+                      <a:cs typeface="Noto Sans SC" panose="020B0200000000000000" charset="-122"/>
+                      <a:sym typeface="Noto Sans SC" panose="020B0200000000000000" charset="-122"/>
+                    </a:rPr>
+                    <a:t>建模</a:t>
+                  </a:r>
+                  <a:endParaRPr lang="zh-CN" altLang="en-US" sz="1200" b="1" i="0" u="none" strike="noStrike">
+                    <a:solidFill>
+                      <a:schemeClr val="tx1"/>
+                    </a:solidFill>
+                    <a:latin typeface="Noto Sans SC" panose="020B0200000000000000" charset="-122"/>
+                    <a:ea typeface="Noto Sans SC" panose="020B0200000000000000" charset="-122"/>
+                    <a:cs typeface="Noto Sans SC" panose="020B0200000000000000" charset="-122"/>
+                    <a:sym typeface="Noto Sans SC" panose="020B0200000000000000" charset="-122"/>
+                  </a:endParaRPr>
+                </a:p>
+              </p:txBody>
+            </p:sp>
+          </p:grpSp>
+          <p:grpSp>
+            <p:nvGrpSpPr>
+              <p:cNvPr id="101" name="组合 100"/>
+              <p:cNvGrpSpPr/>
+              <p:nvPr/>
+            </p:nvGrpSpPr>
+            <p:grpSpPr>
+              <a:xfrm rot="0">
+                <a:off x="124" y="6933"/>
+                <a:ext cx="878" cy="1442"/>
+                <a:chOff x="124" y="6826"/>
+                <a:chExt cx="966" cy="552"/>
+              </a:xfrm>
+            </p:grpSpPr>
+            <p:sp>
+              <p:nvSpPr>
+                <p:cNvPr id="56" name="AutoShape 52"/>
+                <p:cNvSpPr/>
+                <p:nvPr/>
+              </p:nvSpPr>
+              <p:spPr>
+                <a:xfrm>
+                  <a:off x="124" y="6826"/>
+                  <a:ext cx="966" cy="553"/>
+                </a:xfrm>
+                <a:prstGeom prst="roundRect">
+                  <a:avLst>
+                    <a:gd name="adj" fmla="val 7692"/>
+                  </a:avLst>
+                </a:prstGeom>
+                <a:solidFill>
+                  <a:srgbClr val="00AAB4">
+                    <a:alpha val="25000"/>
+                  </a:srgbClr>
+                </a:solidFill>
+                <a:ln w="12700" cap="flat" cmpd="sng">
+                  <a:solidFill>
+                    <a:srgbClr val="00AAB4">
+                      <a:alpha val="70000"/>
+                    </a:srgbClr>
+                  </a:solidFill>
+                  <a:prstDash val="solid"/>
+                  <a:round/>
+                </a:ln>
+              </p:spPr>
+              <p:txBody>
+                <a:bodyPr vert="horz" wrap="square" lIns="63500" tIns="63500" rIns="63500" bIns="63500" rtlCol="0" anchor="ctr"/>
+                <a:lstStyle/>
+                <a:p>
+                  <a:pPr algn="ctr">
+                    <a:defRPr/>
+                  </a:pPr>
+                  <a:endParaRPr sz="1800"/>
+                </a:p>
+              </p:txBody>
+            </p:sp>
+            <p:sp>
+              <p:nvSpPr>
+                <p:cNvPr id="57" name="AutoShape 53"/>
+                <p:cNvSpPr/>
+                <p:nvPr/>
+              </p:nvSpPr>
+              <p:spPr>
+                <a:xfrm>
+                  <a:off x="124" y="6918"/>
+                  <a:ext cx="966" cy="369"/>
+                </a:xfrm>
+                <a:prstGeom prst="rect">
+                  <a:avLst/>
+                </a:prstGeom>
+                <a:noFill/>
+                <a:ln w="12700" cap="flat" cmpd="sng">
+                  <a:noFill/>
+                  <a:prstDash val="solid"/>
+                  <a:round/>
+                </a:ln>
+              </p:spPr>
+              <p:txBody>
+                <a:bodyPr vert="horz" wrap="square" lIns="0" tIns="0" rIns="0" bIns="0" rtlCol="0" anchor="ctr" anchorCtr="0"/>
+                <a:lstStyle/>
+                <a:p>
+                  <a:pPr marL="0" indent="0" algn="ctr">
+                    <a:lnSpc>
+                      <a:spcPct val="108000"/>
+                    </a:lnSpc>
+                    <a:defRPr/>
+                  </a:pPr>
+                  <a:r>
+                    <a:rPr lang="zh-CN" altLang="en-US" sz="1200" b="1" i="0" u="none" strike="noStrike">
+                      <a:solidFill>
+                        <a:schemeClr val="tx1"/>
+                      </a:solidFill>
+                      <a:latin typeface="Noto Sans SC" panose="020B0200000000000000" charset="-122"/>
+                      <a:ea typeface="Noto Sans SC" panose="020B0200000000000000" charset="-122"/>
+                      <a:cs typeface="Noto Sans SC" panose="020B0200000000000000" charset="-122"/>
+                      <a:sym typeface="Noto Sans SC" panose="020B0200000000000000" charset="-122"/>
+                    </a:rPr>
+                    <a:t>数模</a:t>
+                  </a:r>
+                  <a:endParaRPr lang="zh-CN" altLang="en-US" sz="1200" b="1" i="0" u="none" strike="noStrike">
+                    <a:solidFill>
+                      <a:schemeClr val="tx1"/>
+                    </a:solidFill>
+                    <a:latin typeface="Noto Sans SC" panose="020B0200000000000000" charset="-122"/>
+                    <a:ea typeface="Noto Sans SC" panose="020B0200000000000000" charset="-122"/>
+                    <a:cs typeface="Noto Sans SC" panose="020B0200000000000000" charset="-122"/>
+                    <a:sym typeface="Noto Sans SC" panose="020B0200000000000000" charset="-122"/>
+                  </a:endParaRPr>
+                </a:p>
+                <a:p>
+                  <a:pPr marL="0" indent="0" algn="ctr">
+                    <a:lnSpc>
+                      <a:spcPct val="108000"/>
+                    </a:lnSpc>
+                    <a:defRPr/>
+                  </a:pPr>
+                  <a:r>
+                    <a:rPr lang="zh-CN" altLang="en-US" sz="1200" b="1" i="0" u="none" strike="noStrike">
+                      <a:solidFill>
+                        <a:schemeClr val="tx1"/>
+                      </a:solidFill>
+                      <a:latin typeface="Noto Sans SC" panose="020B0200000000000000" charset="-122"/>
+                      <a:ea typeface="Noto Sans SC" panose="020B0200000000000000" charset="-122"/>
+                      <a:cs typeface="Noto Sans SC" panose="020B0200000000000000" charset="-122"/>
+                      <a:sym typeface="Noto Sans SC" panose="020B0200000000000000" charset="-122"/>
+                    </a:rPr>
+                    <a:t>分离</a:t>
+                  </a:r>
+                  <a:endParaRPr lang="zh-CN" altLang="en-US" sz="1200" b="1" i="0" u="none" strike="noStrike">
+                    <a:solidFill>
+                      <a:schemeClr val="tx1"/>
+                    </a:solidFill>
+                    <a:latin typeface="Noto Sans SC" panose="020B0200000000000000" charset="-122"/>
+                    <a:ea typeface="Noto Sans SC" panose="020B0200000000000000" charset="-122"/>
+                    <a:cs typeface="Noto Sans SC" panose="020B0200000000000000" charset="-122"/>
+                    <a:sym typeface="Noto Sans SC" panose="020B0200000000000000" charset="-122"/>
+                  </a:endParaRPr>
+                </a:p>
+              </p:txBody>
+            </p:sp>
+          </p:grpSp>
+          <p:grpSp>
+            <p:nvGrpSpPr>
+              <p:cNvPr id="97" name="组合 96"/>
+              <p:cNvGrpSpPr/>
+              <p:nvPr/>
+            </p:nvGrpSpPr>
+            <p:grpSpPr>
+              <a:xfrm rot="0">
+                <a:off x="124" y="8839"/>
+                <a:ext cx="878" cy="643"/>
+                <a:chOff x="221" y="8803"/>
+                <a:chExt cx="966" cy="552"/>
+              </a:xfrm>
+            </p:grpSpPr>
+            <p:sp>
+              <p:nvSpPr>
+                <p:cNvPr id="78" name="AutoShape 74"/>
+                <p:cNvSpPr/>
+                <p:nvPr/>
+              </p:nvSpPr>
+              <p:spPr>
+                <a:xfrm>
+                  <a:off x="221" y="8803"/>
+                  <a:ext cx="966" cy="553"/>
+                </a:xfrm>
+                <a:prstGeom prst="roundRect">
+                  <a:avLst>
+                    <a:gd name="adj" fmla="val 7692"/>
+                  </a:avLst>
+                </a:prstGeom>
+                <a:solidFill>
+                  <a:srgbClr val="DCAA32">
+                    <a:alpha val="25000"/>
+                  </a:srgbClr>
+                </a:solidFill>
+                <a:ln w="12700" cap="flat" cmpd="sng">
+                  <a:solidFill>
+                    <a:srgbClr val="DCAA32">
+                      <a:alpha val="70000"/>
+                    </a:srgbClr>
+                  </a:solidFill>
+                  <a:prstDash val="solid"/>
+                  <a:round/>
+                </a:ln>
+              </p:spPr>
+              <p:txBody>
+                <a:bodyPr vert="horz" wrap="square" lIns="63500" tIns="63500" rIns="63500" bIns="63500" rtlCol="0" anchor="ctr"/>
+                <a:lstStyle/>
+                <a:p>
+                  <a:pPr algn="ctr">
+                    <a:defRPr/>
+                  </a:pPr>
+                  <a:endParaRPr sz="1800"/>
+                </a:p>
+              </p:txBody>
+            </p:sp>
+            <p:sp>
+              <p:nvSpPr>
+                <p:cNvPr id="79" name="AutoShape 75"/>
+                <p:cNvSpPr/>
+                <p:nvPr/>
+              </p:nvSpPr>
+              <p:spPr>
+                <a:xfrm>
+                  <a:off x="221" y="8895"/>
+                  <a:ext cx="966" cy="369"/>
+                </a:xfrm>
+                <a:prstGeom prst="rect">
+                  <a:avLst/>
+                </a:prstGeom>
+                <a:noFill/>
+                <a:ln w="12700" cap="flat" cmpd="sng">
+                  <a:noFill/>
+                  <a:prstDash val="solid"/>
+                  <a:round/>
+                </a:ln>
+              </p:spPr>
+              <p:txBody>
+                <a:bodyPr vert="horz" wrap="square" lIns="0" tIns="0" rIns="0" bIns="0" rtlCol="0" anchor="ctr" anchorCtr="0"/>
+                <a:lstStyle/>
+                <a:p>
+                  <a:pPr marL="0" indent="0" algn="ctr">
+                    <a:lnSpc>
+                      <a:spcPct val="108000"/>
+                    </a:lnSpc>
+                    <a:defRPr/>
+                  </a:pPr>
+                  <a:r>
+                    <a:rPr lang="en-US" sz="1200" b="1" i="0" u="none" strike="noStrike">
+                      <a:solidFill>
+                        <a:schemeClr val="tx1"/>
+                      </a:solidFill>
+                      <a:latin typeface="Noto Sans SC" panose="020B0200000000000000" charset="-122"/>
+                      <a:ea typeface="Noto Sans SC" panose="020B0200000000000000" charset="-122"/>
+                      <a:cs typeface="Noto Sans SC" panose="020B0200000000000000" charset="-122"/>
+                      <a:sym typeface="Noto Sans SC" panose="020B0200000000000000" charset="-122"/>
+                    </a:rPr>
+                    <a:t>完善</a:t>
+                  </a:r>
+                  <a:endParaRPr lang="en-US" sz="1200">
+                    <a:solidFill>
+                      <a:schemeClr val="tx1"/>
+                    </a:solidFill>
+                  </a:endParaRPr>
+                </a:p>
+                <a:p>
+                  <a:pPr marL="0" indent="0" algn="ctr">
+                    <a:lnSpc>
+                      <a:spcPct val="108000"/>
+                    </a:lnSpc>
+                  </a:pPr>
+                  <a:r>
+                    <a:rPr lang="en-US" sz="1200" b="1" i="0" u="none" strike="noStrike">
+                      <a:solidFill>
+                        <a:schemeClr val="tx1"/>
+                      </a:solidFill>
+                      <a:latin typeface="Noto Sans SC" panose="020B0200000000000000" charset="-122"/>
+                      <a:ea typeface="Noto Sans SC" panose="020B0200000000000000" charset="-122"/>
+                      <a:cs typeface="Noto Sans SC" panose="020B0200000000000000" charset="-122"/>
+                      <a:sym typeface="Noto Sans SC" panose="020B0200000000000000" charset="-122"/>
+                    </a:rPr>
+                    <a:t>交付</a:t>
+                  </a:r>
+                  <a:endParaRPr lang="en-US" sz="1200" b="1" i="0" u="none" strike="noStrike">
+                    <a:solidFill>
+                      <a:schemeClr val="tx1"/>
+                    </a:solidFill>
+                    <a:latin typeface="Noto Sans SC" panose="020B0200000000000000" charset="-122"/>
+                    <a:ea typeface="Noto Sans SC" panose="020B0200000000000000" charset="-122"/>
+                    <a:cs typeface="Noto Sans SC" panose="020B0200000000000000" charset="-122"/>
+                    <a:sym typeface="Noto Sans SC" panose="020B0200000000000000" charset="-122"/>
+                  </a:endParaRPr>
+                </a:p>
+              </p:txBody>
+            </p:sp>
+          </p:grpSp>
+        </p:grpSp>
+        <p:grpSp>
+          <p:nvGrpSpPr>
+            <p:cNvPr id="115" name="组合 114"/>
+            <p:cNvGrpSpPr/>
+            <p:nvPr/>
+          </p:nvGrpSpPr>
+          <p:grpSpPr>
+            <a:xfrm>
+              <a:off x="1787" y="2971"/>
+              <a:ext cx="6678" cy="6512"/>
+              <a:chOff x="1787" y="2971"/>
+              <a:chExt cx="7184" cy="6512"/>
+            </a:xfrm>
+          </p:grpSpPr>
+          <p:sp>
+            <p:nvSpPr>
+              <p:cNvPr id="14" name="AutoShape 10"/>
+              <p:cNvSpPr/>
+              <p:nvPr/>
+            </p:nvSpPr>
+            <p:spPr>
+              <a:xfrm>
+                <a:off x="1849" y="2971"/>
+                <a:ext cx="3460" cy="644"/>
+              </a:xfrm>
+              <a:prstGeom prst="roundRect">
+                <a:avLst>
+                  <a:gd name="adj" fmla="val 8333"/>
+                </a:avLst>
+              </a:prstGeom>
+              <a:solidFill>
+                <a:srgbClr val="FFFFFF">
+                  <a:alpha val="5000"/>
+                </a:srgbClr>
+              </a:solidFill>
+              <a:ln w="12700" cap="flat" cmpd="sng">
+                <a:solidFill>
+                  <a:srgbClr val="008CDC">
+                    <a:alpha val="50000"/>
+                  </a:srgbClr>
+                </a:solidFill>
+                <a:prstDash val="solid"/>
+                <a:round/>
+              </a:ln>
+            </p:spPr>
+            <p:txBody>
+              <a:bodyPr vert="horz" wrap="square" lIns="63500" tIns="63500" rIns="63500" bIns="63500" rtlCol="0" anchor="ctr"/>
+              <a:lstStyle/>
+              <a:p>
+                <a:pPr algn="ctr">
+                  <a:defRPr/>
+                </a:pPr>
+                <a:endParaRPr sz="1800"/>
+              </a:p>
+            </p:txBody>
+          </p:sp>
+          <p:sp>
+            <p:nvSpPr>
+              <p:cNvPr id="15" name="AutoShape 11"/>
+              <p:cNvSpPr/>
+              <p:nvPr/>
+            </p:nvSpPr>
+            <p:spPr>
+              <a:xfrm>
+                <a:off x="2017" y="3025"/>
+                <a:ext cx="3123" cy="214"/>
+              </a:xfrm>
+              <a:prstGeom prst="rect">
+                <a:avLst/>
+              </a:prstGeom>
+              <a:noFill/>
+              <a:ln w="12700" cap="flat" cmpd="sng">
+                <a:noFill/>
+                <a:prstDash val="solid"/>
+                <a:round/>
+              </a:ln>
+            </p:spPr>
+            <p:txBody>
+              <a:bodyPr vert="horz" wrap="square" lIns="0" tIns="0" rIns="0" bIns="0" rtlCol="0" anchor="ctr" anchorCtr="0"/>
+              <a:lstStyle/>
+              <a:p>
+                <a:pPr marL="0" indent="0" algn="l">
+                  <a:lnSpc>
+                    <a:spcPct val="125000"/>
+                  </a:lnSpc>
+                  <a:defRPr/>
+                </a:pPr>
+                <a:r>
+                  <a:rPr lang="en-US" sz="1400" b="1" i="0" u="none" strike="noStrike">
+                    <a:solidFill>
+                      <a:srgbClr val="50BEFF"/>
+                    </a:solidFill>
+                    <a:latin typeface="Noto Sans SC" panose="020B0200000000000000" charset="-122"/>
+                    <a:ea typeface="Noto Sans SC" panose="020B0200000000000000" charset="-122"/>
+                    <a:cs typeface="Noto Sans SC" panose="020B0200000000000000" charset="-122"/>
+                    <a:sym typeface="Noto Sans SC" panose="020B0200000000000000" charset="-122"/>
+                  </a:rPr>
+                  <a:t>01</a:t>
+                </a:r>
+                <a:r>
+                  <a:rPr lang="en-US" sz="900" b="1" i="0" u="none" strike="noStrike">
+                    <a:solidFill>
+                      <a:srgbClr val="FFFFFF"/>
+                    </a:solidFill>
+                    <a:latin typeface="Noto Sans SC" panose="020B0200000000000000" charset="-122"/>
+                    <a:ea typeface="Noto Sans SC" panose="020B0200000000000000" charset="-122"/>
+                    <a:cs typeface="Noto Sans SC" panose="020B0200000000000000" charset="-122"/>
+                    <a:sym typeface="Noto Sans SC" panose="020B0200000000000000" charset="-122"/>
+                  </a:rPr>
+                  <a:t> 场景选择</a:t>
+                </a:r>
+                <a:endParaRPr lang="en-US" sz="900" b="1" i="0" u="none" strike="noStrike">
+                  <a:solidFill>
+                    <a:srgbClr val="FFFFFF"/>
+                  </a:solidFill>
+                  <a:latin typeface="Noto Sans SC" panose="020B0200000000000000" charset="-122"/>
+                  <a:ea typeface="Noto Sans SC" panose="020B0200000000000000" charset="-122"/>
+                  <a:cs typeface="Noto Sans SC" panose="020B0200000000000000" charset="-122"/>
+                  <a:sym typeface="Noto Sans SC" panose="020B0200000000000000" charset="-122"/>
+                </a:endParaRPr>
+              </a:p>
+            </p:txBody>
+          </p:sp>
+          <p:sp>
+            <p:nvSpPr>
+              <p:cNvPr id="16" name="AutoShape 12"/>
+              <p:cNvSpPr/>
+              <p:nvPr/>
+            </p:nvSpPr>
+            <p:spPr>
+              <a:xfrm>
+                <a:off x="2017" y="3275"/>
+                <a:ext cx="3123" cy="286"/>
+              </a:xfrm>
+              <a:prstGeom prst="rect">
+                <a:avLst/>
+              </a:prstGeom>
+              <a:noFill/>
+              <a:ln w="12700" cap="flat" cmpd="sng">
+                <a:noFill/>
+                <a:prstDash val="solid"/>
+                <a:round/>
+              </a:ln>
+            </p:spPr>
+            <p:txBody>
+              <a:bodyPr vert="horz" wrap="square" lIns="0" tIns="0" rIns="0" bIns="0" rtlCol="0" anchor="ctr" anchorCtr="0"/>
+              <a:lstStyle/>
+              <a:p>
+                <a:pPr marL="0" indent="0" algn="l">
+                  <a:lnSpc>
+                    <a:spcPct val="108000"/>
+                  </a:lnSpc>
+                  <a:defRPr/>
+                </a:pPr>
+                <a:r>
+                  <a:rPr lang="en-US" sz="900" b="1" i="0" u="none" strike="noStrike">
+                    <a:solidFill>
+                      <a:schemeClr val="tx1"/>
+                    </a:solidFill>
+                    <a:latin typeface="Noto Sans SC" panose="020B0200000000000000" charset="-122"/>
+                    <a:ea typeface="Noto Sans SC" panose="020B0200000000000000" charset="-122"/>
+                    <a:cs typeface="Noto Sans SC" panose="020B0200000000000000" charset="-122"/>
+                    <a:sym typeface="Noto Sans SC" panose="020B0200000000000000" charset="-122"/>
+                  </a:rPr>
+                  <a:t>明确业务场景与目标范围</a:t>
+                </a:r>
+                <a:endParaRPr lang="en-US" sz="900" b="1" i="0" u="none" strike="noStrike">
+                  <a:solidFill>
+                    <a:schemeClr val="tx1"/>
+                  </a:solidFill>
+                  <a:latin typeface="Noto Sans SC" panose="020B0200000000000000" charset="-122"/>
+                  <a:ea typeface="Noto Sans SC" panose="020B0200000000000000" charset="-122"/>
+                  <a:cs typeface="Noto Sans SC" panose="020B0200000000000000" charset="-122"/>
+                  <a:sym typeface="Noto Sans SC" panose="020B0200000000000000" charset="-122"/>
+                </a:endParaRPr>
+              </a:p>
+            </p:txBody>
+          </p:sp>
+          <p:sp>
+            <p:nvSpPr>
+              <p:cNvPr id="17" name="AutoShape 13"/>
+              <p:cNvSpPr/>
+              <p:nvPr/>
+            </p:nvSpPr>
+            <p:spPr>
+              <a:xfrm>
+                <a:off x="5511" y="2971"/>
+                <a:ext cx="3460" cy="644"/>
+              </a:xfrm>
+              <a:prstGeom prst="roundRect">
+                <a:avLst>
+                  <a:gd name="adj" fmla="val 8333"/>
+                </a:avLst>
+              </a:prstGeom>
+              <a:solidFill>
+                <a:srgbClr val="FFFFFF">
+                  <a:alpha val="5000"/>
+                </a:srgbClr>
+              </a:solidFill>
+              <a:ln w="12700" cap="flat" cmpd="sng">
+                <a:solidFill>
+                  <a:srgbClr val="008CDC">
+                    <a:alpha val="50000"/>
+                  </a:srgbClr>
+                </a:solidFill>
+                <a:prstDash val="solid"/>
+                <a:round/>
+              </a:ln>
+            </p:spPr>
+            <p:txBody>
+              <a:bodyPr vert="horz" wrap="square" lIns="63500" tIns="63500" rIns="63500" bIns="63500" rtlCol="0" anchor="ctr"/>
+              <a:lstStyle/>
+              <a:p>
+                <a:pPr algn="ctr">
+                  <a:defRPr/>
+                </a:pPr>
+                <a:endParaRPr sz="1800"/>
+              </a:p>
+            </p:txBody>
+          </p:sp>
+          <p:sp>
+            <p:nvSpPr>
+              <p:cNvPr id="18" name="AutoShape 14"/>
+              <p:cNvSpPr/>
+              <p:nvPr/>
+            </p:nvSpPr>
+            <p:spPr>
+              <a:xfrm>
+                <a:off x="5680" y="3025"/>
+                <a:ext cx="3123" cy="214"/>
+              </a:xfrm>
+              <a:prstGeom prst="rect">
+                <a:avLst/>
+              </a:prstGeom>
+              <a:noFill/>
+              <a:ln w="12700" cap="flat" cmpd="sng">
+                <a:noFill/>
+                <a:prstDash val="solid"/>
+                <a:round/>
+              </a:ln>
+            </p:spPr>
+            <p:txBody>
+              <a:bodyPr vert="horz" wrap="square" lIns="0" tIns="0" rIns="0" bIns="0" rtlCol="0" anchor="ctr" anchorCtr="0"/>
+              <a:lstStyle/>
+              <a:p>
+                <a:pPr marL="0" indent="0" algn="l">
+                  <a:lnSpc>
+                    <a:spcPct val="125000"/>
+                  </a:lnSpc>
+                  <a:defRPr/>
+                </a:pPr>
+                <a:r>
+                  <a:rPr lang="en-US" sz="1400" b="1" i="0" u="none" strike="noStrike">
+                    <a:solidFill>
+                      <a:srgbClr val="50BEFF"/>
+                    </a:solidFill>
+                    <a:latin typeface="Noto Sans SC" panose="020B0200000000000000" charset="-122"/>
+                    <a:ea typeface="Noto Sans SC" panose="020B0200000000000000" charset="-122"/>
+                    <a:cs typeface="Noto Sans SC" panose="020B0200000000000000" charset="-122"/>
+                    <a:sym typeface="Noto Sans SC" panose="020B0200000000000000" charset="-122"/>
+                  </a:rPr>
+                  <a:t>02</a:t>
+                </a:r>
+                <a:r>
+                  <a:rPr lang="en-US" sz="900" b="1" i="0" u="none" strike="noStrike">
+                    <a:solidFill>
+                      <a:srgbClr val="FFFFFF"/>
+                    </a:solidFill>
+                    <a:latin typeface="Noto Sans SC" panose="020B0200000000000000" charset="-122"/>
+                    <a:ea typeface="Noto Sans SC" panose="020B0200000000000000" charset="-122"/>
+                    <a:cs typeface="Noto Sans SC" panose="020B0200000000000000" charset="-122"/>
+                    <a:sym typeface="Noto Sans SC" panose="020B0200000000000000" charset="-122"/>
+                  </a:rPr>
+                  <a:t> 流程构建</a:t>
+                </a:r>
+                <a:endParaRPr lang="en-US" sz="900" b="1" i="0" u="none" strike="noStrike">
+                  <a:solidFill>
+                    <a:srgbClr val="FFFFFF"/>
+                  </a:solidFill>
+                  <a:latin typeface="Noto Sans SC" panose="020B0200000000000000" charset="-122"/>
+                  <a:ea typeface="Noto Sans SC" panose="020B0200000000000000" charset="-122"/>
+                  <a:cs typeface="Noto Sans SC" panose="020B0200000000000000" charset="-122"/>
+                  <a:sym typeface="Noto Sans SC" panose="020B0200000000000000" charset="-122"/>
+                </a:endParaRPr>
+              </a:p>
+            </p:txBody>
+          </p:sp>
+          <p:sp>
+            <p:nvSpPr>
+              <p:cNvPr id="19" name="AutoShape 15"/>
+              <p:cNvSpPr/>
+              <p:nvPr/>
+            </p:nvSpPr>
+            <p:spPr>
+              <a:xfrm>
+                <a:off x="5680" y="3275"/>
+                <a:ext cx="3123" cy="286"/>
+              </a:xfrm>
+              <a:prstGeom prst="rect">
+                <a:avLst/>
+              </a:prstGeom>
+              <a:noFill/>
+              <a:ln w="12700" cap="flat" cmpd="sng">
+                <a:noFill/>
+                <a:prstDash val="solid"/>
+                <a:round/>
+              </a:ln>
+            </p:spPr>
+            <p:txBody>
+              <a:bodyPr vert="horz" wrap="square" lIns="0" tIns="0" rIns="0" bIns="0" rtlCol="0" anchor="ctr" anchorCtr="0">
+                <a:noAutofit/>
+              </a:bodyPr>
+              <a:lstStyle/>
+              <a:p>
+                <a:pPr lvl="0" algn="l">
+                  <a:lnSpc>
+                    <a:spcPct val="108000"/>
+                  </a:lnSpc>
+                  <a:buClrTx/>
+                  <a:buSzTx/>
+                  <a:buFontTx/>
+                  <a:defRPr/>
+                </a:pPr>
+                <a:r>
+                  <a:rPr lang="en-US" sz="900" b="1">
+                    <a:solidFill>
+                      <a:schemeClr val="tx1"/>
+                    </a:solidFill>
+                    <a:latin typeface="Noto Sans SC" panose="020B0200000000000000" charset="-122"/>
+                    <a:ea typeface="Noto Sans SC" panose="020B0200000000000000" charset="-122"/>
+                    <a:cs typeface="Noto Sans SC" panose="020B0200000000000000" charset="-122"/>
+                    <a:sym typeface="Noto Sans SC" panose="020B0200000000000000" charset="-122"/>
+                  </a:rPr>
+                  <a:t>梳理端到端业务流程</a:t>
+                </a:r>
+                <a:endParaRPr lang="en-US" sz="900" b="1">
+                  <a:solidFill>
+                    <a:schemeClr val="tx1"/>
+                  </a:solidFill>
+                  <a:latin typeface="Noto Sans SC" panose="020B0200000000000000" charset="-122"/>
+                  <a:ea typeface="Noto Sans SC" panose="020B0200000000000000" charset="-122"/>
+                  <a:cs typeface="Noto Sans SC" panose="020B0200000000000000" charset="-122"/>
+                  <a:sym typeface="Noto Sans SC" panose="020B0200000000000000" charset="-122"/>
+                </a:endParaRPr>
+              </a:p>
+            </p:txBody>
+          </p:sp>
+          <p:sp>
+            <p:nvSpPr>
+              <p:cNvPr id="20" name="AutoShape 16"/>
+              <p:cNvSpPr/>
+              <p:nvPr/>
+            </p:nvSpPr>
+            <p:spPr>
+              <a:xfrm>
+                <a:off x="1824" y="3820"/>
+                <a:ext cx="3460" cy="644"/>
+              </a:xfrm>
+              <a:prstGeom prst="roundRect">
+                <a:avLst>
+                  <a:gd name="adj" fmla="val 8333"/>
+                </a:avLst>
+              </a:prstGeom>
+              <a:solidFill>
+                <a:srgbClr val="FFFFFF">
+                  <a:alpha val="5000"/>
+                </a:srgbClr>
+              </a:solidFill>
+              <a:ln w="12700" cap="flat" cmpd="sng">
+                <a:solidFill>
+                  <a:srgbClr val="008CDC">
+                    <a:alpha val="50000"/>
+                  </a:srgbClr>
+                </a:solidFill>
+                <a:prstDash val="solid"/>
+                <a:round/>
+              </a:ln>
+            </p:spPr>
+            <p:txBody>
+              <a:bodyPr vert="horz" wrap="square" lIns="63500" tIns="63500" rIns="63500" bIns="63500" rtlCol="0" anchor="ctr"/>
+              <a:lstStyle/>
+              <a:p>
+                <a:pPr algn="ctr">
+                  <a:defRPr/>
+                </a:pPr>
+                <a:endParaRPr sz="1800"/>
+              </a:p>
+            </p:txBody>
+          </p:sp>
+          <p:sp>
+            <p:nvSpPr>
+              <p:cNvPr id="21" name="AutoShape 17"/>
+              <p:cNvSpPr/>
+              <p:nvPr/>
+            </p:nvSpPr>
+            <p:spPr>
+              <a:xfrm>
+                <a:off x="1993" y="3874"/>
+                <a:ext cx="3123" cy="214"/>
+              </a:xfrm>
+              <a:prstGeom prst="rect">
+                <a:avLst/>
+              </a:prstGeom>
+              <a:noFill/>
+              <a:ln w="12700" cap="flat" cmpd="sng">
+                <a:noFill/>
+                <a:prstDash val="solid"/>
+                <a:round/>
+              </a:ln>
+            </p:spPr>
+            <p:txBody>
+              <a:bodyPr vert="horz" wrap="square" lIns="0" tIns="0" rIns="0" bIns="0" rtlCol="0" anchor="ctr" anchorCtr="0"/>
+              <a:lstStyle/>
+              <a:p>
+                <a:pPr marL="0" indent="0" algn="l">
+                  <a:lnSpc>
+                    <a:spcPct val="125000"/>
+                  </a:lnSpc>
+                  <a:defRPr/>
+                </a:pPr>
+                <a:r>
+                  <a:rPr lang="en-US" sz="1400" b="1" i="0" u="none" strike="noStrike">
+                    <a:solidFill>
+                      <a:srgbClr val="50BEFF"/>
+                    </a:solidFill>
+                    <a:latin typeface="Noto Sans SC" panose="020B0200000000000000" charset="-122"/>
+                    <a:ea typeface="Noto Sans SC" panose="020B0200000000000000" charset="-122"/>
+                    <a:cs typeface="Noto Sans SC" panose="020B0200000000000000" charset="-122"/>
+                    <a:sym typeface="Noto Sans SC" panose="020B0200000000000000" charset="-122"/>
+                  </a:rPr>
+                  <a:t>03</a:t>
+                </a:r>
+                <a:r>
+                  <a:rPr lang="en-US" sz="900" b="1" i="0" u="none" strike="noStrike">
+                    <a:solidFill>
+                      <a:srgbClr val="FFFFFF"/>
+                    </a:solidFill>
+                    <a:latin typeface="Noto Sans SC" panose="020B0200000000000000" charset="-122"/>
+                    <a:ea typeface="Noto Sans SC" panose="020B0200000000000000" charset="-122"/>
+                    <a:cs typeface="Noto Sans SC" panose="020B0200000000000000" charset="-122"/>
+                    <a:sym typeface="Noto Sans SC" panose="020B0200000000000000" charset="-122"/>
+                  </a:rPr>
+                  <a:t> 顶层设计</a:t>
+                </a:r>
+                <a:endParaRPr lang="en-US" sz="900" b="1" i="0" u="none" strike="noStrike">
+                  <a:solidFill>
+                    <a:srgbClr val="FFFFFF"/>
+                  </a:solidFill>
+                  <a:latin typeface="Noto Sans SC" panose="020B0200000000000000" charset="-122"/>
+                  <a:ea typeface="Noto Sans SC" panose="020B0200000000000000" charset="-122"/>
+                  <a:cs typeface="Noto Sans SC" panose="020B0200000000000000" charset="-122"/>
+                  <a:sym typeface="Noto Sans SC" panose="020B0200000000000000" charset="-122"/>
+                </a:endParaRPr>
+              </a:p>
+            </p:txBody>
+          </p:sp>
+          <p:sp>
+            <p:nvSpPr>
+              <p:cNvPr id="22" name="AutoShape 18"/>
+              <p:cNvSpPr/>
+              <p:nvPr/>
+            </p:nvSpPr>
+            <p:spPr>
+              <a:xfrm>
+                <a:off x="1993" y="4124"/>
+                <a:ext cx="3123" cy="286"/>
+              </a:xfrm>
+              <a:prstGeom prst="rect">
+                <a:avLst/>
+              </a:prstGeom>
+              <a:noFill/>
+              <a:ln w="12700" cap="flat" cmpd="sng">
+                <a:noFill/>
+                <a:prstDash val="solid"/>
+                <a:round/>
+              </a:ln>
+            </p:spPr>
+            <p:txBody>
+              <a:bodyPr vert="horz" wrap="square" lIns="0" tIns="0" rIns="0" bIns="0" rtlCol="0" anchor="ctr" anchorCtr="0">
+                <a:noAutofit/>
+              </a:bodyPr>
+              <a:lstStyle/>
+              <a:p>
+                <a:pPr lvl="0" algn="l">
+                  <a:lnSpc>
+                    <a:spcPct val="108000"/>
+                  </a:lnSpc>
+                  <a:buClrTx/>
+                  <a:buSzTx/>
+                  <a:buFontTx/>
+                  <a:defRPr/>
+                </a:pPr>
+                <a:r>
+                  <a:rPr lang="en-US" sz="900" b="1">
+                    <a:solidFill>
+                      <a:schemeClr val="tx1"/>
+                    </a:solidFill>
+                    <a:latin typeface="Noto Sans SC" panose="020B0200000000000000" charset="-122"/>
+                    <a:ea typeface="Noto Sans SC" panose="020B0200000000000000" charset="-122"/>
+                    <a:cs typeface="Noto Sans SC" panose="020B0200000000000000" charset="-122"/>
+                    <a:sym typeface="Noto Sans SC" panose="020B0200000000000000" charset="-122"/>
+                  </a:rPr>
+                  <a:t>定义本体顶层架构框架</a:t>
+                </a:r>
+                <a:endParaRPr lang="en-US" sz="900" b="1">
+                  <a:solidFill>
+                    <a:schemeClr val="tx1"/>
+                  </a:solidFill>
+                  <a:latin typeface="Noto Sans SC" panose="020B0200000000000000" charset="-122"/>
+                  <a:ea typeface="Noto Sans SC" panose="020B0200000000000000" charset="-122"/>
+                  <a:cs typeface="Noto Sans SC" panose="020B0200000000000000" charset="-122"/>
+                  <a:sym typeface="Noto Sans SC" panose="020B0200000000000000" charset="-122"/>
+                </a:endParaRPr>
+              </a:p>
+            </p:txBody>
+          </p:sp>
+          <p:sp>
+            <p:nvSpPr>
+              <p:cNvPr id="23" name="AutoShape 19"/>
+              <p:cNvSpPr/>
+              <p:nvPr/>
+            </p:nvSpPr>
+            <p:spPr>
+              <a:xfrm>
+                <a:off x="5486" y="3820"/>
+                <a:ext cx="3460" cy="644"/>
+              </a:xfrm>
+              <a:prstGeom prst="roundRect">
+                <a:avLst>
+                  <a:gd name="adj" fmla="val 8333"/>
+                </a:avLst>
+              </a:prstGeom>
+              <a:solidFill>
+                <a:srgbClr val="FFFFFF">
+                  <a:alpha val="5000"/>
+                </a:srgbClr>
+              </a:solidFill>
+              <a:ln w="12700" cap="flat" cmpd="sng">
+                <a:solidFill>
+                  <a:srgbClr val="008CDC">
+                    <a:alpha val="50000"/>
+                  </a:srgbClr>
+                </a:solidFill>
+                <a:prstDash val="solid"/>
+                <a:round/>
+              </a:ln>
+            </p:spPr>
+            <p:txBody>
+              <a:bodyPr vert="horz" wrap="square" lIns="63500" tIns="63500" rIns="63500" bIns="63500" rtlCol="0" anchor="ctr"/>
+              <a:lstStyle/>
+              <a:p>
+                <a:pPr algn="ctr">
+                  <a:defRPr/>
+                </a:pPr>
+                <a:endParaRPr sz="1800"/>
+              </a:p>
+            </p:txBody>
+          </p:sp>
+          <p:sp>
+            <p:nvSpPr>
+              <p:cNvPr id="24" name="AutoShape 20"/>
+              <p:cNvSpPr/>
+              <p:nvPr/>
+            </p:nvSpPr>
+            <p:spPr>
+              <a:xfrm>
+                <a:off x="5655" y="3874"/>
+                <a:ext cx="3123" cy="214"/>
+              </a:xfrm>
+              <a:prstGeom prst="rect">
+                <a:avLst/>
+              </a:prstGeom>
+              <a:noFill/>
+              <a:ln w="12700" cap="flat" cmpd="sng">
+                <a:noFill/>
+                <a:prstDash val="solid"/>
+                <a:round/>
+              </a:ln>
+            </p:spPr>
+            <p:txBody>
+              <a:bodyPr vert="horz" wrap="square" lIns="0" tIns="0" rIns="0" bIns="0" rtlCol="0" anchor="ctr" anchorCtr="0"/>
+              <a:lstStyle/>
+              <a:p>
+                <a:pPr marL="0" indent="0" algn="l">
+                  <a:lnSpc>
+                    <a:spcPct val="125000"/>
+                  </a:lnSpc>
+                  <a:defRPr/>
+                </a:pPr>
+                <a:r>
+                  <a:rPr lang="en-US" sz="1400" b="1" i="0" u="none" strike="noStrike">
+                    <a:solidFill>
+                      <a:srgbClr val="50BEFF"/>
+                    </a:solidFill>
+                    <a:latin typeface="Noto Sans SC" panose="020B0200000000000000" charset="-122"/>
+                    <a:ea typeface="Noto Sans SC" panose="020B0200000000000000" charset="-122"/>
+                    <a:cs typeface="Noto Sans SC" panose="020B0200000000000000" charset="-122"/>
+                    <a:sym typeface="Noto Sans SC" panose="020B0200000000000000" charset="-122"/>
+                  </a:rPr>
+                  <a:t>04</a:t>
+                </a:r>
+                <a:r>
+                  <a:rPr lang="en-US" sz="900" b="1" i="0" u="none" strike="noStrike">
+                    <a:solidFill>
+                      <a:srgbClr val="FFFFFF"/>
+                    </a:solidFill>
+                    <a:latin typeface="Noto Sans SC" panose="020B0200000000000000" charset="-122"/>
+                    <a:ea typeface="Noto Sans SC" panose="020B0200000000000000" charset="-122"/>
+                    <a:cs typeface="Noto Sans SC" panose="020B0200000000000000" charset="-122"/>
+                    <a:sym typeface="Noto Sans SC" panose="020B0200000000000000" charset="-122"/>
+                  </a:rPr>
+                  <a:t> 本体设计</a:t>
+                </a:r>
+                <a:endParaRPr lang="en-US" sz="900" b="1" i="0" u="none" strike="noStrike">
+                  <a:solidFill>
+                    <a:srgbClr val="FFFFFF"/>
+                  </a:solidFill>
+                  <a:latin typeface="Noto Sans SC" panose="020B0200000000000000" charset="-122"/>
+                  <a:ea typeface="Noto Sans SC" panose="020B0200000000000000" charset="-122"/>
+                  <a:cs typeface="Noto Sans SC" panose="020B0200000000000000" charset="-122"/>
+                  <a:sym typeface="Noto Sans SC" panose="020B0200000000000000" charset="-122"/>
+                </a:endParaRPr>
+              </a:p>
+            </p:txBody>
+          </p:sp>
+          <p:sp>
+            <p:nvSpPr>
+              <p:cNvPr id="25" name="AutoShape 21"/>
+              <p:cNvSpPr/>
+              <p:nvPr/>
+            </p:nvSpPr>
+            <p:spPr>
+              <a:xfrm>
+                <a:off x="5655" y="4124"/>
+                <a:ext cx="3123" cy="286"/>
+              </a:xfrm>
+              <a:prstGeom prst="rect">
+                <a:avLst/>
+              </a:prstGeom>
+              <a:noFill/>
+              <a:ln w="12700" cap="flat" cmpd="sng">
+                <a:noFill/>
+                <a:prstDash val="solid"/>
+                <a:round/>
+              </a:ln>
+            </p:spPr>
+            <p:txBody>
+              <a:bodyPr vert="horz" wrap="square" lIns="0" tIns="0" rIns="0" bIns="0" rtlCol="0" anchor="ctr" anchorCtr="0">
+                <a:noAutofit/>
+              </a:bodyPr>
+              <a:lstStyle/>
+              <a:p>
+                <a:pPr lvl="0" algn="l">
+                  <a:lnSpc>
+                    <a:spcPct val="108000"/>
+                  </a:lnSpc>
+                  <a:buClrTx/>
+                  <a:buSzTx/>
+                  <a:buFontTx/>
+                  <a:defRPr/>
+                </a:pPr>
+                <a:r>
+                  <a:rPr lang="en-US" sz="900" b="1">
+                    <a:solidFill>
+                      <a:schemeClr val="tx1"/>
+                    </a:solidFill>
+                    <a:latin typeface="Noto Sans SC" panose="020B0200000000000000" charset="-122"/>
+                    <a:ea typeface="Noto Sans SC" panose="020B0200000000000000" charset="-122"/>
+                    <a:cs typeface="Noto Sans SC" panose="020B0200000000000000" charset="-122"/>
+                    <a:sym typeface="Noto Sans SC" panose="020B0200000000000000" charset="-122"/>
+                  </a:rPr>
+                  <a:t>设计核心类、属性与关系</a:t>
+                </a:r>
+                <a:endParaRPr lang="en-US" sz="900" b="1">
+                  <a:solidFill>
+                    <a:schemeClr val="tx1"/>
+                  </a:solidFill>
+                  <a:latin typeface="Noto Sans SC" panose="020B0200000000000000" charset="-122"/>
+                  <a:ea typeface="Noto Sans SC" panose="020B0200000000000000" charset="-122"/>
+                  <a:cs typeface="Noto Sans SC" panose="020B0200000000000000" charset="-122"/>
+                  <a:sym typeface="Noto Sans SC" panose="020B0200000000000000" charset="-122"/>
+                </a:endParaRPr>
+              </a:p>
+            </p:txBody>
+          </p:sp>
+          <p:sp>
+            <p:nvSpPr>
+              <p:cNvPr id="36" name="AutoShape 32"/>
+              <p:cNvSpPr/>
+              <p:nvPr/>
+            </p:nvSpPr>
+            <p:spPr>
+              <a:xfrm>
+                <a:off x="1824" y="4986"/>
+                <a:ext cx="3460" cy="644"/>
+              </a:xfrm>
+              <a:prstGeom prst="roundRect">
+                <a:avLst>
+                  <a:gd name="adj" fmla="val 8333"/>
+                </a:avLst>
+              </a:prstGeom>
+              <a:solidFill>
+                <a:srgbClr val="FFFFFF">
+                  <a:alpha val="5000"/>
+                </a:srgbClr>
+              </a:solidFill>
+              <a:ln w="12700" cap="flat" cmpd="sng">
+                <a:solidFill>
+                  <a:srgbClr val="C81E28">
+                    <a:alpha val="50000"/>
+                  </a:srgbClr>
+                </a:solidFill>
+                <a:prstDash val="solid"/>
+                <a:round/>
+              </a:ln>
+            </p:spPr>
+            <p:txBody>
+              <a:bodyPr vert="horz" wrap="square" lIns="63500" tIns="63500" rIns="63500" bIns="63500" rtlCol="0" anchor="ctr"/>
+              <a:lstStyle/>
+              <a:p>
+                <a:pPr algn="ctr">
+                  <a:defRPr/>
+                </a:pPr>
+                <a:endParaRPr sz="1800"/>
+              </a:p>
+            </p:txBody>
+          </p:sp>
+          <p:sp>
+            <p:nvSpPr>
+              <p:cNvPr id="37" name="AutoShape 33"/>
+              <p:cNvSpPr/>
+              <p:nvPr/>
+            </p:nvSpPr>
+            <p:spPr>
+              <a:xfrm>
+                <a:off x="1992" y="5040"/>
+                <a:ext cx="3123" cy="214"/>
+              </a:xfrm>
+              <a:prstGeom prst="rect">
+                <a:avLst/>
+              </a:prstGeom>
+              <a:noFill/>
+              <a:ln w="12700" cap="flat" cmpd="sng">
+                <a:noFill/>
+                <a:prstDash val="solid"/>
+                <a:round/>
+              </a:ln>
+            </p:spPr>
+            <p:txBody>
+              <a:bodyPr vert="horz" wrap="square" lIns="0" tIns="0" rIns="0" bIns="0" rtlCol="0" anchor="ctr" anchorCtr="0"/>
+              <a:lstStyle/>
+              <a:p>
+                <a:pPr marL="0" indent="0" algn="l">
+                  <a:lnSpc>
+                    <a:spcPct val="125000"/>
+                  </a:lnSpc>
+                  <a:defRPr/>
+                </a:pPr>
+                <a:r>
+                  <a:rPr lang="en-US" sz="1400" b="1" i="0" u="none" strike="noStrike">
+                    <a:solidFill>
+                      <a:srgbClr val="FF787D"/>
+                    </a:solidFill>
+                    <a:latin typeface="Noto Sans SC" panose="020B0200000000000000" charset="-122"/>
+                    <a:ea typeface="Noto Sans SC" panose="020B0200000000000000" charset="-122"/>
+                    <a:cs typeface="Noto Sans SC" panose="020B0200000000000000" charset="-122"/>
+                    <a:sym typeface="Noto Sans SC" panose="020B0200000000000000" charset="-122"/>
+                  </a:rPr>
+                  <a:t>05</a:t>
+                </a:r>
+                <a:r>
+                  <a:rPr lang="en-US" sz="900" b="1" i="0" u="none" strike="noStrike">
+                    <a:solidFill>
+                      <a:srgbClr val="FFFFFF"/>
+                    </a:solidFill>
+                    <a:latin typeface="Noto Sans SC" panose="020B0200000000000000" charset="-122"/>
+                    <a:ea typeface="Noto Sans SC" panose="020B0200000000000000" charset="-122"/>
+                    <a:cs typeface="Noto Sans SC" panose="020B0200000000000000" charset="-122"/>
+                    <a:sym typeface="Noto Sans SC" panose="020B0200000000000000" charset="-122"/>
+                  </a:rPr>
+                  <a:t> 生成BPMN</a:t>
+                </a:r>
+                <a:endParaRPr lang="en-US" sz="900" b="1" i="0" u="none" strike="noStrike">
+                  <a:solidFill>
+                    <a:srgbClr val="FFFFFF"/>
+                  </a:solidFill>
+                  <a:latin typeface="Noto Sans SC" panose="020B0200000000000000" charset="-122"/>
+                  <a:ea typeface="Noto Sans SC" panose="020B0200000000000000" charset="-122"/>
+                  <a:cs typeface="Noto Sans SC" panose="020B0200000000000000" charset="-122"/>
+                  <a:sym typeface="Noto Sans SC" panose="020B0200000000000000" charset="-122"/>
+                </a:endParaRPr>
+              </a:p>
+            </p:txBody>
+          </p:sp>
+          <p:sp>
+            <p:nvSpPr>
+              <p:cNvPr id="38" name="AutoShape 34"/>
+              <p:cNvSpPr/>
+              <p:nvPr/>
+            </p:nvSpPr>
+            <p:spPr>
+              <a:xfrm>
+                <a:off x="1992" y="5291"/>
+                <a:ext cx="3123" cy="286"/>
+              </a:xfrm>
+              <a:prstGeom prst="rect">
+                <a:avLst/>
+              </a:prstGeom>
+              <a:noFill/>
+              <a:ln w="12700" cap="flat" cmpd="sng">
+                <a:noFill/>
+                <a:prstDash val="solid"/>
+                <a:round/>
+              </a:ln>
+            </p:spPr>
+            <p:txBody>
+              <a:bodyPr vert="horz" wrap="square" lIns="0" tIns="0" rIns="0" bIns="0" rtlCol="0" anchor="ctr" anchorCtr="0">
+                <a:noAutofit/>
+              </a:bodyPr>
+              <a:lstStyle/>
+              <a:p>
+                <a:pPr lvl="0" algn="l">
+                  <a:lnSpc>
+                    <a:spcPct val="108000"/>
+                  </a:lnSpc>
+                  <a:buClrTx/>
+                  <a:buSzTx/>
+                  <a:buFontTx/>
+                  <a:defRPr/>
+                </a:pPr>
+                <a:r>
+                  <a:rPr lang="en-US" sz="900" b="1">
+                    <a:solidFill>
+                      <a:schemeClr val="tx1"/>
+                    </a:solidFill>
+                    <a:latin typeface="Noto Sans SC" panose="020B0200000000000000" charset="-122"/>
+                    <a:ea typeface="Noto Sans SC" panose="020B0200000000000000" charset="-122"/>
+                    <a:cs typeface="Noto Sans SC" panose="020B0200000000000000" charset="-122"/>
+                    <a:sym typeface="Noto Sans SC" panose="020B0200000000000000" charset="-122"/>
+                  </a:rPr>
+                  <a:t>按业务流程生成BPMN模型</a:t>
+                </a:r>
+                <a:endParaRPr lang="en-US" sz="900" b="1">
+                  <a:solidFill>
+                    <a:schemeClr val="tx1"/>
+                  </a:solidFill>
+                  <a:latin typeface="Noto Sans SC" panose="020B0200000000000000" charset="-122"/>
+                  <a:ea typeface="Noto Sans SC" panose="020B0200000000000000" charset="-122"/>
+                  <a:cs typeface="Noto Sans SC" panose="020B0200000000000000" charset="-122"/>
+                  <a:sym typeface="Noto Sans SC" panose="020B0200000000000000" charset="-122"/>
+                </a:endParaRPr>
+              </a:p>
+            </p:txBody>
+          </p:sp>
+          <p:sp>
+            <p:nvSpPr>
+              <p:cNvPr id="39" name="AutoShape 35"/>
+              <p:cNvSpPr/>
+              <p:nvPr/>
+            </p:nvSpPr>
+            <p:spPr>
+              <a:xfrm>
+                <a:off x="5486" y="4986"/>
+                <a:ext cx="3460" cy="644"/>
+              </a:xfrm>
+              <a:prstGeom prst="roundRect">
+                <a:avLst>
+                  <a:gd name="adj" fmla="val 8333"/>
+                </a:avLst>
+              </a:prstGeom>
+              <a:solidFill>
+                <a:srgbClr val="FFFFFF">
+                  <a:alpha val="5000"/>
+                </a:srgbClr>
+              </a:solidFill>
+              <a:ln w="12700" cap="flat" cmpd="sng">
+                <a:solidFill>
+                  <a:srgbClr val="C81E28">
+                    <a:alpha val="50000"/>
+                  </a:srgbClr>
+                </a:solidFill>
+                <a:prstDash val="solid"/>
+                <a:round/>
+              </a:ln>
+            </p:spPr>
+            <p:txBody>
+              <a:bodyPr vert="horz" wrap="square" lIns="63500" tIns="63500" rIns="63500" bIns="63500" rtlCol="0" anchor="ctr"/>
+              <a:lstStyle/>
+              <a:p>
+                <a:pPr algn="ctr">
+                  <a:defRPr/>
+                </a:pPr>
+                <a:endParaRPr sz="1800"/>
+              </a:p>
+            </p:txBody>
+          </p:sp>
+          <p:sp>
+            <p:nvSpPr>
+              <p:cNvPr id="40" name="AutoShape 36"/>
+              <p:cNvSpPr/>
+              <p:nvPr/>
+            </p:nvSpPr>
+            <p:spPr>
+              <a:xfrm>
+                <a:off x="5655" y="5040"/>
+                <a:ext cx="3123" cy="214"/>
+              </a:xfrm>
+              <a:prstGeom prst="rect">
+                <a:avLst/>
+              </a:prstGeom>
+              <a:noFill/>
+              <a:ln w="12700" cap="flat" cmpd="sng">
+                <a:noFill/>
+                <a:prstDash val="solid"/>
+                <a:round/>
+              </a:ln>
+            </p:spPr>
+            <p:txBody>
+              <a:bodyPr vert="horz" wrap="square" lIns="0" tIns="0" rIns="0" bIns="0" rtlCol="0" anchor="ctr" anchorCtr="0"/>
+              <a:lstStyle/>
+              <a:p>
+                <a:pPr marL="0" indent="0" algn="l">
+                  <a:lnSpc>
+                    <a:spcPct val="125000"/>
+                  </a:lnSpc>
+                  <a:defRPr/>
+                </a:pPr>
+                <a:r>
+                  <a:rPr lang="en-US" sz="1400" b="1" i="0" u="none" strike="noStrike">
+                    <a:solidFill>
+                      <a:srgbClr val="FF787D"/>
+                    </a:solidFill>
+                    <a:latin typeface="Noto Sans SC" panose="020B0200000000000000" charset="-122"/>
+                    <a:ea typeface="Noto Sans SC" panose="020B0200000000000000" charset="-122"/>
+                    <a:cs typeface="Noto Sans SC" panose="020B0200000000000000" charset="-122"/>
+                    <a:sym typeface="Noto Sans SC" panose="020B0200000000000000" charset="-122"/>
+                  </a:rPr>
+                  <a:t>06</a:t>
+                </a:r>
+                <a:r>
+                  <a:rPr lang="en-US" sz="900" b="1" i="0" u="none" strike="noStrike">
+                    <a:solidFill>
+                      <a:srgbClr val="FFFFFF"/>
+                    </a:solidFill>
+                    <a:latin typeface="Noto Sans SC" panose="020B0200000000000000" charset="-122"/>
+                    <a:ea typeface="Noto Sans SC" panose="020B0200000000000000" charset="-122"/>
+                    <a:cs typeface="Noto Sans SC" panose="020B0200000000000000" charset="-122"/>
+                    <a:sym typeface="Noto Sans SC" panose="020B0200000000000000" charset="-122"/>
+                  </a:rPr>
+                  <a:t> 步骤本体设计</a:t>
+                </a:r>
+                <a:endParaRPr lang="en-US" sz="900" b="1" i="0" u="none" strike="noStrike">
+                  <a:solidFill>
+                    <a:srgbClr val="FFFFFF"/>
+                  </a:solidFill>
+                  <a:latin typeface="Noto Sans SC" panose="020B0200000000000000" charset="-122"/>
+                  <a:ea typeface="Noto Sans SC" panose="020B0200000000000000" charset="-122"/>
+                  <a:cs typeface="Noto Sans SC" panose="020B0200000000000000" charset="-122"/>
+                  <a:sym typeface="Noto Sans SC" panose="020B0200000000000000" charset="-122"/>
+                </a:endParaRPr>
+              </a:p>
+            </p:txBody>
+          </p:sp>
+          <p:sp>
+            <p:nvSpPr>
+              <p:cNvPr id="41" name="AutoShape 37"/>
+              <p:cNvSpPr/>
+              <p:nvPr/>
+            </p:nvSpPr>
+            <p:spPr>
+              <a:xfrm>
+                <a:off x="5655" y="5291"/>
+                <a:ext cx="3123" cy="286"/>
+              </a:xfrm>
+              <a:prstGeom prst="rect">
+                <a:avLst/>
+              </a:prstGeom>
+              <a:noFill/>
+              <a:ln w="12700" cap="flat" cmpd="sng">
+                <a:noFill/>
+                <a:prstDash val="solid"/>
+                <a:round/>
+              </a:ln>
+            </p:spPr>
+            <p:txBody>
+              <a:bodyPr vert="horz" wrap="square" lIns="0" tIns="0" rIns="0" bIns="0" rtlCol="0" anchor="ctr" anchorCtr="0">
+                <a:noAutofit/>
+              </a:bodyPr>
+              <a:lstStyle/>
+              <a:p>
+                <a:pPr lvl="0" algn="l">
+                  <a:lnSpc>
+                    <a:spcPct val="108000"/>
+                  </a:lnSpc>
+                  <a:buClrTx/>
+                  <a:buSzTx/>
+                  <a:buFontTx/>
+                  <a:defRPr/>
+                </a:pPr>
+                <a:r>
+                  <a:rPr lang="en-US" sz="900" b="1">
+                    <a:solidFill>
+                      <a:schemeClr val="tx1"/>
+                    </a:solidFill>
+                    <a:latin typeface="Noto Sans SC" panose="020B0200000000000000" charset="-122"/>
+                    <a:ea typeface="Noto Sans SC" panose="020B0200000000000000" charset="-122"/>
+                    <a:cs typeface="Noto Sans SC" panose="020B0200000000000000" charset="-122"/>
+                    <a:sym typeface="Noto Sans SC" panose="020B0200000000000000" charset="-122"/>
+                  </a:rPr>
+                  <a:t>逐步骤设计TBox（单文件）</a:t>
+                </a:r>
+                <a:endParaRPr lang="en-US" sz="900" b="1">
+                  <a:solidFill>
+                    <a:schemeClr val="tx1"/>
+                  </a:solidFill>
+                  <a:latin typeface="Noto Sans SC" panose="020B0200000000000000" charset="-122"/>
+                  <a:ea typeface="Noto Sans SC" panose="020B0200000000000000" charset="-122"/>
+                  <a:cs typeface="Noto Sans SC" panose="020B0200000000000000" charset="-122"/>
+                  <a:sym typeface="Noto Sans SC" panose="020B0200000000000000" charset="-122"/>
+                </a:endParaRPr>
+              </a:p>
+            </p:txBody>
+          </p:sp>
+          <p:sp>
+            <p:nvSpPr>
+              <p:cNvPr id="42" name="AutoShape 38"/>
+              <p:cNvSpPr/>
+              <p:nvPr/>
+            </p:nvSpPr>
+            <p:spPr>
+              <a:xfrm>
+                <a:off x="1823" y="5893"/>
+                <a:ext cx="3460" cy="644"/>
+              </a:xfrm>
+              <a:prstGeom prst="roundRect">
+                <a:avLst>
+                  <a:gd name="adj" fmla="val 8333"/>
+                </a:avLst>
+              </a:prstGeom>
+              <a:solidFill>
+                <a:srgbClr val="FFFFFF">
+                  <a:alpha val="5000"/>
+                </a:srgbClr>
+              </a:solidFill>
+              <a:ln w="12700" cap="flat" cmpd="sng">
+                <a:solidFill>
+                  <a:srgbClr val="C81E28">
+                    <a:alpha val="50000"/>
+                  </a:srgbClr>
+                </a:solidFill>
+                <a:prstDash val="solid"/>
+                <a:round/>
+              </a:ln>
+            </p:spPr>
+            <p:txBody>
+              <a:bodyPr vert="horz" wrap="square" lIns="63500" tIns="63500" rIns="63500" bIns="63500" rtlCol="0" anchor="ctr"/>
+              <a:lstStyle/>
+              <a:p>
+                <a:pPr algn="ctr">
+                  <a:defRPr/>
+                </a:pPr>
+                <a:endParaRPr sz="1800"/>
+              </a:p>
+            </p:txBody>
+          </p:sp>
+          <p:sp>
+            <p:nvSpPr>
+              <p:cNvPr id="43" name="AutoShape 39"/>
+              <p:cNvSpPr/>
+              <p:nvPr/>
+            </p:nvSpPr>
+            <p:spPr>
+              <a:xfrm>
+                <a:off x="1992" y="5948"/>
+                <a:ext cx="3123" cy="214"/>
+              </a:xfrm>
+              <a:prstGeom prst="rect">
+                <a:avLst/>
+              </a:prstGeom>
+              <a:noFill/>
+              <a:ln w="12700" cap="flat" cmpd="sng">
+                <a:noFill/>
+                <a:prstDash val="solid"/>
+                <a:round/>
+              </a:ln>
+            </p:spPr>
+            <p:txBody>
+              <a:bodyPr vert="horz" wrap="square" lIns="0" tIns="0" rIns="0" bIns="0" rtlCol="0" anchor="ctr" anchorCtr="0"/>
+              <a:lstStyle/>
+              <a:p>
+                <a:pPr marL="0" indent="0" algn="l">
+                  <a:lnSpc>
+                    <a:spcPct val="125000"/>
+                  </a:lnSpc>
+                  <a:defRPr/>
+                </a:pPr>
+                <a:r>
+                  <a:rPr lang="en-US" sz="1400" b="1" i="0" u="none" strike="noStrike">
+                    <a:solidFill>
+                      <a:srgbClr val="FF787D"/>
+                    </a:solidFill>
+                    <a:latin typeface="Noto Sans SC" panose="020B0200000000000000" charset="-122"/>
+                    <a:ea typeface="Noto Sans SC" panose="020B0200000000000000" charset="-122"/>
+                    <a:cs typeface="Noto Sans SC" panose="020B0200000000000000" charset="-122"/>
+                    <a:sym typeface="Noto Sans SC" panose="020B0200000000000000" charset="-122"/>
+                  </a:rPr>
+                  <a:t>07</a:t>
+                </a:r>
+                <a:r>
+                  <a:rPr lang="en-US" sz="900" b="1" i="0" u="none" strike="noStrike">
+                    <a:solidFill>
+                      <a:srgbClr val="FFFFFF"/>
+                    </a:solidFill>
+                    <a:latin typeface="Noto Sans SC" panose="020B0200000000000000" charset="-122"/>
+                    <a:ea typeface="Noto Sans SC" panose="020B0200000000000000" charset="-122"/>
+                    <a:cs typeface="Noto Sans SC" panose="020B0200000000000000" charset="-122"/>
+                    <a:sym typeface="Noto Sans SC" panose="020B0200000000000000" charset="-122"/>
+                  </a:rPr>
+                  <a:t> 处理程序设计</a:t>
+                </a:r>
+                <a:endParaRPr lang="en-US" sz="900" b="1" i="0" u="none" strike="noStrike">
+                  <a:solidFill>
+                    <a:srgbClr val="FFFFFF"/>
+                  </a:solidFill>
+                  <a:latin typeface="Noto Sans SC" panose="020B0200000000000000" charset="-122"/>
+                  <a:ea typeface="Noto Sans SC" panose="020B0200000000000000" charset="-122"/>
+                  <a:cs typeface="Noto Sans SC" panose="020B0200000000000000" charset="-122"/>
+                  <a:sym typeface="Noto Sans SC" panose="020B0200000000000000" charset="-122"/>
+                </a:endParaRPr>
+              </a:p>
+            </p:txBody>
+          </p:sp>
+          <p:sp>
+            <p:nvSpPr>
+              <p:cNvPr id="44" name="AutoShape 40"/>
+              <p:cNvSpPr/>
+              <p:nvPr/>
+            </p:nvSpPr>
+            <p:spPr>
+              <a:xfrm>
+                <a:off x="1992" y="6198"/>
+                <a:ext cx="3123" cy="286"/>
+              </a:xfrm>
+              <a:prstGeom prst="rect">
+                <a:avLst/>
+              </a:prstGeom>
+              <a:noFill/>
+              <a:ln w="12700" cap="flat" cmpd="sng">
+                <a:noFill/>
+                <a:prstDash val="solid"/>
+                <a:round/>
+              </a:ln>
+            </p:spPr>
+            <p:txBody>
+              <a:bodyPr vert="horz" wrap="square" lIns="0" tIns="0" rIns="0" bIns="0" rtlCol="0" anchor="ctr" anchorCtr="0">
+                <a:noAutofit/>
+              </a:bodyPr>
+              <a:lstStyle/>
+              <a:p>
+                <a:pPr lvl="0" algn="l">
+                  <a:lnSpc>
+                    <a:spcPct val="108000"/>
+                  </a:lnSpc>
+                  <a:buClrTx/>
+                  <a:buSzTx/>
+                  <a:buFontTx/>
+                  <a:defRPr/>
+                </a:pPr>
+                <a:r>
+                  <a:rPr lang="en-US" sz="900" b="1">
+                    <a:solidFill>
+                      <a:schemeClr val="tx1"/>
+                    </a:solidFill>
+                    <a:latin typeface="Noto Sans SC" panose="020B0200000000000000" charset="-122"/>
+                    <a:ea typeface="Noto Sans SC" panose="020B0200000000000000" charset="-122"/>
+                    <a:cs typeface="Noto Sans SC" panose="020B0200000000000000" charset="-122"/>
+                    <a:sym typeface="Noto Sans SC" panose="020B0200000000000000" charset="-122"/>
+                  </a:rPr>
+                  <a:t>驱动框架开发对应处理器</a:t>
+                </a:r>
+                <a:endParaRPr lang="en-US" sz="900" b="1">
+                  <a:solidFill>
+                    <a:schemeClr val="tx1"/>
+                  </a:solidFill>
+                  <a:latin typeface="Noto Sans SC" panose="020B0200000000000000" charset="-122"/>
+                  <a:ea typeface="Noto Sans SC" panose="020B0200000000000000" charset="-122"/>
+                  <a:cs typeface="Noto Sans SC" panose="020B0200000000000000" charset="-122"/>
+                  <a:sym typeface="Noto Sans SC" panose="020B0200000000000000" charset="-122"/>
+                </a:endParaRPr>
+              </a:p>
+            </p:txBody>
+          </p:sp>
+          <p:sp>
+            <p:nvSpPr>
+              <p:cNvPr id="45" name="AutoShape 41"/>
+              <p:cNvSpPr/>
+              <p:nvPr/>
+            </p:nvSpPr>
+            <p:spPr>
+              <a:xfrm>
+                <a:off x="5485" y="5893"/>
+                <a:ext cx="3460" cy="644"/>
+              </a:xfrm>
+              <a:prstGeom prst="roundRect">
+                <a:avLst>
+                  <a:gd name="adj" fmla="val 8333"/>
+                </a:avLst>
+              </a:prstGeom>
+              <a:solidFill>
+                <a:srgbClr val="FFFFFF">
+                  <a:alpha val="5000"/>
+                </a:srgbClr>
+              </a:solidFill>
+              <a:ln w="12700" cap="flat" cmpd="sng">
+                <a:solidFill>
+                  <a:srgbClr val="C81E28">
+                    <a:alpha val="50000"/>
+                  </a:srgbClr>
+                </a:solidFill>
+                <a:prstDash val="solid"/>
+                <a:round/>
+              </a:ln>
+            </p:spPr>
+            <p:txBody>
+              <a:bodyPr vert="horz" wrap="square" lIns="63500" tIns="63500" rIns="63500" bIns="63500" rtlCol="0" anchor="ctr"/>
+              <a:lstStyle/>
+              <a:p>
+                <a:pPr algn="ctr">
+                  <a:defRPr/>
+                </a:pPr>
+                <a:endParaRPr sz="1800"/>
+              </a:p>
+            </p:txBody>
+          </p:sp>
+          <p:sp>
+            <p:nvSpPr>
+              <p:cNvPr id="46" name="AutoShape 42"/>
+              <p:cNvSpPr/>
+              <p:nvPr/>
+            </p:nvSpPr>
+            <p:spPr>
+              <a:xfrm>
+                <a:off x="5654" y="5948"/>
+                <a:ext cx="3123" cy="214"/>
+              </a:xfrm>
+              <a:prstGeom prst="rect">
+                <a:avLst/>
+              </a:prstGeom>
+              <a:noFill/>
+              <a:ln w="12700" cap="flat" cmpd="sng">
+                <a:noFill/>
+                <a:prstDash val="solid"/>
+                <a:round/>
+              </a:ln>
+            </p:spPr>
+            <p:txBody>
+              <a:bodyPr vert="horz" wrap="square" lIns="0" tIns="0" rIns="0" bIns="0" rtlCol="0" anchor="ctr" anchorCtr="0"/>
+              <a:lstStyle/>
+              <a:p>
+                <a:pPr marL="0" indent="0" algn="l">
+                  <a:lnSpc>
+                    <a:spcPct val="125000"/>
+                  </a:lnSpc>
+                  <a:defRPr/>
+                </a:pPr>
+                <a:r>
+                  <a:rPr lang="en-US" sz="1400" b="1" i="0" u="none" strike="noStrike">
+                    <a:solidFill>
+                      <a:srgbClr val="FF787D"/>
+                    </a:solidFill>
+                    <a:latin typeface="Noto Sans SC" panose="020B0200000000000000" charset="-122"/>
+                    <a:ea typeface="Noto Sans SC" panose="020B0200000000000000" charset="-122"/>
+                    <a:cs typeface="Noto Sans SC" panose="020B0200000000000000" charset="-122"/>
+                    <a:sym typeface="Noto Sans SC" panose="020B0200000000000000" charset="-122"/>
+                  </a:rPr>
+                  <a:t>08</a:t>
+                </a:r>
+                <a:r>
+                  <a:rPr lang="en-US" sz="900" b="1" i="0" u="none" strike="noStrike">
+                    <a:solidFill>
+                      <a:srgbClr val="FFFFFF"/>
+                    </a:solidFill>
+                    <a:latin typeface="Noto Sans SC" panose="020B0200000000000000" charset="-122"/>
+                    <a:ea typeface="Noto Sans SC" panose="020B0200000000000000" charset="-122"/>
+                    <a:cs typeface="Noto Sans SC" panose="020B0200000000000000" charset="-122"/>
+                    <a:sym typeface="Noto Sans SC" panose="020B0200000000000000" charset="-122"/>
+                  </a:rPr>
+                  <a:t> Junit测试</a:t>
+                </a:r>
+                <a:endParaRPr lang="en-US" sz="900" b="1" i="0" u="none" strike="noStrike">
+                  <a:solidFill>
+                    <a:srgbClr val="FFFFFF"/>
+                  </a:solidFill>
+                  <a:latin typeface="Noto Sans SC" panose="020B0200000000000000" charset="-122"/>
+                  <a:ea typeface="Noto Sans SC" panose="020B0200000000000000" charset="-122"/>
+                  <a:cs typeface="Noto Sans SC" panose="020B0200000000000000" charset="-122"/>
+                  <a:sym typeface="Noto Sans SC" panose="020B0200000000000000" charset="-122"/>
+                </a:endParaRPr>
+              </a:p>
+            </p:txBody>
+          </p:sp>
+          <p:sp>
+            <p:nvSpPr>
+              <p:cNvPr id="47" name="AutoShape 43"/>
+              <p:cNvSpPr/>
+              <p:nvPr/>
+            </p:nvSpPr>
+            <p:spPr>
+              <a:xfrm>
+                <a:off x="5654" y="6198"/>
+                <a:ext cx="3123" cy="286"/>
+              </a:xfrm>
+              <a:prstGeom prst="rect">
+                <a:avLst/>
+              </a:prstGeom>
+              <a:noFill/>
+              <a:ln w="12700" cap="flat" cmpd="sng">
+                <a:noFill/>
+                <a:prstDash val="solid"/>
+                <a:round/>
+              </a:ln>
+            </p:spPr>
+            <p:txBody>
+              <a:bodyPr vert="horz" wrap="square" lIns="0" tIns="0" rIns="0" bIns="0" rtlCol="0" anchor="ctr" anchorCtr="0">
+                <a:noAutofit/>
+              </a:bodyPr>
+              <a:lstStyle/>
+              <a:p>
+                <a:pPr lvl="0" algn="l">
+                  <a:lnSpc>
+                    <a:spcPct val="108000"/>
+                  </a:lnSpc>
+                  <a:buClrTx/>
+                  <a:buSzTx/>
+                  <a:buFontTx/>
+                  <a:defRPr/>
+                </a:pPr>
+                <a:r>
+                  <a:rPr lang="en-US" sz="900" b="1">
+                    <a:solidFill>
+                      <a:schemeClr val="tx1"/>
+                    </a:solidFill>
+                    <a:latin typeface="Noto Sans SC" panose="020B0200000000000000" charset="-122"/>
+                    <a:ea typeface="Noto Sans SC" panose="020B0200000000000000" charset="-122"/>
+                    <a:cs typeface="Noto Sans SC" panose="020B0200000000000000" charset="-122"/>
+                    <a:sym typeface="Noto Sans SC" panose="020B0200000000000000" charset="-122"/>
+                  </a:rPr>
+                  <a:t>典型实例+单元测试调试</a:t>
+                </a:r>
+                <a:endParaRPr lang="en-US" sz="900" b="1">
+                  <a:solidFill>
+                    <a:schemeClr val="tx1"/>
+                  </a:solidFill>
+                  <a:latin typeface="Noto Sans SC" panose="020B0200000000000000" charset="-122"/>
+                  <a:ea typeface="Noto Sans SC" panose="020B0200000000000000" charset="-122"/>
+                  <a:cs typeface="Noto Sans SC" panose="020B0200000000000000" charset="-122"/>
+                  <a:sym typeface="Noto Sans SC" panose="020B0200000000000000" charset="-122"/>
+                </a:endParaRPr>
+              </a:p>
+            </p:txBody>
+          </p:sp>
+          <p:sp>
+            <p:nvSpPr>
+              <p:cNvPr id="58" name="AutoShape 54"/>
+              <p:cNvSpPr/>
+              <p:nvPr/>
+            </p:nvSpPr>
+            <p:spPr>
+              <a:xfrm>
+                <a:off x="1787" y="6934"/>
+                <a:ext cx="3460" cy="644"/>
+              </a:xfrm>
+              <a:prstGeom prst="roundRect">
+                <a:avLst>
+                  <a:gd name="adj" fmla="val 8333"/>
+                </a:avLst>
+              </a:prstGeom>
+              <a:solidFill>
+                <a:srgbClr val="FFFFFF">
+                  <a:alpha val="5000"/>
+                </a:srgbClr>
+              </a:solidFill>
+              <a:ln w="12700" cap="flat" cmpd="sng">
+                <a:solidFill>
+                  <a:srgbClr val="00AAB4">
+                    <a:alpha val="50000"/>
+                  </a:srgbClr>
+                </a:solidFill>
+                <a:prstDash val="solid"/>
+                <a:round/>
+              </a:ln>
+            </p:spPr>
+            <p:txBody>
+              <a:bodyPr vert="horz" wrap="square" lIns="63500" tIns="63500" rIns="63500" bIns="63500" rtlCol="0" anchor="ctr"/>
+              <a:lstStyle/>
+              <a:p>
+                <a:pPr algn="ctr">
+                  <a:defRPr/>
+                </a:pPr>
+                <a:endParaRPr sz="1800"/>
+              </a:p>
+            </p:txBody>
+          </p:sp>
+          <p:sp>
+            <p:nvSpPr>
+              <p:cNvPr id="59" name="AutoShape 55"/>
+              <p:cNvSpPr/>
+              <p:nvPr/>
+            </p:nvSpPr>
+            <p:spPr>
+              <a:xfrm>
+                <a:off x="1955" y="6988"/>
+                <a:ext cx="3123" cy="214"/>
+              </a:xfrm>
+              <a:prstGeom prst="rect">
+                <a:avLst/>
+              </a:prstGeom>
+              <a:noFill/>
+              <a:ln w="12700" cap="flat" cmpd="sng">
+                <a:noFill/>
+                <a:prstDash val="solid"/>
+                <a:round/>
+              </a:ln>
+            </p:spPr>
+            <p:txBody>
+              <a:bodyPr vert="horz" wrap="square" lIns="0" tIns="0" rIns="0" bIns="0" rtlCol="0" anchor="ctr" anchorCtr="0"/>
+              <a:lstStyle/>
+              <a:p>
+                <a:pPr marL="0" indent="0" algn="l">
+                  <a:lnSpc>
+                    <a:spcPct val="125000"/>
+                  </a:lnSpc>
+                  <a:defRPr/>
+                </a:pPr>
+                <a:r>
+                  <a:rPr lang="en-US" sz="1400" b="1" i="0" u="none" strike="noStrike">
+                    <a:solidFill>
+                      <a:srgbClr val="50D2D7"/>
+                    </a:solidFill>
+                    <a:latin typeface="Noto Sans SC" panose="020B0200000000000000" charset="-122"/>
+                    <a:ea typeface="Noto Sans SC" panose="020B0200000000000000" charset="-122"/>
+                    <a:cs typeface="Noto Sans SC" panose="020B0200000000000000" charset="-122"/>
+                    <a:sym typeface="Noto Sans SC" panose="020B0200000000000000" charset="-122"/>
+                  </a:rPr>
+                  <a:t>09</a:t>
+                </a:r>
+                <a:r>
+                  <a:rPr lang="en-US" sz="900" b="1" i="0" u="none" strike="noStrike">
+                    <a:solidFill>
+                      <a:srgbClr val="FFFFFF"/>
+                    </a:solidFill>
+                    <a:latin typeface="Noto Sans SC" panose="020B0200000000000000" charset="-122"/>
+                    <a:ea typeface="Noto Sans SC" panose="020B0200000000000000" charset="-122"/>
+                    <a:cs typeface="Noto Sans SC" panose="020B0200000000000000" charset="-122"/>
+                    <a:sym typeface="Noto Sans SC" panose="020B0200000000000000" charset="-122"/>
+                  </a:rPr>
+                  <a:t> TBox/ABox分离</a:t>
+                </a:r>
+                <a:endParaRPr lang="en-US" sz="900" b="1" i="0" u="none" strike="noStrike">
+                  <a:solidFill>
+                    <a:srgbClr val="FFFFFF"/>
+                  </a:solidFill>
+                  <a:latin typeface="Noto Sans SC" panose="020B0200000000000000" charset="-122"/>
+                  <a:ea typeface="Noto Sans SC" panose="020B0200000000000000" charset="-122"/>
+                  <a:cs typeface="Noto Sans SC" panose="020B0200000000000000" charset="-122"/>
+                  <a:sym typeface="Noto Sans SC" panose="020B0200000000000000" charset="-122"/>
+                </a:endParaRPr>
+              </a:p>
+            </p:txBody>
+          </p:sp>
+          <p:sp>
+            <p:nvSpPr>
+              <p:cNvPr id="60" name="AutoShape 56"/>
+              <p:cNvSpPr/>
+              <p:nvPr/>
+            </p:nvSpPr>
+            <p:spPr>
+              <a:xfrm>
+                <a:off x="1955" y="7238"/>
+                <a:ext cx="3123" cy="286"/>
+              </a:xfrm>
+              <a:prstGeom prst="rect">
+                <a:avLst/>
+              </a:prstGeom>
+              <a:noFill/>
+              <a:ln w="12700" cap="flat" cmpd="sng">
+                <a:noFill/>
+                <a:prstDash val="solid"/>
+                <a:round/>
+              </a:ln>
+            </p:spPr>
+            <p:txBody>
+              <a:bodyPr vert="horz" wrap="square" lIns="0" tIns="0" rIns="0" bIns="0" rtlCol="0" anchor="ctr" anchorCtr="0">
+                <a:noAutofit/>
+              </a:bodyPr>
+              <a:lstStyle/>
+              <a:p>
+                <a:pPr lvl="0" algn="l">
+                  <a:lnSpc>
+                    <a:spcPct val="108000"/>
+                  </a:lnSpc>
+                  <a:buClrTx/>
+                  <a:buSzTx/>
+                  <a:buFontTx/>
+                  <a:defRPr/>
+                </a:pPr>
+                <a:r>
+                  <a:rPr lang="en-US" sz="900" b="1">
+                    <a:solidFill>
+                      <a:schemeClr val="tx1"/>
+                    </a:solidFill>
+                    <a:latin typeface="Noto Sans SC" panose="020B0200000000000000" charset="-122"/>
+                    <a:ea typeface="Noto Sans SC" panose="020B0200000000000000" charset="-122"/>
+                    <a:cs typeface="Noto Sans SC" panose="020B0200000000000000" charset="-122"/>
+                    <a:sym typeface="Noto Sans SC" panose="020B0200000000000000" charset="-122"/>
+                  </a:rPr>
+                  <a:t>分离架构，确保Junit全通过</a:t>
+                </a:r>
+                <a:endParaRPr lang="en-US" sz="900" b="1">
+                  <a:solidFill>
+                    <a:schemeClr val="tx1"/>
+                  </a:solidFill>
+                  <a:latin typeface="Noto Sans SC" panose="020B0200000000000000" charset="-122"/>
+                  <a:ea typeface="Noto Sans SC" panose="020B0200000000000000" charset="-122"/>
+                  <a:cs typeface="Noto Sans SC" panose="020B0200000000000000" charset="-122"/>
+                  <a:sym typeface="Noto Sans SC" panose="020B0200000000000000" charset="-122"/>
+                </a:endParaRPr>
+              </a:p>
+            </p:txBody>
+          </p:sp>
+          <p:sp>
+            <p:nvSpPr>
+              <p:cNvPr id="61" name="AutoShape 57"/>
+              <p:cNvSpPr/>
+              <p:nvPr/>
+            </p:nvSpPr>
+            <p:spPr>
+              <a:xfrm>
+                <a:off x="5449" y="6934"/>
+                <a:ext cx="3460" cy="644"/>
+              </a:xfrm>
+              <a:prstGeom prst="roundRect">
+                <a:avLst>
+                  <a:gd name="adj" fmla="val 8333"/>
+                </a:avLst>
+              </a:prstGeom>
+              <a:solidFill>
+                <a:srgbClr val="FFFFFF">
+                  <a:alpha val="5000"/>
+                </a:srgbClr>
+              </a:solidFill>
+              <a:ln w="12700" cap="flat" cmpd="sng">
+                <a:solidFill>
+                  <a:srgbClr val="00AAB4">
+                    <a:alpha val="50000"/>
+                  </a:srgbClr>
+                </a:solidFill>
+                <a:prstDash val="solid"/>
+                <a:round/>
+              </a:ln>
+            </p:spPr>
+            <p:txBody>
+              <a:bodyPr vert="horz" wrap="square" lIns="63500" tIns="63500" rIns="63500" bIns="63500" rtlCol="0" anchor="ctr"/>
+              <a:lstStyle/>
+              <a:p>
+                <a:pPr algn="ctr">
+                  <a:defRPr/>
+                </a:pPr>
+                <a:endParaRPr sz="1800"/>
+              </a:p>
+            </p:txBody>
+          </p:sp>
+          <p:sp>
+            <p:nvSpPr>
+              <p:cNvPr id="62" name="AutoShape 58"/>
+              <p:cNvSpPr/>
+              <p:nvPr/>
+            </p:nvSpPr>
+            <p:spPr>
+              <a:xfrm>
+                <a:off x="5618" y="6988"/>
+                <a:ext cx="3123" cy="214"/>
+              </a:xfrm>
+              <a:prstGeom prst="rect">
+                <a:avLst/>
+              </a:prstGeom>
+              <a:noFill/>
+              <a:ln w="12700" cap="flat" cmpd="sng">
+                <a:noFill/>
+                <a:prstDash val="solid"/>
+                <a:round/>
+              </a:ln>
+            </p:spPr>
+            <p:txBody>
+              <a:bodyPr vert="horz" wrap="square" lIns="0" tIns="0" rIns="0" bIns="0" rtlCol="0" anchor="ctr" anchorCtr="0"/>
+              <a:lstStyle/>
+              <a:p>
+                <a:pPr marL="0" indent="0" algn="l">
+                  <a:lnSpc>
+                    <a:spcPct val="125000"/>
+                  </a:lnSpc>
+                  <a:defRPr/>
+                </a:pPr>
+                <a:r>
+                  <a:rPr lang="en-US" sz="1400" b="1" i="0" u="none" strike="noStrike">
+                    <a:solidFill>
+                      <a:srgbClr val="50D2D7"/>
+                    </a:solidFill>
+                    <a:latin typeface="Noto Sans SC" panose="020B0200000000000000" charset="-122"/>
+                    <a:ea typeface="Noto Sans SC" panose="020B0200000000000000" charset="-122"/>
+                    <a:cs typeface="Noto Sans SC" panose="020B0200000000000000" charset="-122"/>
+                    <a:sym typeface="Noto Sans SC" panose="020B0200000000000000" charset="-122"/>
+                  </a:rPr>
+                  <a:t>10</a:t>
+                </a:r>
+                <a:r>
+                  <a:rPr lang="en-US" sz="900" b="1" i="0" u="none" strike="noStrike">
+                    <a:solidFill>
+                      <a:srgbClr val="FFFFFF"/>
+                    </a:solidFill>
+                    <a:latin typeface="Noto Sans SC" panose="020B0200000000000000" charset="-122"/>
+                    <a:ea typeface="Noto Sans SC" panose="020B0200000000000000" charset="-122"/>
+                    <a:cs typeface="Noto Sans SC" panose="020B0200000000000000" charset="-122"/>
+                    <a:sym typeface="Noto Sans SC" panose="020B0200000000000000" charset="-122"/>
+                  </a:rPr>
+                  <a:t> TBox拆分</a:t>
+                </a:r>
+                <a:endParaRPr lang="en-US" sz="900" b="1" i="0" u="none" strike="noStrike">
+                  <a:solidFill>
+                    <a:srgbClr val="FFFFFF"/>
+                  </a:solidFill>
+                  <a:latin typeface="Noto Sans SC" panose="020B0200000000000000" charset="-122"/>
+                  <a:ea typeface="Noto Sans SC" panose="020B0200000000000000" charset="-122"/>
+                  <a:cs typeface="Noto Sans SC" panose="020B0200000000000000" charset="-122"/>
+                  <a:sym typeface="Noto Sans SC" panose="020B0200000000000000" charset="-122"/>
+                </a:endParaRPr>
+              </a:p>
+            </p:txBody>
+          </p:sp>
+          <p:sp>
+            <p:nvSpPr>
+              <p:cNvPr id="63" name="AutoShape 59"/>
+              <p:cNvSpPr/>
+              <p:nvPr/>
+            </p:nvSpPr>
+            <p:spPr>
+              <a:xfrm>
+                <a:off x="5618" y="7238"/>
+                <a:ext cx="3123" cy="286"/>
+              </a:xfrm>
+              <a:prstGeom prst="rect">
+                <a:avLst/>
+              </a:prstGeom>
+              <a:noFill/>
+              <a:ln w="12700" cap="flat" cmpd="sng">
+                <a:noFill/>
+                <a:prstDash val="solid"/>
+                <a:round/>
+              </a:ln>
+            </p:spPr>
+            <p:txBody>
+              <a:bodyPr vert="horz" wrap="square" lIns="0" tIns="0" rIns="0" bIns="0" rtlCol="0" anchor="ctr" anchorCtr="0">
+                <a:noAutofit/>
+              </a:bodyPr>
+              <a:lstStyle/>
+              <a:p>
+                <a:pPr lvl="0" algn="l">
+                  <a:lnSpc>
+                    <a:spcPct val="108000"/>
+                  </a:lnSpc>
+                  <a:buClrTx/>
+                  <a:buSzTx/>
+                  <a:buFontTx/>
+                  <a:defRPr/>
+                </a:pPr>
+                <a:r>
+                  <a:rPr lang="en-US" sz="900" b="1">
+                    <a:solidFill>
+                      <a:schemeClr val="tx1"/>
+                    </a:solidFill>
+                    <a:latin typeface="Noto Sans SC" panose="020B0200000000000000" charset="-122"/>
+                    <a:ea typeface="Noto Sans SC" panose="020B0200000000000000" charset="-122"/>
+                    <a:cs typeface="Noto Sans SC" panose="020B0200000000000000" charset="-122"/>
+                    <a:sym typeface="Noto Sans SC" panose="020B0200000000000000" charset="-122"/>
+                  </a:rPr>
+                  <a:t>过大时按命名空间拆分</a:t>
+                </a:r>
+                <a:endParaRPr lang="en-US" sz="900" b="1">
+                  <a:solidFill>
+                    <a:schemeClr val="tx1"/>
+                  </a:solidFill>
+                  <a:latin typeface="Noto Sans SC" panose="020B0200000000000000" charset="-122"/>
+                  <a:ea typeface="Noto Sans SC" panose="020B0200000000000000" charset="-122"/>
+                  <a:cs typeface="Noto Sans SC" panose="020B0200000000000000" charset="-122"/>
+                  <a:sym typeface="Noto Sans SC" panose="020B0200000000000000" charset="-122"/>
+                </a:endParaRPr>
+              </a:p>
+            </p:txBody>
+          </p:sp>
+          <p:sp>
+            <p:nvSpPr>
+              <p:cNvPr id="64" name="AutoShape 60"/>
+              <p:cNvSpPr/>
+              <p:nvPr/>
+            </p:nvSpPr>
+            <p:spPr>
+              <a:xfrm>
+                <a:off x="1787" y="7784"/>
+                <a:ext cx="3460" cy="644"/>
+              </a:xfrm>
+              <a:prstGeom prst="roundRect">
+                <a:avLst>
+                  <a:gd name="adj" fmla="val 8333"/>
+                </a:avLst>
+              </a:prstGeom>
+              <a:solidFill>
+                <a:srgbClr val="FFFFFF">
+                  <a:alpha val="5000"/>
+                </a:srgbClr>
+              </a:solidFill>
+              <a:ln w="12700" cap="flat" cmpd="sng">
+                <a:solidFill>
+                  <a:srgbClr val="00AAB4">
+                    <a:alpha val="50000"/>
+                  </a:srgbClr>
+                </a:solidFill>
+                <a:prstDash val="solid"/>
+                <a:round/>
+              </a:ln>
+            </p:spPr>
+            <p:txBody>
+              <a:bodyPr vert="horz" wrap="square" lIns="63500" tIns="63500" rIns="63500" bIns="63500" rtlCol="0" anchor="ctr"/>
+              <a:lstStyle/>
+              <a:p>
+                <a:pPr algn="ctr">
+                  <a:defRPr/>
+                </a:pPr>
+                <a:endParaRPr sz="1800"/>
+              </a:p>
+            </p:txBody>
+          </p:sp>
+          <p:sp>
+            <p:nvSpPr>
+              <p:cNvPr id="65" name="AutoShape 61"/>
+              <p:cNvSpPr/>
+              <p:nvPr/>
+            </p:nvSpPr>
+            <p:spPr>
+              <a:xfrm>
+                <a:off x="1956" y="7838"/>
+                <a:ext cx="3123" cy="214"/>
+              </a:xfrm>
+              <a:prstGeom prst="rect">
+                <a:avLst/>
+              </a:prstGeom>
+              <a:noFill/>
+              <a:ln w="12700" cap="flat" cmpd="sng">
+                <a:noFill/>
+                <a:prstDash val="solid"/>
+                <a:round/>
+              </a:ln>
+            </p:spPr>
+            <p:txBody>
+              <a:bodyPr vert="horz" wrap="square" lIns="0" tIns="0" rIns="0" bIns="0" rtlCol="0" anchor="ctr" anchorCtr="0"/>
+              <a:lstStyle/>
+              <a:p>
+                <a:pPr marL="0" indent="0" algn="l">
+                  <a:lnSpc>
+                    <a:spcPct val="125000"/>
+                  </a:lnSpc>
+                  <a:defRPr/>
+                </a:pPr>
+                <a:r>
+                  <a:rPr lang="en-US" sz="1400" b="1" i="0" u="none" strike="noStrike">
+                    <a:solidFill>
+                      <a:srgbClr val="50D2D7"/>
+                    </a:solidFill>
+                    <a:latin typeface="Noto Sans SC" panose="020B0200000000000000" charset="-122"/>
+                    <a:ea typeface="Noto Sans SC" panose="020B0200000000000000" charset="-122"/>
+                    <a:cs typeface="Noto Sans SC" panose="020B0200000000000000" charset="-122"/>
+                    <a:sym typeface="Noto Sans SC" panose="020B0200000000000000" charset="-122"/>
+                  </a:rPr>
+                  <a:t>11</a:t>
+                </a:r>
+                <a:r>
+                  <a:rPr lang="en-US" sz="900" b="1" i="0" u="none" strike="noStrike">
+                    <a:solidFill>
+                      <a:srgbClr val="FFFFFF"/>
+                    </a:solidFill>
+                    <a:latin typeface="Noto Sans SC" panose="020B0200000000000000" charset="-122"/>
+                    <a:ea typeface="Noto Sans SC" panose="020B0200000000000000" charset="-122"/>
+                    <a:cs typeface="Noto Sans SC" panose="020B0200000000000000" charset="-122"/>
+                    <a:sym typeface="Noto Sans SC" panose="020B0200000000000000" charset="-122"/>
+                  </a:rPr>
+                  <a:t> ABox入库+OBDA</a:t>
+                </a:r>
+                <a:endParaRPr lang="en-US" sz="900" b="1" i="0" u="none" strike="noStrike">
+                  <a:solidFill>
+                    <a:srgbClr val="FFFFFF"/>
+                  </a:solidFill>
+                  <a:latin typeface="Noto Sans SC" panose="020B0200000000000000" charset="-122"/>
+                  <a:ea typeface="Noto Sans SC" panose="020B0200000000000000" charset="-122"/>
+                  <a:cs typeface="Noto Sans SC" panose="020B0200000000000000" charset="-122"/>
+                  <a:sym typeface="Noto Sans SC" panose="020B0200000000000000" charset="-122"/>
+                </a:endParaRPr>
+              </a:p>
+            </p:txBody>
+          </p:sp>
+          <p:sp>
+            <p:nvSpPr>
+              <p:cNvPr id="66" name="AutoShape 62"/>
+              <p:cNvSpPr/>
+              <p:nvPr/>
+            </p:nvSpPr>
+            <p:spPr>
+              <a:xfrm>
+                <a:off x="1956" y="8088"/>
+                <a:ext cx="3123" cy="286"/>
+              </a:xfrm>
+              <a:prstGeom prst="rect">
+                <a:avLst/>
+              </a:prstGeom>
+              <a:noFill/>
+              <a:ln w="12700" cap="flat" cmpd="sng">
+                <a:noFill/>
+                <a:prstDash val="solid"/>
+                <a:round/>
+              </a:ln>
+            </p:spPr>
+            <p:txBody>
+              <a:bodyPr vert="horz" wrap="square" lIns="0" tIns="0" rIns="0" bIns="0" rtlCol="0" anchor="ctr" anchorCtr="0">
+                <a:noAutofit/>
+              </a:bodyPr>
+              <a:lstStyle/>
+              <a:p>
+                <a:pPr lvl="0" algn="l">
+                  <a:lnSpc>
+                    <a:spcPct val="108000"/>
+                  </a:lnSpc>
+                  <a:buClrTx/>
+                  <a:buSzTx/>
+                  <a:buFontTx/>
+                  <a:defRPr/>
+                </a:pPr>
+                <a:r>
+                  <a:rPr lang="en-US" sz="900" b="1">
+                    <a:solidFill>
+                      <a:schemeClr val="tx1"/>
+                    </a:solidFill>
+                    <a:latin typeface="Noto Sans SC" panose="020B0200000000000000" charset="-122"/>
+                    <a:ea typeface="Noto Sans SC" panose="020B0200000000000000" charset="-122"/>
+                    <a:cs typeface="Noto Sans SC" panose="020B0200000000000000" charset="-122"/>
+                    <a:sym typeface="Noto Sans SC" panose="020B0200000000000000" charset="-122"/>
+                  </a:rPr>
+                  <a:t>大数据量导入数据库映射</a:t>
+                </a:r>
+                <a:endParaRPr lang="en-US" sz="900" b="1">
+                  <a:solidFill>
+                    <a:schemeClr val="tx1"/>
+                  </a:solidFill>
+                  <a:latin typeface="Noto Sans SC" panose="020B0200000000000000" charset="-122"/>
+                  <a:ea typeface="Noto Sans SC" panose="020B0200000000000000" charset="-122"/>
+                  <a:cs typeface="Noto Sans SC" panose="020B0200000000000000" charset="-122"/>
+                  <a:sym typeface="Noto Sans SC" panose="020B0200000000000000" charset="-122"/>
+                </a:endParaRPr>
+              </a:p>
+            </p:txBody>
+          </p:sp>
+          <p:sp>
+            <p:nvSpPr>
+              <p:cNvPr id="67" name="AutoShape 63"/>
+              <p:cNvSpPr/>
+              <p:nvPr/>
+            </p:nvSpPr>
+            <p:spPr>
+              <a:xfrm>
+                <a:off x="5449" y="7784"/>
+                <a:ext cx="3460" cy="644"/>
+              </a:xfrm>
+              <a:prstGeom prst="roundRect">
+                <a:avLst>
+                  <a:gd name="adj" fmla="val 8333"/>
+                </a:avLst>
+              </a:prstGeom>
+              <a:solidFill>
+                <a:srgbClr val="FFFFFF">
+                  <a:alpha val="5000"/>
+                </a:srgbClr>
+              </a:solidFill>
+              <a:ln w="12700" cap="flat" cmpd="sng">
+                <a:solidFill>
+                  <a:srgbClr val="00AAB4">
+                    <a:alpha val="50000"/>
+                  </a:srgbClr>
+                </a:solidFill>
+                <a:prstDash val="solid"/>
+                <a:round/>
+              </a:ln>
+            </p:spPr>
+            <p:txBody>
+              <a:bodyPr vert="horz" wrap="square" lIns="63500" tIns="63500" rIns="63500" bIns="63500" rtlCol="0" anchor="ctr"/>
+              <a:lstStyle/>
+              <a:p>
+                <a:pPr algn="ctr">
+                  <a:defRPr/>
+                </a:pPr>
+                <a:endParaRPr sz="1800"/>
+              </a:p>
+            </p:txBody>
+          </p:sp>
+          <p:sp>
+            <p:nvSpPr>
+              <p:cNvPr id="68" name="AutoShape 64"/>
+              <p:cNvSpPr/>
+              <p:nvPr/>
+            </p:nvSpPr>
+            <p:spPr>
+              <a:xfrm>
+                <a:off x="5618" y="7838"/>
+                <a:ext cx="3123" cy="214"/>
+              </a:xfrm>
+              <a:prstGeom prst="rect">
+                <a:avLst/>
+              </a:prstGeom>
+              <a:noFill/>
+              <a:ln w="12700" cap="flat" cmpd="sng">
+                <a:noFill/>
+                <a:prstDash val="solid"/>
+                <a:round/>
+              </a:ln>
+            </p:spPr>
+            <p:txBody>
+              <a:bodyPr vert="horz" wrap="square" lIns="0" tIns="0" rIns="0" bIns="0" rtlCol="0" anchor="ctr" anchorCtr="0"/>
+              <a:lstStyle/>
+              <a:p>
+                <a:pPr marL="0" indent="0" algn="l">
+                  <a:lnSpc>
+                    <a:spcPct val="125000"/>
+                  </a:lnSpc>
+                  <a:defRPr/>
+                </a:pPr>
+                <a:r>
+                  <a:rPr lang="en-US" sz="1400" b="1" i="0" u="none" strike="noStrike">
+                    <a:solidFill>
+                      <a:srgbClr val="50D2D7"/>
+                    </a:solidFill>
+                    <a:latin typeface="Noto Sans SC" panose="020B0200000000000000" charset="-122"/>
+                    <a:ea typeface="Noto Sans SC" panose="020B0200000000000000" charset="-122"/>
+                    <a:cs typeface="Noto Sans SC" panose="020B0200000000000000" charset="-122"/>
+                    <a:sym typeface="Noto Sans SC" panose="020B0200000000000000" charset="-122"/>
+                  </a:rPr>
+                  <a:t>12</a:t>
+                </a:r>
+                <a:r>
+                  <a:rPr lang="en-US" sz="900" b="1" i="0" u="none" strike="noStrike">
+                    <a:solidFill>
+                      <a:srgbClr val="FFFFFF"/>
+                    </a:solidFill>
+                    <a:latin typeface="Noto Sans SC" panose="020B0200000000000000" charset="-122"/>
+                    <a:ea typeface="Noto Sans SC" panose="020B0200000000000000" charset="-122"/>
+                    <a:cs typeface="Noto Sans SC" panose="020B0200000000000000" charset="-122"/>
+                    <a:sym typeface="Noto Sans SC" panose="020B0200000000000000" charset="-122"/>
+                  </a:rPr>
+                  <a:t> 扩充ABox</a:t>
+                </a:r>
+                <a:endParaRPr lang="en-US" sz="900" b="1" i="0" u="none" strike="noStrike">
+                  <a:solidFill>
+                    <a:srgbClr val="FFFFFF"/>
+                  </a:solidFill>
+                  <a:latin typeface="Noto Sans SC" panose="020B0200000000000000" charset="-122"/>
+                  <a:ea typeface="Noto Sans SC" panose="020B0200000000000000" charset="-122"/>
+                  <a:cs typeface="Noto Sans SC" panose="020B0200000000000000" charset="-122"/>
+                  <a:sym typeface="Noto Sans SC" panose="020B0200000000000000" charset="-122"/>
+                </a:endParaRPr>
+              </a:p>
+            </p:txBody>
+          </p:sp>
+          <p:sp>
+            <p:nvSpPr>
+              <p:cNvPr id="69" name="AutoShape 65"/>
+              <p:cNvSpPr/>
+              <p:nvPr/>
+            </p:nvSpPr>
+            <p:spPr>
+              <a:xfrm>
+                <a:off x="5618" y="8088"/>
+                <a:ext cx="3123" cy="286"/>
+              </a:xfrm>
+              <a:prstGeom prst="rect">
+                <a:avLst/>
+              </a:prstGeom>
+              <a:noFill/>
+              <a:ln w="12700" cap="flat" cmpd="sng">
+                <a:noFill/>
+                <a:prstDash val="solid"/>
+                <a:round/>
+              </a:ln>
+            </p:spPr>
+            <p:txBody>
+              <a:bodyPr vert="horz" wrap="square" lIns="0" tIns="0" rIns="0" bIns="0" rtlCol="0" anchor="ctr" anchorCtr="0">
+                <a:noAutofit/>
+              </a:bodyPr>
+              <a:lstStyle/>
+              <a:p>
+                <a:pPr lvl="0" algn="l">
+                  <a:lnSpc>
+                    <a:spcPct val="108000"/>
+                  </a:lnSpc>
+                  <a:buClrTx/>
+                  <a:buSzTx/>
+                  <a:buFontTx/>
+                  <a:defRPr/>
+                </a:pPr>
+                <a:r>
+                  <a:rPr lang="en-US" sz="900" b="1">
+                    <a:solidFill>
+                      <a:schemeClr val="tx1"/>
+                    </a:solidFill>
+                    <a:latin typeface="Noto Sans SC" panose="020B0200000000000000" charset="-122"/>
+                    <a:ea typeface="Noto Sans SC" panose="020B0200000000000000" charset="-122"/>
+                    <a:cs typeface="Noto Sans SC" panose="020B0200000000000000" charset="-122"/>
+                    <a:sym typeface="Noto Sans SC" panose="020B0200000000000000" charset="-122"/>
+                  </a:rPr>
+                  <a:t>扩展至完整业务数据集</a:t>
+                </a:r>
+                <a:endParaRPr lang="en-US" sz="900" b="1">
+                  <a:solidFill>
+                    <a:schemeClr val="tx1"/>
+                  </a:solidFill>
+                  <a:latin typeface="Noto Sans SC" panose="020B0200000000000000" charset="-122"/>
+                  <a:ea typeface="Noto Sans SC" panose="020B0200000000000000" charset="-122"/>
+                  <a:cs typeface="Noto Sans SC" panose="020B0200000000000000" charset="-122"/>
+                  <a:sym typeface="Noto Sans SC" panose="020B0200000000000000" charset="-122"/>
+                </a:endParaRPr>
+              </a:p>
+            </p:txBody>
+          </p:sp>
+          <p:sp>
+            <p:nvSpPr>
+              <p:cNvPr id="80" name="AutoShape 76"/>
+              <p:cNvSpPr/>
+              <p:nvPr/>
+            </p:nvSpPr>
+            <p:spPr>
+              <a:xfrm>
+                <a:off x="1796" y="8839"/>
+                <a:ext cx="3460" cy="644"/>
+              </a:xfrm>
+              <a:prstGeom prst="roundRect">
+                <a:avLst>
+                  <a:gd name="adj" fmla="val 8333"/>
+                </a:avLst>
+              </a:prstGeom>
+              <a:solidFill>
+                <a:srgbClr val="FFFFFF">
+                  <a:alpha val="5000"/>
+                </a:srgbClr>
+              </a:solidFill>
+              <a:ln w="12700" cap="flat" cmpd="sng">
+                <a:solidFill>
+                  <a:srgbClr val="DCAA32">
+                    <a:alpha val="50000"/>
+                  </a:srgbClr>
+                </a:solidFill>
+                <a:prstDash val="solid"/>
+                <a:round/>
+              </a:ln>
+            </p:spPr>
+            <p:txBody>
+              <a:bodyPr vert="horz" wrap="square" lIns="63500" tIns="63500" rIns="63500" bIns="63500" rtlCol="0" anchor="ctr"/>
+              <a:lstStyle/>
+              <a:p>
+                <a:pPr algn="ctr">
+                  <a:defRPr/>
+                </a:pPr>
+                <a:endParaRPr sz="1800"/>
+              </a:p>
+            </p:txBody>
+          </p:sp>
+          <p:sp>
+            <p:nvSpPr>
+              <p:cNvPr id="81" name="AutoShape 77"/>
+              <p:cNvSpPr/>
+              <p:nvPr/>
+            </p:nvSpPr>
+            <p:spPr>
+              <a:xfrm>
+                <a:off x="1965" y="8893"/>
+                <a:ext cx="3123" cy="214"/>
+              </a:xfrm>
+              <a:prstGeom prst="rect">
+                <a:avLst/>
+              </a:prstGeom>
+              <a:noFill/>
+              <a:ln w="12700" cap="flat" cmpd="sng">
+                <a:noFill/>
+                <a:prstDash val="solid"/>
+                <a:round/>
+              </a:ln>
+            </p:spPr>
+            <p:txBody>
+              <a:bodyPr vert="horz" wrap="square" lIns="0" tIns="0" rIns="0" bIns="0" rtlCol="0" anchor="ctr" anchorCtr="0"/>
+              <a:lstStyle/>
+              <a:p>
+                <a:pPr marL="0" indent="0" algn="l">
+                  <a:lnSpc>
+                    <a:spcPct val="125000"/>
+                  </a:lnSpc>
+                  <a:defRPr/>
+                </a:pPr>
+                <a:r>
+                  <a:rPr lang="en-US" sz="1400" b="1" i="0" u="none" strike="noStrike">
+                    <a:solidFill>
+                      <a:srgbClr val="F0C864"/>
+                    </a:solidFill>
+                    <a:latin typeface="Noto Sans SC" panose="020B0200000000000000" charset="-122"/>
+                    <a:ea typeface="Noto Sans SC" panose="020B0200000000000000" charset="-122"/>
+                    <a:cs typeface="Noto Sans SC" panose="020B0200000000000000" charset="-122"/>
+                    <a:sym typeface="Noto Sans SC" panose="020B0200000000000000" charset="-122"/>
+                  </a:rPr>
+                  <a:t>13</a:t>
+                </a:r>
+                <a:r>
+                  <a:rPr lang="en-US" sz="900" b="1" i="0" u="none" strike="noStrike">
+                    <a:solidFill>
+                      <a:srgbClr val="FFFFFF"/>
+                    </a:solidFill>
+                    <a:latin typeface="Noto Sans SC" panose="020B0200000000000000" charset="-122"/>
+                    <a:ea typeface="Noto Sans SC" panose="020B0200000000000000" charset="-122"/>
+                    <a:cs typeface="Noto Sans SC" panose="020B0200000000000000" charset="-122"/>
+                    <a:sym typeface="Noto Sans SC" panose="020B0200000000000000" charset="-122"/>
+                  </a:rPr>
+                  <a:t> 构建词汇表</a:t>
+                </a:r>
+                <a:endParaRPr lang="en-US" sz="900" b="1" i="0" u="none" strike="noStrike">
+                  <a:solidFill>
+                    <a:srgbClr val="FFFFFF"/>
+                  </a:solidFill>
+                  <a:latin typeface="Noto Sans SC" panose="020B0200000000000000" charset="-122"/>
+                  <a:ea typeface="Noto Sans SC" panose="020B0200000000000000" charset="-122"/>
+                  <a:cs typeface="Noto Sans SC" panose="020B0200000000000000" charset="-122"/>
+                  <a:sym typeface="Noto Sans SC" panose="020B0200000000000000" charset="-122"/>
+                </a:endParaRPr>
+              </a:p>
+            </p:txBody>
+          </p:sp>
+          <p:sp>
+            <p:nvSpPr>
+              <p:cNvPr id="82" name="AutoShape 78"/>
+              <p:cNvSpPr/>
+              <p:nvPr/>
+            </p:nvSpPr>
+            <p:spPr>
+              <a:xfrm>
+                <a:off x="1965" y="9143"/>
+                <a:ext cx="3123" cy="286"/>
+              </a:xfrm>
+              <a:prstGeom prst="rect">
+                <a:avLst/>
+              </a:prstGeom>
+              <a:noFill/>
+              <a:ln w="12700" cap="flat" cmpd="sng">
+                <a:noFill/>
+                <a:prstDash val="solid"/>
+                <a:round/>
+              </a:ln>
+            </p:spPr>
+            <p:txBody>
+              <a:bodyPr vert="horz" wrap="square" lIns="0" tIns="0" rIns="0" bIns="0" rtlCol="0" anchor="ctr" anchorCtr="0">
+                <a:noAutofit/>
+              </a:bodyPr>
+              <a:lstStyle/>
+              <a:p>
+                <a:pPr lvl="0" algn="l">
+                  <a:lnSpc>
+                    <a:spcPct val="108000"/>
+                  </a:lnSpc>
+                  <a:buClrTx/>
+                  <a:buSzTx/>
+                  <a:buFontTx/>
+                  <a:defRPr/>
+                </a:pPr>
+                <a:r>
+                  <a:rPr lang="en-US" sz="900" b="1">
+                    <a:solidFill>
+                      <a:schemeClr val="tx1"/>
+                    </a:solidFill>
+                    <a:latin typeface="Noto Sans SC" panose="020B0200000000000000" charset="-122"/>
+                    <a:ea typeface="Noto Sans SC" panose="020B0200000000000000" charset="-122"/>
+                    <a:cs typeface="Noto Sans SC" panose="020B0200000000000000" charset="-122"/>
+                    <a:sym typeface="Noto Sans SC" panose="020B0200000000000000" charset="-122"/>
+                  </a:rPr>
+                  <a:t>建立领域词汇映射表</a:t>
+                </a:r>
+                <a:endParaRPr lang="en-US" sz="900" b="1">
+                  <a:solidFill>
+                    <a:schemeClr val="tx1"/>
+                  </a:solidFill>
+                  <a:latin typeface="Noto Sans SC" panose="020B0200000000000000" charset="-122"/>
+                  <a:ea typeface="Noto Sans SC" panose="020B0200000000000000" charset="-122"/>
+                  <a:cs typeface="Noto Sans SC" panose="020B0200000000000000" charset="-122"/>
+                  <a:sym typeface="Noto Sans SC" panose="020B0200000000000000" charset="-122"/>
+                </a:endParaRPr>
+              </a:p>
+            </p:txBody>
+          </p:sp>
+          <p:sp>
+            <p:nvSpPr>
+              <p:cNvPr id="83" name="AutoShape 79"/>
+              <p:cNvSpPr/>
+              <p:nvPr/>
+            </p:nvSpPr>
+            <p:spPr>
+              <a:xfrm>
+                <a:off x="5458" y="8839"/>
+                <a:ext cx="3460" cy="644"/>
+              </a:xfrm>
+              <a:prstGeom prst="roundRect">
+                <a:avLst>
+                  <a:gd name="adj" fmla="val 8333"/>
+                </a:avLst>
+              </a:prstGeom>
+              <a:solidFill>
+                <a:srgbClr val="FFFFFF">
+                  <a:alpha val="5000"/>
+                </a:srgbClr>
+              </a:solidFill>
+              <a:ln w="12700" cap="flat" cmpd="sng">
+                <a:solidFill>
+                  <a:srgbClr val="DCAA32">
+                    <a:alpha val="50000"/>
+                  </a:srgbClr>
+                </a:solidFill>
+                <a:prstDash val="solid"/>
+                <a:round/>
+              </a:ln>
+            </p:spPr>
+            <p:txBody>
+              <a:bodyPr vert="horz" wrap="square" lIns="63500" tIns="63500" rIns="63500" bIns="63500" rtlCol="0" anchor="ctr"/>
+              <a:lstStyle/>
+              <a:p>
+                <a:pPr algn="ctr">
+                  <a:defRPr/>
+                </a:pPr>
+                <a:endParaRPr sz="1800"/>
+              </a:p>
+            </p:txBody>
+          </p:sp>
+          <p:sp>
+            <p:nvSpPr>
+              <p:cNvPr id="84" name="AutoShape 80"/>
+              <p:cNvSpPr/>
+              <p:nvPr/>
+            </p:nvSpPr>
+            <p:spPr>
+              <a:xfrm>
+                <a:off x="5627" y="8893"/>
+                <a:ext cx="3123" cy="214"/>
+              </a:xfrm>
+              <a:prstGeom prst="rect">
+                <a:avLst/>
+              </a:prstGeom>
+              <a:noFill/>
+              <a:ln w="12700" cap="flat" cmpd="sng">
+                <a:noFill/>
+                <a:prstDash val="solid"/>
+                <a:round/>
+              </a:ln>
+            </p:spPr>
+            <p:txBody>
+              <a:bodyPr vert="horz" wrap="square" lIns="0" tIns="0" rIns="0" bIns="0" rtlCol="0" anchor="ctr" anchorCtr="0"/>
+              <a:lstStyle/>
+              <a:p>
+                <a:pPr marL="0" indent="0" algn="l">
+                  <a:lnSpc>
+                    <a:spcPct val="125000"/>
+                  </a:lnSpc>
+                  <a:defRPr/>
+                </a:pPr>
+                <a:r>
+                  <a:rPr lang="en-US" sz="1400" b="1" i="0" u="none" strike="noStrike">
+                    <a:solidFill>
+                      <a:srgbClr val="F0C864"/>
+                    </a:solidFill>
+                    <a:latin typeface="Noto Sans SC" panose="020B0200000000000000" charset="-122"/>
+                    <a:ea typeface="Noto Sans SC" panose="020B0200000000000000" charset="-122"/>
+                    <a:cs typeface="Noto Sans SC" panose="020B0200000000000000" charset="-122"/>
+                    <a:sym typeface="Noto Sans SC" panose="020B0200000000000000" charset="-122"/>
+                  </a:rPr>
+                  <a:t>14</a:t>
+                </a:r>
+                <a:r>
+                  <a:rPr lang="en-US" sz="900" b="1" i="0" u="none" strike="noStrike">
+                    <a:solidFill>
+                      <a:srgbClr val="FFFFFF"/>
+                    </a:solidFill>
+                    <a:latin typeface="Noto Sans SC" panose="020B0200000000000000" charset="-122"/>
+                    <a:ea typeface="Noto Sans SC" panose="020B0200000000000000" charset="-122"/>
+                    <a:cs typeface="Noto Sans SC" panose="020B0200000000000000" charset="-122"/>
+                    <a:sym typeface="Noto Sans SC" panose="020B0200000000000000" charset="-122"/>
+                  </a:rPr>
+                  <a:t> 完整测试</a:t>
+                </a:r>
+                <a:endParaRPr lang="en-US" sz="900" b="1" i="0" u="none" strike="noStrike">
+                  <a:solidFill>
+                    <a:srgbClr val="FFFFFF"/>
+                  </a:solidFill>
+                  <a:latin typeface="Noto Sans SC" panose="020B0200000000000000" charset="-122"/>
+                  <a:ea typeface="Noto Sans SC" panose="020B0200000000000000" charset="-122"/>
+                  <a:cs typeface="Noto Sans SC" panose="020B0200000000000000" charset="-122"/>
+                  <a:sym typeface="Noto Sans SC" panose="020B0200000000000000" charset="-122"/>
+                </a:endParaRPr>
+              </a:p>
+            </p:txBody>
+          </p:sp>
+          <p:sp>
+            <p:nvSpPr>
+              <p:cNvPr id="85" name="AutoShape 81"/>
+              <p:cNvSpPr/>
+              <p:nvPr/>
+            </p:nvSpPr>
+            <p:spPr>
+              <a:xfrm>
+                <a:off x="5627" y="9143"/>
+                <a:ext cx="3123" cy="286"/>
+              </a:xfrm>
+              <a:prstGeom prst="rect">
+                <a:avLst/>
+              </a:prstGeom>
+              <a:noFill/>
+              <a:ln w="12700" cap="flat" cmpd="sng">
+                <a:noFill/>
+                <a:prstDash val="solid"/>
+                <a:round/>
+              </a:ln>
+            </p:spPr>
+            <p:txBody>
+              <a:bodyPr vert="horz" wrap="square" lIns="0" tIns="0" rIns="0" bIns="0" rtlCol="0" anchor="ctr" anchorCtr="0">
+                <a:noAutofit/>
+              </a:bodyPr>
+              <a:lstStyle/>
+              <a:p>
+                <a:pPr lvl="0" algn="l">
+                  <a:lnSpc>
+                    <a:spcPct val="108000"/>
+                  </a:lnSpc>
+                  <a:buClrTx/>
+                  <a:buSzTx/>
+                  <a:buFontTx/>
+                  <a:defRPr/>
+                </a:pPr>
+                <a:r>
+                  <a:rPr lang="en-US" sz="900" b="1">
+                    <a:solidFill>
+                      <a:schemeClr val="tx1"/>
+                    </a:solidFill>
+                    <a:latin typeface="Noto Sans SC" panose="020B0200000000000000" charset="-122"/>
+                    <a:ea typeface="Noto Sans SC" panose="020B0200000000000000" charset="-122"/>
+                    <a:cs typeface="Noto Sans SC" panose="020B0200000000000000" charset="-122"/>
+                    <a:sym typeface="Noto Sans SC" panose="020B0200000000000000" charset="-122"/>
+                  </a:rPr>
+                  <a:t>全流程集成测试与验证交付</a:t>
+                </a:r>
+                <a:endParaRPr lang="en-US" sz="900" b="1">
+                  <a:solidFill>
+                    <a:schemeClr val="tx1"/>
+                  </a:solidFill>
+                  <a:latin typeface="Noto Sans SC" panose="020B0200000000000000" charset="-122"/>
+                  <a:ea typeface="Noto Sans SC" panose="020B0200000000000000" charset="-122"/>
+                  <a:cs typeface="Noto Sans SC" panose="020B0200000000000000" charset="-122"/>
+                  <a:sym typeface="Noto Sans SC" panose="020B0200000000000000" charset="-122"/>
+                </a:endParaRPr>
+              </a:p>
+            </p:txBody>
+          </p:sp>
+          <p:cxnSp>
+            <p:nvCxnSpPr>
+              <p:cNvPr id="2" name="直接箭头连接符 1"/>
+              <p:cNvCxnSpPr>
+                <a:stCxn id="14" idx="3"/>
+                <a:endCxn id="17" idx="1"/>
+              </p:cNvCxnSpPr>
+              <p:nvPr/>
+            </p:nvCxnSpPr>
+            <p:spPr>
+              <a:xfrm>
+                <a:off x="5309" y="3294"/>
+                <a:ext cx="203" cy="0"/>
+              </a:xfrm>
+              <a:prstGeom prst="straightConnector1">
+                <a:avLst/>
+              </a:prstGeom>
+              <a:ln>
+                <a:tailEnd type="arrow"/>
+              </a:ln>
+            </p:spPr>
+            <p:style>
+              <a:lnRef idx="2">
+                <a:schemeClr val="accent1"/>
+              </a:lnRef>
+              <a:fillRef idx="0">
+                <a:srgbClr val="FFFFFF"/>
+              </a:fillRef>
+              <a:effectRef idx="0">
+                <a:srgbClr val="FFFFFF"/>
+              </a:effectRef>
+              <a:fontRef idx="minor">
+                <a:schemeClr val="tx1"/>
+              </a:fontRef>
+            </p:style>
+          </p:cxnSp>
+          <p:cxnSp>
+            <p:nvCxnSpPr>
+              <p:cNvPr id="3" name="肘形连接符 2"/>
+              <p:cNvCxnSpPr>
+                <a:stCxn id="17" idx="3"/>
+                <a:endCxn id="20" idx="1"/>
+              </p:cNvCxnSpPr>
+              <p:nvPr/>
+            </p:nvCxnSpPr>
+            <p:spPr>
+              <a:xfrm flipH="1">
+                <a:off x="1824" y="3294"/>
+                <a:ext cx="7147" cy="849"/>
+              </a:xfrm>
+              <a:prstGeom prst="bentConnector5">
+                <a:avLst>
+                  <a:gd name="adj1" fmla="val -4767"/>
+                  <a:gd name="adj2" fmla="val 49931"/>
+                  <a:gd name="adj3" fmla="val 104767"/>
+                </a:avLst>
+              </a:prstGeom>
+              <a:ln>
+                <a:tailEnd type="arrow"/>
+              </a:ln>
+            </p:spPr>
+            <p:style>
+              <a:lnRef idx="2">
+                <a:schemeClr val="accent1"/>
+              </a:lnRef>
+              <a:fillRef idx="0">
+                <a:srgbClr val="FFFFFF"/>
+              </a:fillRef>
+              <a:effectRef idx="0">
+                <a:srgbClr val="FFFFFF"/>
+              </a:effectRef>
+              <a:fontRef idx="minor">
+                <a:schemeClr val="tx1"/>
+              </a:fontRef>
+            </p:style>
+          </p:cxnSp>
+          <p:cxnSp>
+            <p:nvCxnSpPr>
+              <p:cNvPr id="4" name="直接箭头连接符 3"/>
+              <p:cNvCxnSpPr>
+                <a:stCxn id="20" idx="3"/>
+                <a:endCxn id="23" idx="1"/>
+              </p:cNvCxnSpPr>
+              <p:nvPr/>
+            </p:nvCxnSpPr>
+            <p:spPr>
+              <a:xfrm>
+                <a:off x="5283" y="4143"/>
+                <a:ext cx="203" cy="0"/>
+              </a:xfrm>
+              <a:prstGeom prst="straightConnector1">
+                <a:avLst/>
+              </a:prstGeom>
+              <a:ln>
+                <a:tailEnd type="arrow"/>
+              </a:ln>
+            </p:spPr>
+            <p:style>
+              <a:lnRef idx="2">
+                <a:schemeClr val="accent1"/>
+              </a:lnRef>
+              <a:fillRef idx="0">
+                <a:srgbClr val="FFFFFF"/>
+              </a:fillRef>
+              <a:effectRef idx="0">
+                <a:srgbClr val="FFFFFF"/>
+              </a:effectRef>
+              <a:fontRef idx="minor">
+                <a:schemeClr val="tx1"/>
+              </a:fontRef>
+            </p:style>
+          </p:cxnSp>
+          <p:cxnSp>
+            <p:nvCxnSpPr>
+              <p:cNvPr id="88" name="肘形连接符 87"/>
+              <p:cNvCxnSpPr>
+                <a:stCxn id="23" idx="3"/>
+                <a:endCxn id="36" idx="1"/>
+              </p:cNvCxnSpPr>
+              <p:nvPr/>
+            </p:nvCxnSpPr>
+            <p:spPr>
+              <a:xfrm flipH="1">
+                <a:off x="1824" y="4143"/>
+                <a:ext cx="7122" cy="1166"/>
+              </a:xfrm>
+              <a:prstGeom prst="bentConnector5">
+                <a:avLst>
+                  <a:gd name="adj1" fmla="val -4784"/>
+                  <a:gd name="adj2" fmla="val 49950"/>
+                  <a:gd name="adj3" fmla="val 104784"/>
+                </a:avLst>
+              </a:prstGeom>
+              <a:ln>
+                <a:tailEnd type="arrow"/>
+              </a:ln>
+            </p:spPr>
+            <p:style>
+              <a:lnRef idx="2">
+                <a:schemeClr val="accent1"/>
+              </a:lnRef>
+              <a:fillRef idx="0">
+                <a:srgbClr val="FFFFFF"/>
+              </a:fillRef>
+              <a:effectRef idx="0">
+                <a:srgbClr val="FFFFFF"/>
+              </a:effectRef>
+              <a:fontRef idx="minor">
+                <a:schemeClr val="tx1"/>
+              </a:fontRef>
+            </p:style>
+          </p:cxnSp>
+          <p:cxnSp>
+            <p:nvCxnSpPr>
+              <p:cNvPr id="89" name="肘形连接符 88"/>
+              <p:cNvCxnSpPr>
+                <a:stCxn id="39" idx="3"/>
+                <a:endCxn id="42" idx="1"/>
+              </p:cNvCxnSpPr>
+              <p:nvPr/>
+            </p:nvCxnSpPr>
+            <p:spPr>
+              <a:xfrm flipH="1">
+                <a:off x="1823" y="5308"/>
+                <a:ext cx="7123" cy="907"/>
+              </a:xfrm>
+              <a:prstGeom prst="bentConnector5">
+                <a:avLst>
+                  <a:gd name="adj1" fmla="val -4783"/>
+                  <a:gd name="adj2" fmla="val 49936"/>
+                  <a:gd name="adj3" fmla="val 104783"/>
+                </a:avLst>
+              </a:prstGeom>
+              <a:ln>
+                <a:tailEnd type="arrow"/>
+              </a:ln>
+            </p:spPr>
+            <p:style>
+              <a:lnRef idx="2">
+                <a:schemeClr val="accent1"/>
+              </a:lnRef>
+              <a:fillRef idx="0">
+                <a:srgbClr val="FFFFFF"/>
+              </a:fillRef>
+              <a:effectRef idx="0">
+                <a:srgbClr val="FFFFFF"/>
+              </a:effectRef>
+              <a:fontRef idx="minor">
+                <a:schemeClr val="tx1"/>
+              </a:fontRef>
+            </p:style>
+          </p:cxnSp>
+          <p:cxnSp>
+            <p:nvCxnSpPr>
+              <p:cNvPr id="90" name="直接箭头连接符 89"/>
+              <p:cNvCxnSpPr>
+                <a:stCxn id="36" idx="3"/>
+                <a:endCxn id="39" idx="1"/>
+              </p:cNvCxnSpPr>
+              <p:nvPr/>
+            </p:nvCxnSpPr>
+            <p:spPr>
+              <a:xfrm>
+                <a:off x="5283" y="5308"/>
+                <a:ext cx="203" cy="0"/>
+              </a:xfrm>
+              <a:prstGeom prst="straightConnector1">
+                <a:avLst/>
+              </a:prstGeom>
+              <a:ln>
+                <a:tailEnd type="arrow"/>
+              </a:ln>
+            </p:spPr>
+            <p:style>
+              <a:lnRef idx="2">
+                <a:schemeClr val="accent1"/>
+              </a:lnRef>
+              <a:fillRef idx="0">
+                <a:srgbClr val="FFFFFF"/>
+              </a:fillRef>
+              <a:effectRef idx="0">
+                <a:srgbClr val="FFFFFF"/>
+              </a:effectRef>
+              <a:fontRef idx="minor">
+                <a:schemeClr val="tx1"/>
+              </a:fontRef>
+            </p:style>
+          </p:cxnSp>
+          <p:cxnSp>
+            <p:nvCxnSpPr>
+              <p:cNvPr id="91" name="直接箭头连接符 90"/>
+              <p:cNvCxnSpPr>
+                <a:stCxn id="42" idx="3"/>
+                <a:endCxn id="45" idx="1"/>
+              </p:cNvCxnSpPr>
+              <p:nvPr/>
+            </p:nvCxnSpPr>
+            <p:spPr>
+              <a:xfrm>
+                <a:off x="5282" y="6215"/>
+                <a:ext cx="203" cy="0"/>
+              </a:xfrm>
+              <a:prstGeom prst="straightConnector1">
+                <a:avLst/>
+              </a:prstGeom>
+              <a:ln>
+                <a:tailEnd type="arrow"/>
+              </a:ln>
+            </p:spPr>
+            <p:style>
+              <a:lnRef idx="2">
+                <a:schemeClr val="accent1"/>
+              </a:lnRef>
+              <a:fillRef idx="0">
+                <a:srgbClr val="FFFFFF"/>
+              </a:fillRef>
+              <a:effectRef idx="0">
+                <a:srgbClr val="FFFFFF"/>
+              </a:effectRef>
+              <a:fontRef idx="minor">
+                <a:schemeClr val="tx1"/>
+              </a:fontRef>
+            </p:style>
+          </p:cxnSp>
+          <p:cxnSp>
+            <p:nvCxnSpPr>
+              <p:cNvPr id="92" name="肘形连接符 91"/>
+              <p:cNvCxnSpPr>
+                <a:stCxn id="45" idx="3"/>
+                <a:endCxn id="58" idx="1"/>
+              </p:cNvCxnSpPr>
+              <p:nvPr/>
+            </p:nvCxnSpPr>
+            <p:spPr>
+              <a:xfrm flipH="1">
+                <a:off x="1787" y="6215"/>
+                <a:ext cx="7158" cy="1041"/>
+              </a:xfrm>
+              <a:prstGeom prst="bentConnector5">
+                <a:avLst>
+                  <a:gd name="adj1" fmla="val -4759"/>
+                  <a:gd name="adj2" fmla="val 50000"/>
+                  <a:gd name="adj3" fmla="val 104759"/>
+                </a:avLst>
+              </a:prstGeom>
+              <a:ln>
+                <a:tailEnd type="arrow"/>
+              </a:ln>
+            </p:spPr>
+            <p:style>
+              <a:lnRef idx="2">
+                <a:schemeClr val="accent1"/>
+              </a:lnRef>
+              <a:fillRef idx="0">
+                <a:srgbClr val="FFFFFF"/>
+              </a:fillRef>
+              <a:effectRef idx="0">
+                <a:srgbClr val="FFFFFF"/>
+              </a:effectRef>
+              <a:fontRef idx="minor">
+                <a:schemeClr val="tx1"/>
+              </a:fontRef>
+            </p:style>
+          </p:cxnSp>
+          <p:cxnSp>
+            <p:nvCxnSpPr>
+              <p:cNvPr id="93" name="直接箭头连接符 92"/>
+              <p:cNvCxnSpPr>
+                <a:stCxn id="58" idx="3"/>
+                <a:endCxn id="61" idx="1"/>
+              </p:cNvCxnSpPr>
+              <p:nvPr/>
+            </p:nvCxnSpPr>
+            <p:spPr>
+              <a:xfrm>
+                <a:off x="5246" y="7257"/>
+                <a:ext cx="203" cy="0"/>
+              </a:xfrm>
+              <a:prstGeom prst="straightConnector1">
+                <a:avLst/>
+              </a:prstGeom>
+              <a:ln>
+                <a:tailEnd type="arrow"/>
+              </a:ln>
+            </p:spPr>
+            <p:style>
+              <a:lnRef idx="2">
+                <a:schemeClr val="accent1"/>
+              </a:lnRef>
+              <a:fillRef idx="0">
+                <a:srgbClr val="FFFFFF"/>
+              </a:fillRef>
+              <a:effectRef idx="0">
+                <a:srgbClr val="FFFFFF"/>
+              </a:effectRef>
+              <a:fontRef idx="minor">
+                <a:schemeClr val="tx1"/>
+              </a:fontRef>
+            </p:style>
+          </p:cxnSp>
+          <p:cxnSp>
+            <p:nvCxnSpPr>
+              <p:cNvPr id="94" name="肘形连接符 93"/>
+              <p:cNvCxnSpPr>
+                <a:stCxn id="61" idx="3"/>
+                <a:endCxn id="64" idx="1"/>
+              </p:cNvCxnSpPr>
+              <p:nvPr/>
+            </p:nvCxnSpPr>
+            <p:spPr>
+              <a:xfrm flipH="1">
+                <a:off x="1787" y="7257"/>
+                <a:ext cx="7122" cy="850"/>
+              </a:xfrm>
+              <a:prstGeom prst="bentConnector5">
+                <a:avLst>
+                  <a:gd name="adj1" fmla="val -4784"/>
+                  <a:gd name="adj2" fmla="val 50000"/>
+                  <a:gd name="adj3" fmla="val 104784"/>
+                </a:avLst>
+              </a:prstGeom>
+              <a:ln>
+                <a:tailEnd type="arrow"/>
+              </a:ln>
+            </p:spPr>
+            <p:style>
+              <a:lnRef idx="2">
+                <a:schemeClr val="accent1"/>
+              </a:lnRef>
+              <a:fillRef idx="0">
+                <a:srgbClr val="FFFFFF"/>
+              </a:fillRef>
+              <a:effectRef idx="0">
+                <a:srgbClr val="FFFFFF"/>
+              </a:effectRef>
+              <a:fontRef idx="minor">
+                <a:schemeClr val="tx1"/>
+              </a:fontRef>
+            </p:style>
+          </p:cxnSp>
+          <p:cxnSp>
+            <p:nvCxnSpPr>
+              <p:cNvPr id="96" name="直接箭头连接符 95"/>
+              <p:cNvCxnSpPr>
+                <a:stCxn id="64" idx="3"/>
+                <a:endCxn id="67" idx="1"/>
+              </p:cNvCxnSpPr>
+              <p:nvPr/>
+            </p:nvCxnSpPr>
+            <p:spPr>
+              <a:xfrm>
+                <a:off x="5246" y="8107"/>
+                <a:ext cx="203" cy="0"/>
+              </a:xfrm>
+              <a:prstGeom prst="straightConnector1">
+                <a:avLst/>
+              </a:prstGeom>
+              <a:ln>
+                <a:tailEnd type="arrow"/>
+              </a:ln>
+            </p:spPr>
+            <p:style>
+              <a:lnRef idx="2">
+                <a:schemeClr val="accent1"/>
+              </a:lnRef>
+              <a:fillRef idx="0">
+                <a:srgbClr val="FFFFFF"/>
+              </a:fillRef>
+              <a:effectRef idx="0">
+                <a:srgbClr val="FFFFFF"/>
+              </a:effectRef>
+              <a:fontRef idx="minor">
+                <a:schemeClr val="tx1"/>
+              </a:fontRef>
+            </p:style>
+          </p:cxnSp>
+          <p:cxnSp>
+            <p:nvCxnSpPr>
+              <p:cNvPr id="98" name="肘形连接符 97"/>
+              <p:cNvCxnSpPr>
+                <a:stCxn id="67" idx="3"/>
+                <a:endCxn id="80" idx="1"/>
+              </p:cNvCxnSpPr>
+              <p:nvPr/>
+            </p:nvCxnSpPr>
+            <p:spPr>
+              <a:xfrm flipH="1">
+                <a:off x="1796" y="8107"/>
+                <a:ext cx="7113" cy="1055"/>
+              </a:xfrm>
+              <a:prstGeom prst="bentConnector5">
+                <a:avLst>
+                  <a:gd name="adj1" fmla="val -4790"/>
+                  <a:gd name="adj2" fmla="val 50000"/>
+                  <a:gd name="adj3" fmla="val 104790"/>
+                </a:avLst>
+              </a:prstGeom>
+              <a:ln>
+                <a:tailEnd type="arrow"/>
+              </a:ln>
+            </p:spPr>
+            <p:style>
+              <a:lnRef idx="2">
+                <a:schemeClr val="accent1"/>
+              </a:lnRef>
+              <a:fillRef idx="0">
+                <a:srgbClr val="FFFFFF"/>
+              </a:fillRef>
+              <a:effectRef idx="0">
+                <a:srgbClr val="FFFFFF"/>
+              </a:effectRef>
+              <a:fontRef idx="minor">
+                <a:schemeClr val="tx1"/>
+              </a:fontRef>
+            </p:style>
+          </p:cxnSp>
+          <p:cxnSp>
+            <p:nvCxnSpPr>
+              <p:cNvPr id="99" name="直接箭头连接符 98"/>
+              <p:cNvCxnSpPr>
+                <a:stCxn id="80" idx="3"/>
+                <a:endCxn id="83" idx="1"/>
+              </p:cNvCxnSpPr>
+              <p:nvPr/>
+            </p:nvCxnSpPr>
+            <p:spPr>
+              <a:xfrm>
+                <a:off x="5255" y="9162"/>
+                <a:ext cx="203" cy="0"/>
+              </a:xfrm>
+              <a:prstGeom prst="straightConnector1">
+                <a:avLst/>
+              </a:prstGeom>
+              <a:ln>
+                <a:tailEnd type="arrow"/>
+              </a:ln>
+            </p:spPr>
+            <p:style>
+              <a:lnRef idx="2">
+                <a:schemeClr val="accent1"/>
+              </a:lnRef>
+              <a:fillRef idx="0">
+                <a:srgbClr val="FFFFFF"/>
+              </a:fillRef>
+              <a:effectRef idx="0">
+                <a:srgbClr val="FFFFFF"/>
+              </a:effectRef>
+              <a:fontRef idx="minor">
+                <a:schemeClr val="tx1"/>
+              </a:fontRef>
+            </p:style>
+          </p:cxnSp>
+        </p:grpSp>
+      </p:grpSp>
+      <p:grpSp>
+        <p:nvGrpSpPr>
+          <p:cNvPr id="109" name="组合 108"/>
+          <p:cNvGrpSpPr/>
+          <p:nvPr/>
+        </p:nvGrpSpPr>
+        <p:grpSpPr>
+          <a:xfrm>
+            <a:off x="6744335" y="1845310"/>
+            <a:ext cx="4552315" cy="4108450"/>
+            <a:chOff x="5148" y="2793"/>
+            <a:chExt cx="7169" cy="6470"/>
+          </a:xfrm>
+        </p:grpSpPr>
+        <p:pic>
+          <p:nvPicPr>
+            <p:cNvPr id="110" name="图片 109" descr="本体概念及工业应用介绍 (5)"/>
+            <p:cNvPicPr>
+              <a:picLocks noChangeAspect="1"/>
+            </p:cNvPicPr>
+            <p:nvPr/>
+          </p:nvPicPr>
+          <p:blipFill>
+            <a:blip r:embed="rId1"/>
+            <a:stretch>
+              <a:fillRect/>
+            </a:stretch>
+          </p:blipFill>
+          <p:spPr>
+            <a:xfrm>
+              <a:off x="5747" y="2793"/>
+              <a:ext cx="6571" cy="6383"/>
+            </a:xfrm>
+            <a:prstGeom prst="rect">
+              <a:avLst/>
+            </a:prstGeom>
+          </p:spPr>
+        </p:pic>
+        <p:sp>
+          <p:nvSpPr>
+            <p:cNvPr id="111" name="文本框 110"/>
+            <p:cNvSpPr txBox="1"/>
+            <p:nvPr>
+              <p:custDataLst>
+                <p:tags r:id="rId2"/>
+              </p:custDataLst>
+            </p:nvPr>
+          </p:nvSpPr>
+          <p:spPr>
+            <a:xfrm>
+              <a:off x="5747" y="3588"/>
+              <a:ext cx="1873" cy="461"/>
+            </a:xfrm>
+            <a:prstGeom prst="rect">
+              <a:avLst/>
+            </a:prstGeom>
+            <a:noFill/>
+          </p:spPr>
+          <p:txBody>
+            <a:bodyPr wrap="square" rtlCol="0" anchor="t">
+              <a:noAutofit/>
+            </a:bodyPr>
+            <a:p>
+              <a:pPr algn="ctr"/>
+              <a:r>
+                <a:rPr sz="900" b="1">
+                  <a:solidFill>
+                    <a:srgbClr val="0A1F3D">
+                      <a:alpha val="100000"/>
+                    </a:srgbClr>
+                  </a:solidFill>
+                  <a:latin typeface="微软雅黑" panose="020B0503020204020204" pitchFamily="34" charset="-122"/>
+                  <a:ea typeface="微软雅黑" panose="020B0503020204020204" pitchFamily="34" charset="-122"/>
+                  <a:cs typeface="微软雅黑" panose="020B0503020204020204" pitchFamily="34" charset="-122"/>
+                  <a:sym typeface="+mn-ea"/>
+                </a:rPr>
+                <a:t>流程编排层</a:t>
+              </a:r>
+              <a:endParaRPr sz="900" b="1">
+                <a:solidFill>
+                  <a:srgbClr val="0A1F3D">
+                    <a:alpha val="100000"/>
+                  </a:srgbClr>
+                </a:solidFill>
+                <a:latin typeface="微软雅黑" panose="020B0503020204020204" pitchFamily="34" charset="-122"/>
+                <a:ea typeface="微软雅黑" panose="020B0503020204020204" pitchFamily="34" charset="-122"/>
+                <a:cs typeface="微软雅黑" panose="020B0503020204020204" pitchFamily="34" charset="-122"/>
+                <a:sym typeface="+mn-ea"/>
+              </a:endParaRPr>
+            </a:p>
+            <a:p>
+              <a:pPr algn="ctr"/>
+              <a:r>
+                <a:rPr lang="zh-CN" altLang="en-US" sz="900" b="1">
+                  <a:solidFill>
+                    <a:srgbClr val="0A1F3D">
+                      <a:alpha val="100000"/>
+                    </a:srgbClr>
+                  </a:solidFill>
+                  <a:latin typeface="微软雅黑" panose="020B0503020204020204" pitchFamily="34" charset="-122"/>
+                  <a:ea typeface="微软雅黑" panose="020B0503020204020204" pitchFamily="34" charset="-122"/>
+                  <a:cs typeface="微软雅黑" panose="020B0503020204020204" pitchFamily="34" charset="-122"/>
+                  <a:sym typeface="+mn-ea"/>
+                </a:rPr>
+                <a:t>（</a:t>
+              </a:r>
+              <a:r>
+                <a:rPr lang="en-US" altLang="zh-CN" sz="900" b="1">
+                  <a:solidFill>
+                    <a:srgbClr val="0A1F3D">
+                      <a:alpha val="100000"/>
+                    </a:srgbClr>
+                  </a:solidFill>
+                  <a:latin typeface="微软雅黑" panose="020B0503020204020204" pitchFamily="34" charset="-122"/>
+                  <a:ea typeface="微软雅黑" panose="020B0503020204020204" pitchFamily="34" charset="-122"/>
+                  <a:cs typeface="微软雅黑" panose="020B0503020204020204" pitchFamily="34" charset="-122"/>
+                  <a:sym typeface="+mn-ea"/>
+                </a:rPr>
+                <a:t>Action</a:t>
+              </a:r>
+              <a:r>
+                <a:rPr lang="zh-CN" altLang="en-US" sz="900" b="1">
+                  <a:solidFill>
+                    <a:srgbClr val="0A1F3D">
+                      <a:alpha val="100000"/>
+                    </a:srgbClr>
+                  </a:solidFill>
+                  <a:latin typeface="微软雅黑" panose="020B0503020204020204" pitchFamily="34" charset="-122"/>
+                  <a:ea typeface="微软雅黑" panose="020B0503020204020204" pitchFamily="34" charset="-122"/>
+                  <a:cs typeface="微软雅黑" panose="020B0503020204020204" pitchFamily="34" charset="-122"/>
+                  <a:sym typeface="+mn-ea"/>
+                </a:rPr>
+                <a:t>：</a:t>
+              </a:r>
+              <a:r>
+                <a:rPr lang="en-US" altLang="zh-CN" sz="900" b="1">
+                  <a:solidFill>
+                    <a:srgbClr val="0A1F3D">
+                      <a:alpha val="100000"/>
+                    </a:srgbClr>
+                  </a:solidFill>
+                  <a:latin typeface="微软雅黑" panose="020B0503020204020204" pitchFamily="34" charset="-122"/>
+                  <a:ea typeface="微软雅黑" panose="020B0503020204020204" pitchFamily="34" charset="-122"/>
+                  <a:cs typeface="微软雅黑" panose="020B0503020204020204" pitchFamily="34" charset="-122"/>
+                  <a:sym typeface="+mn-ea"/>
+                </a:rPr>
+                <a:t>BPMN</a:t>
+              </a:r>
+              <a:r>
+                <a:rPr lang="zh-CN" altLang="en-US" sz="900" b="1">
+                  <a:solidFill>
+                    <a:srgbClr val="0A1F3D">
+                      <a:alpha val="100000"/>
+                    </a:srgbClr>
+                  </a:solidFill>
+                  <a:latin typeface="微软雅黑" panose="020B0503020204020204" pitchFamily="34" charset="-122"/>
+                  <a:ea typeface="微软雅黑" panose="020B0503020204020204" pitchFamily="34" charset="-122"/>
+                  <a:cs typeface="微软雅黑" panose="020B0503020204020204" pitchFamily="34" charset="-122"/>
+                  <a:sym typeface="+mn-ea"/>
+                </a:rPr>
+                <a:t>）</a:t>
+              </a:r>
+              <a:endParaRPr lang="zh-CN" altLang="en-US" sz="900" b="1">
+                <a:solidFill>
+                  <a:srgbClr val="0A1F3D">
+                    <a:alpha val="100000"/>
+                  </a:srgbClr>
+                </a:solidFill>
+                <a:latin typeface="微软雅黑" panose="020B0503020204020204" pitchFamily="34" charset="-122"/>
+                <a:ea typeface="微软雅黑" panose="020B0503020204020204" pitchFamily="34" charset="-122"/>
+                <a:cs typeface="微软雅黑" panose="020B0503020204020204" pitchFamily="34" charset="-122"/>
+                <a:sym typeface="+mn-ea"/>
+              </a:endParaRPr>
+            </a:p>
+          </p:txBody>
+        </p:sp>
+        <p:sp>
+          <p:nvSpPr>
+            <p:cNvPr id="112" name="文本框 111"/>
+            <p:cNvSpPr txBox="1"/>
+            <p:nvPr>
+              <p:custDataLst>
+                <p:tags r:id="rId3"/>
+              </p:custDataLst>
+            </p:nvPr>
+          </p:nvSpPr>
+          <p:spPr>
+            <a:xfrm>
+              <a:off x="5148" y="5401"/>
+              <a:ext cx="3232" cy="794"/>
+            </a:xfrm>
+            <a:prstGeom prst="rect">
+              <a:avLst/>
+            </a:prstGeom>
+            <a:noFill/>
+          </p:spPr>
+          <p:txBody>
+            <a:bodyPr wrap="square" rtlCol="0" anchor="t">
+              <a:noAutofit/>
+            </a:bodyPr>
+            <a:p>
+              <a:pPr algn="ctr"/>
+              <a:r>
+                <a:rPr sz="900" b="1">
+                  <a:solidFill>
+                    <a:srgbClr val="0A1F3D">
+                      <a:alpha val="100000"/>
+                    </a:srgbClr>
+                  </a:solidFill>
+                  <a:latin typeface="微软雅黑" panose="020B0503020204020204" pitchFamily="34" charset="-122"/>
+                  <a:ea typeface="微软雅黑" panose="020B0503020204020204" pitchFamily="34" charset="-122"/>
+                  <a:cs typeface="微软雅黑" panose="020B0503020204020204" pitchFamily="34" charset="-122"/>
+                  <a:sym typeface="+mn-ea"/>
+                </a:rPr>
+                <a:t>本体推理层</a:t>
+              </a:r>
+              <a:endParaRPr sz="900" b="1">
+                <a:solidFill>
+                  <a:srgbClr val="0A1F3D">
+                    <a:alpha val="100000"/>
+                  </a:srgbClr>
+                </a:solidFill>
+                <a:latin typeface="微软雅黑" panose="020B0503020204020204" pitchFamily="34" charset="-122"/>
+                <a:ea typeface="微软雅黑" panose="020B0503020204020204" pitchFamily="34" charset="-122"/>
+                <a:cs typeface="微软雅黑" panose="020B0503020204020204" pitchFamily="34" charset="-122"/>
+                <a:sym typeface="+mn-ea"/>
+              </a:endParaRPr>
+            </a:p>
+            <a:p>
+              <a:pPr algn="ctr"/>
+              <a:r>
+                <a:rPr lang="zh-CN" altLang="en-US" sz="900" b="1">
+                  <a:solidFill>
+                    <a:srgbClr val="0A1F3D">
+                      <a:alpha val="100000"/>
+                    </a:srgbClr>
+                  </a:solidFill>
+                  <a:latin typeface="微软雅黑" panose="020B0503020204020204" pitchFamily="34" charset="-122"/>
+                  <a:ea typeface="微软雅黑" panose="020B0503020204020204" pitchFamily="34" charset="-122"/>
+                  <a:cs typeface="微软雅黑" panose="020B0503020204020204" pitchFamily="34" charset="-122"/>
+                  <a:sym typeface="+mn-ea"/>
+                </a:rPr>
+                <a:t>（</a:t>
+              </a:r>
+              <a:r>
+                <a:rPr lang="en-US" altLang="zh-CN" sz="900" b="1">
+                  <a:solidFill>
+                    <a:srgbClr val="0A1F3D">
+                      <a:alpha val="100000"/>
+                    </a:srgbClr>
+                  </a:solidFill>
+                  <a:latin typeface="微软雅黑" panose="020B0503020204020204" pitchFamily="34" charset="-122"/>
+                  <a:ea typeface="微软雅黑" panose="020B0503020204020204" pitchFamily="34" charset="-122"/>
+                  <a:cs typeface="微软雅黑" panose="020B0503020204020204" pitchFamily="34" charset="-122"/>
+                  <a:sym typeface="+mn-ea"/>
+                </a:rPr>
+                <a:t>Data: RDF/OWL/SKOS/ODRL</a:t>
+              </a:r>
+              <a:endParaRPr lang="en-US" altLang="zh-CN" sz="900" b="1">
+                <a:solidFill>
+                  <a:srgbClr val="0A1F3D">
+                    <a:alpha val="100000"/>
+                  </a:srgbClr>
+                </a:solidFill>
+                <a:latin typeface="微软雅黑" panose="020B0503020204020204" pitchFamily="34" charset="-122"/>
+                <a:ea typeface="微软雅黑" panose="020B0503020204020204" pitchFamily="34" charset="-122"/>
+                <a:cs typeface="微软雅黑" panose="020B0503020204020204" pitchFamily="34" charset="-122"/>
+                <a:sym typeface="+mn-ea"/>
+              </a:endParaRPr>
+            </a:p>
+            <a:p>
+              <a:pPr algn="ctr"/>
+              <a:r>
+                <a:rPr lang="en-US" altLang="zh-CN" sz="900" b="1">
+                  <a:solidFill>
+                    <a:srgbClr val="0A1F3D">
+                      <a:alpha val="100000"/>
+                    </a:srgbClr>
+                  </a:solidFill>
+                  <a:latin typeface="微软雅黑" panose="020B0503020204020204" pitchFamily="34" charset="-122"/>
+                  <a:ea typeface="微软雅黑" panose="020B0503020204020204" pitchFamily="34" charset="-122"/>
+                  <a:cs typeface="微软雅黑" panose="020B0503020204020204" pitchFamily="34" charset="-122"/>
+                  <a:sym typeface="+mn-ea"/>
+                </a:rPr>
+                <a:t>Logic: SWRL</a:t>
+              </a:r>
+              <a:r>
+                <a:rPr lang="zh-CN" altLang="en-US" sz="900" b="1">
+                  <a:solidFill>
+                    <a:srgbClr val="0A1F3D">
+                      <a:alpha val="100000"/>
+                    </a:srgbClr>
+                  </a:solidFill>
+                  <a:latin typeface="微软雅黑" panose="020B0503020204020204" pitchFamily="34" charset="-122"/>
+                  <a:ea typeface="微软雅黑" panose="020B0503020204020204" pitchFamily="34" charset="-122"/>
+                  <a:cs typeface="微软雅黑" panose="020B0503020204020204" pitchFamily="34" charset="-122"/>
+                  <a:sym typeface="+mn-ea"/>
+                </a:rPr>
+                <a:t>）</a:t>
+              </a:r>
+              <a:endParaRPr lang="zh-CN" altLang="en-US" sz="900" b="1">
+                <a:solidFill>
+                  <a:srgbClr val="0A1F3D">
+                    <a:alpha val="100000"/>
+                  </a:srgbClr>
+                </a:solidFill>
+                <a:latin typeface="微软雅黑" panose="020B0503020204020204" pitchFamily="34" charset="-122"/>
+                <a:ea typeface="微软雅黑" panose="020B0503020204020204" pitchFamily="34" charset="-122"/>
+                <a:cs typeface="微软雅黑" panose="020B0503020204020204" pitchFamily="34" charset="-122"/>
+                <a:sym typeface="+mn-ea"/>
+              </a:endParaRPr>
+            </a:p>
+          </p:txBody>
+        </p:sp>
+        <p:sp>
+          <p:nvSpPr>
+            <p:cNvPr id="113" name="文本框 112"/>
+            <p:cNvSpPr txBox="1"/>
+            <p:nvPr>
+              <p:custDataLst>
+                <p:tags r:id="rId4"/>
+              </p:custDataLst>
+            </p:nvPr>
+          </p:nvSpPr>
+          <p:spPr>
+            <a:xfrm>
+              <a:off x="5747" y="7256"/>
+              <a:ext cx="1873" cy="461"/>
+            </a:xfrm>
+            <a:prstGeom prst="rect">
+              <a:avLst/>
+            </a:prstGeom>
+            <a:noFill/>
+          </p:spPr>
+          <p:txBody>
+            <a:bodyPr wrap="square" rtlCol="0" anchor="t">
+              <a:noAutofit/>
+            </a:bodyPr>
+            <a:p>
+              <a:pPr algn="ctr"/>
+              <a:r>
+                <a:rPr lang="zh-CN" sz="900" b="1">
+                  <a:solidFill>
+                    <a:srgbClr val="0A1F3D">
+                      <a:alpha val="100000"/>
+                    </a:srgbClr>
+                  </a:solidFill>
+                  <a:latin typeface="微软雅黑" panose="020B0503020204020204" pitchFamily="34" charset="-122"/>
+                  <a:ea typeface="微软雅黑" panose="020B0503020204020204" pitchFamily="34" charset="-122"/>
+                  <a:cs typeface="微软雅黑" panose="020B0503020204020204" pitchFamily="34" charset="-122"/>
+                  <a:sym typeface="+mn-ea"/>
+                </a:rPr>
+                <a:t>语义映射</a:t>
+              </a:r>
+              <a:r>
+                <a:rPr sz="900" b="1">
+                  <a:solidFill>
+                    <a:srgbClr val="0A1F3D">
+                      <a:alpha val="100000"/>
+                    </a:srgbClr>
+                  </a:solidFill>
+                  <a:latin typeface="微软雅黑" panose="020B0503020204020204" pitchFamily="34" charset="-122"/>
+                  <a:ea typeface="微软雅黑" panose="020B0503020204020204" pitchFamily="34" charset="-122"/>
+                  <a:cs typeface="微软雅黑" panose="020B0503020204020204" pitchFamily="34" charset="-122"/>
+                  <a:sym typeface="+mn-ea"/>
+                </a:rPr>
+                <a:t>层</a:t>
+              </a:r>
+              <a:endParaRPr sz="900" b="1">
+                <a:solidFill>
+                  <a:srgbClr val="0A1F3D">
+                    <a:alpha val="100000"/>
+                  </a:srgbClr>
+                </a:solidFill>
+                <a:latin typeface="微软雅黑" panose="020B0503020204020204" pitchFamily="34" charset="-122"/>
+                <a:ea typeface="微软雅黑" panose="020B0503020204020204" pitchFamily="34" charset="-122"/>
+                <a:cs typeface="微软雅黑" panose="020B0503020204020204" pitchFamily="34" charset="-122"/>
+                <a:sym typeface="+mn-ea"/>
+              </a:endParaRPr>
+            </a:p>
+            <a:p>
+              <a:pPr algn="ctr"/>
+              <a:r>
+                <a:rPr lang="zh-CN" altLang="en-US" sz="900" b="1">
+                  <a:solidFill>
+                    <a:srgbClr val="0A1F3D">
+                      <a:alpha val="100000"/>
+                    </a:srgbClr>
+                  </a:solidFill>
+                  <a:latin typeface="微软雅黑" panose="020B0503020204020204" pitchFamily="34" charset="-122"/>
+                  <a:ea typeface="微软雅黑" panose="020B0503020204020204" pitchFamily="34" charset="-122"/>
+                  <a:cs typeface="微软雅黑" panose="020B0503020204020204" pitchFamily="34" charset="-122"/>
+                  <a:sym typeface="+mn-ea"/>
+                </a:rPr>
+                <a:t>（</a:t>
+              </a:r>
+              <a:r>
+                <a:rPr lang="en-US" altLang="zh-CN" sz="900" b="1">
+                  <a:solidFill>
+                    <a:srgbClr val="0A1F3D">
+                      <a:alpha val="100000"/>
+                    </a:srgbClr>
+                  </a:solidFill>
+                  <a:latin typeface="微软雅黑" panose="020B0503020204020204" pitchFamily="34" charset="-122"/>
+                  <a:ea typeface="微软雅黑" panose="020B0503020204020204" pitchFamily="34" charset="-122"/>
+                  <a:cs typeface="微软雅黑" panose="020B0503020204020204" pitchFamily="34" charset="-122"/>
+                  <a:sym typeface="+mn-ea"/>
+                </a:rPr>
+                <a:t>SPARQL</a:t>
+              </a:r>
+              <a:r>
+                <a:rPr lang="zh-CN" altLang="en-US" sz="900" b="1">
+                  <a:solidFill>
+                    <a:srgbClr val="0A1F3D">
+                      <a:alpha val="100000"/>
+                    </a:srgbClr>
+                  </a:solidFill>
+                  <a:latin typeface="微软雅黑" panose="020B0503020204020204" pitchFamily="34" charset="-122"/>
+                  <a:ea typeface="微软雅黑" panose="020B0503020204020204" pitchFamily="34" charset="-122"/>
+                  <a:cs typeface="微软雅黑" panose="020B0503020204020204" pitchFamily="34" charset="-122"/>
+                  <a:sym typeface="+mn-ea"/>
+                </a:rPr>
+                <a:t>）</a:t>
+              </a:r>
+              <a:endParaRPr lang="zh-CN" altLang="en-US" sz="900" b="1">
+                <a:solidFill>
+                  <a:srgbClr val="0A1F3D">
+                    <a:alpha val="100000"/>
+                  </a:srgbClr>
+                </a:solidFill>
+                <a:latin typeface="微软雅黑" panose="020B0503020204020204" pitchFamily="34" charset="-122"/>
+                <a:ea typeface="微软雅黑" panose="020B0503020204020204" pitchFamily="34" charset="-122"/>
+                <a:cs typeface="微软雅黑" panose="020B0503020204020204" pitchFamily="34" charset="-122"/>
+                <a:sym typeface="+mn-ea"/>
+              </a:endParaRPr>
+            </a:p>
+          </p:txBody>
+        </p:sp>
+        <p:sp>
+          <p:nvSpPr>
+            <p:cNvPr id="114" name="文本框 113"/>
+            <p:cNvSpPr txBox="1"/>
+            <p:nvPr>
+              <p:custDataLst>
+                <p:tags r:id="rId5"/>
+              </p:custDataLst>
+            </p:nvPr>
+          </p:nvSpPr>
+          <p:spPr>
+            <a:xfrm>
+              <a:off x="5747" y="8803"/>
+              <a:ext cx="1873" cy="461"/>
+            </a:xfrm>
+            <a:prstGeom prst="rect">
+              <a:avLst/>
+            </a:prstGeom>
+            <a:noFill/>
+          </p:spPr>
+          <p:txBody>
+            <a:bodyPr wrap="square" rtlCol="0" anchor="t">
+              <a:noAutofit/>
+            </a:bodyPr>
+            <a:p>
+              <a:pPr algn="ctr"/>
+              <a:r>
+                <a:rPr lang="zh-CN" sz="900" b="1">
+                  <a:solidFill>
+                    <a:srgbClr val="0A1F3D">
+                      <a:alpha val="100000"/>
+                    </a:srgbClr>
+                  </a:solidFill>
+                  <a:latin typeface="微软雅黑" panose="020B0503020204020204" pitchFamily="34" charset="-122"/>
+                  <a:ea typeface="微软雅黑" panose="020B0503020204020204" pitchFamily="34" charset="-122"/>
+                  <a:cs typeface="微软雅黑" panose="020B0503020204020204" pitchFamily="34" charset="-122"/>
+                  <a:sym typeface="+mn-ea"/>
+                </a:rPr>
+                <a:t>数据存储</a:t>
+              </a:r>
+              <a:r>
+                <a:rPr sz="900" b="1">
+                  <a:solidFill>
+                    <a:srgbClr val="0A1F3D">
+                      <a:alpha val="100000"/>
+                    </a:srgbClr>
+                  </a:solidFill>
+                  <a:latin typeface="微软雅黑" panose="020B0503020204020204" pitchFamily="34" charset="-122"/>
+                  <a:ea typeface="微软雅黑" panose="020B0503020204020204" pitchFamily="34" charset="-122"/>
+                  <a:cs typeface="微软雅黑" panose="020B0503020204020204" pitchFamily="34" charset="-122"/>
+                  <a:sym typeface="+mn-ea"/>
+                </a:rPr>
+                <a:t>层</a:t>
+              </a:r>
+              <a:endParaRPr lang="zh-CN" altLang="en-US" sz="900" b="1">
+                <a:solidFill>
+                  <a:srgbClr val="0A1F3D">
+                    <a:alpha val="100000"/>
+                  </a:srgbClr>
+                </a:solidFill>
+                <a:latin typeface="微软雅黑" panose="020B0503020204020204" pitchFamily="34" charset="-122"/>
+                <a:ea typeface="微软雅黑" panose="020B0503020204020204" pitchFamily="34" charset="-122"/>
+                <a:cs typeface="微软雅黑" panose="020B0503020204020204" pitchFamily="34" charset="-122"/>
+                <a:sym typeface="+mn-ea"/>
+              </a:endParaRPr>
+            </a:p>
+          </p:txBody>
+        </p:sp>
+      </p:grpSp>
+      <p:sp>
+        <p:nvSpPr>
+          <p:cNvPr id="125" name="AutoShape 21"/>
+          <p:cNvSpPr/>
+          <p:nvPr/>
+        </p:nvSpPr>
+        <p:spPr>
+          <a:xfrm>
+            <a:off x="6372789" y="1479490"/>
+            <a:ext cx="152362" cy="152400"/>
+          </a:xfrm>
+          <a:custGeom>
+            <a:avLst/>
+            <a:gdLst/>
+            <a:ahLst/>
+            <a:cxnLst/>
+            <a:rect l="l" t="t" r="r" b="b"/>
+            <a:pathLst>
+              <a:path w="9998" h="10000">
+                <a:moveTo>
+                  <a:pt x="5624" y="737"/>
+                </a:moveTo>
+                <a:lnTo>
+                  <a:pt x="5624" y="727"/>
+                </a:lnTo>
+                <a:cubicBezTo>
+                  <a:pt x="5624" y="837"/>
+                  <a:pt x="5606" y="940"/>
+                  <a:pt x="5570" y="1035"/>
+                </a:cubicBezTo>
+                <a:cubicBezTo>
+                  <a:pt x="5534" y="1129"/>
+                  <a:pt x="5482" y="1208"/>
+                  <a:pt x="5416" y="1274"/>
+                </a:cubicBezTo>
+                <a:lnTo>
+                  <a:pt x="5416" y="2191"/>
+                </a:lnTo>
+                <a:lnTo>
+                  <a:pt x="7499" y="2191"/>
+                </a:lnTo>
+                <a:cubicBezTo>
+                  <a:pt x="7726" y="2191"/>
+                  <a:pt x="7936" y="2257"/>
+                  <a:pt x="8128" y="2391"/>
+                </a:cubicBezTo>
+                <a:cubicBezTo>
+                  <a:pt x="8319" y="2525"/>
+                  <a:pt x="8470" y="2704"/>
+                  <a:pt x="8582" y="2928"/>
+                </a:cubicBezTo>
+                <a:cubicBezTo>
+                  <a:pt x="8692" y="3152"/>
+                  <a:pt x="8748" y="3395"/>
+                  <a:pt x="8748" y="3655"/>
+                </a:cubicBezTo>
+                <a:lnTo>
+                  <a:pt x="8748" y="8536"/>
+                </a:lnTo>
+                <a:cubicBezTo>
+                  <a:pt x="8748" y="8802"/>
+                  <a:pt x="8692" y="9048"/>
+                  <a:pt x="8582" y="9273"/>
+                </a:cubicBezTo>
+                <a:cubicBezTo>
+                  <a:pt x="8470" y="9497"/>
+                  <a:pt x="8319" y="9676"/>
+                  <a:pt x="8128" y="9810"/>
+                </a:cubicBezTo>
+                <a:cubicBezTo>
+                  <a:pt x="7936" y="9943"/>
+                  <a:pt x="7726" y="10006"/>
+                  <a:pt x="7499" y="10000"/>
+                </a:cubicBezTo>
+                <a:lnTo>
+                  <a:pt x="2499" y="10000"/>
+                </a:lnTo>
+                <a:cubicBezTo>
+                  <a:pt x="2271" y="10006"/>
+                  <a:pt x="2062" y="9943"/>
+                  <a:pt x="1870" y="9810"/>
+                </a:cubicBezTo>
+                <a:cubicBezTo>
+                  <a:pt x="1678" y="9676"/>
+                  <a:pt x="1527" y="9497"/>
+                  <a:pt x="1416" y="9273"/>
+                </a:cubicBezTo>
+                <a:cubicBezTo>
+                  <a:pt x="1305" y="9048"/>
+                  <a:pt x="1250" y="8802"/>
+                  <a:pt x="1250" y="8536"/>
+                </a:cubicBezTo>
+                <a:lnTo>
+                  <a:pt x="1250" y="3655"/>
+                </a:lnTo>
+                <a:cubicBezTo>
+                  <a:pt x="1250" y="3395"/>
+                  <a:pt x="1305" y="3152"/>
+                  <a:pt x="1416" y="2928"/>
+                </a:cubicBezTo>
+                <a:cubicBezTo>
+                  <a:pt x="1527" y="2704"/>
+                  <a:pt x="1678" y="2525"/>
+                  <a:pt x="1870" y="2391"/>
+                </a:cubicBezTo>
+                <a:cubicBezTo>
+                  <a:pt x="2062" y="2257"/>
+                  <a:pt x="2271" y="2191"/>
+                  <a:pt x="2499" y="2191"/>
+                </a:cubicBezTo>
+                <a:lnTo>
+                  <a:pt x="4582" y="2191"/>
+                </a:lnTo>
+                <a:lnTo>
+                  <a:pt x="4582" y="1274"/>
+                </a:lnTo>
+                <a:cubicBezTo>
+                  <a:pt x="4515" y="1208"/>
+                  <a:pt x="4464" y="1129"/>
+                  <a:pt x="4428" y="1035"/>
+                </a:cubicBezTo>
+                <a:cubicBezTo>
+                  <a:pt x="4392" y="940"/>
+                  <a:pt x="4374" y="841"/>
+                  <a:pt x="4374" y="737"/>
+                </a:cubicBezTo>
+                <a:cubicBezTo>
+                  <a:pt x="4374" y="529"/>
+                  <a:pt x="4435" y="353"/>
+                  <a:pt x="4557" y="210"/>
+                </a:cubicBezTo>
+                <a:cubicBezTo>
+                  <a:pt x="4679" y="66"/>
+                  <a:pt x="4827" y="-3"/>
+                  <a:pt x="4999" y="0"/>
+                </a:cubicBezTo>
+                <a:cubicBezTo>
+                  <a:pt x="5171" y="3"/>
+                  <a:pt x="5318" y="75"/>
+                  <a:pt x="5441" y="215"/>
+                </a:cubicBezTo>
+                <a:cubicBezTo>
+                  <a:pt x="5563" y="355"/>
+                  <a:pt x="5624" y="529"/>
+                  <a:pt x="5624" y="737"/>
+                </a:cubicBezTo>
+                <a:moveTo>
+                  <a:pt x="7499" y="3167"/>
+                </a:moveTo>
+                <a:lnTo>
+                  <a:pt x="2499" y="3167"/>
+                </a:lnTo>
+                <a:cubicBezTo>
+                  <a:pt x="2383" y="3167"/>
+                  <a:pt x="2284" y="3216"/>
+                  <a:pt x="2204" y="3314"/>
+                </a:cubicBezTo>
+                <a:cubicBezTo>
+                  <a:pt x="2123" y="3411"/>
+                  <a:pt x="2083" y="3525"/>
+                  <a:pt x="2083" y="3655"/>
+                </a:cubicBezTo>
+                <a:lnTo>
+                  <a:pt x="2083" y="8536"/>
+                </a:lnTo>
+                <a:cubicBezTo>
+                  <a:pt x="2083" y="8672"/>
+                  <a:pt x="2123" y="8788"/>
+                  <a:pt x="2204" y="8882"/>
+                </a:cubicBezTo>
+                <a:cubicBezTo>
+                  <a:pt x="2284" y="8976"/>
+                  <a:pt x="2383" y="9024"/>
+                  <a:pt x="2499" y="9024"/>
+                </a:cubicBezTo>
+                <a:lnTo>
+                  <a:pt x="7499" y="9024"/>
+                </a:lnTo>
+                <a:cubicBezTo>
+                  <a:pt x="7615" y="9024"/>
+                  <a:pt x="7713" y="8976"/>
+                  <a:pt x="7794" y="8882"/>
+                </a:cubicBezTo>
+                <a:cubicBezTo>
+                  <a:pt x="7874" y="8788"/>
+                  <a:pt x="7915" y="8672"/>
+                  <a:pt x="7915" y="8536"/>
+                </a:cubicBezTo>
+                <a:lnTo>
+                  <a:pt x="7915" y="3655"/>
+                </a:lnTo>
+                <a:cubicBezTo>
+                  <a:pt x="7915" y="3525"/>
+                  <a:pt x="7874" y="3413"/>
+                  <a:pt x="7794" y="3319"/>
+                </a:cubicBezTo>
+                <a:cubicBezTo>
+                  <a:pt x="7713" y="3224"/>
+                  <a:pt x="7615" y="3173"/>
+                  <a:pt x="7499" y="3167"/>
+                </a:cubicBezTo>
+                <a:moveTo>
+                  <a:pt x="833" y="7560"/>
+                </a:moveTo>
+                <a:lnTo>
+                  <a:pt x="833" y="4632"/>
+                </a:lnTo>
+                <a:lnTo>
+                  <a:pt x="0" y="4632"/>
+                </a:lnTo>
+                <a:lnTo>
+                  <a:pt x="0" y="7560"/>
+                </a:lnTo>
+                <a:lnTo>
+                  <a:pt x="833" y="7560"/>
+                </a:lnTo>
+                <a:moveTo>
+                  <a:pt x="9165" y="7560"/>
+                </a:moveTo>
+                <a:lnTo>
+                  <a:pt x="9165" y="4632"/>
+                </a:lnTo>
+                <a:lnTo>
+                  <a:pt x="9998" y="4632"/>
+                </a:lnTo>
+                <a:lnTo>
+                  <a:pt x="9998" y="7560"/>
+                </a:lnTo>
+                <a:lnTo>
+                  <a:pt x="9165" y="7560"/>
+                </a:lnTo>
+                <a:moveTo>
+                  <a:pt x="3749" y="6828"/>
+                </a:moveTo>
+                <a:cubicBezTo>
+                  <a:pt x="3921" y="6834"/>
+                  <a:pt x="4069" y="6765"/>
+                  <a:pt x="4191" y="6623"/>
+                </a:cubicBezTo>
+                <a:cubicBezTo>
+                  <a:pt x="4313" y="6479"/>
+                  <a:pt x="4374" y="6305"/>
+                  <a:pt x="4374" y="6101"/>
+                </a:cubicBezTo>
+                <a:cubicBezTo>
+                  <a:pt x="4374" y="5895"/>
+                  <a:pt x="4313" y="5721"/>
+                  <a:pt x="4191" y="5578"/>
+                </a:cubicBezTo>
+                <a:cubicBezTo>
+                  <a:pt x="4069" y="5435"/>
+                  <a:pt x="3921" y="5365"/>
+                  <a:pt x="3749" y="5368"/>
+                </a:cubicBezTo>
+                <a:cubicBezTo>
+                  <a:pt x="3577" y="5371"/>
+                  <a:pt x="3430" y="5443"/>
+                  <a:pt x="3308" y="5583"/>
+                </a:cubicBezTo>
+                <a:cubicBezTo>
+                  <a:pt x="3185" y="5723"/>
+                  <a:pt x="3124" y="5895"/>
+                  <a:pt x="3124" y="6101"/>
+                </a:cubicBezTo>
+                <a:cubicBezTo>
+                  <a:pt x="3124" y="6305"/>
+                  <a:pt x="3185" y="6478"/>
+                  <a:pt x="3308" y="6618"/>
+                </a:cubicBezTo>
+                <a:cubicBezTo>
+                  <a:pt x="3430" y="6758"/>
+                  <a:pt x="3577" y="6828"/>
+                  <a:pt x="3749" y="6828"/>
+                </a:cubicBezTo>
+                <a:moveTo>
+                  <a:pt x="6249" y="6828"/>
+                </a:moveTo>
+                <a:cubicBezTo>
+                  <a:pt x="6421" y="6828"/>
+                  <a:pt x="6568" y="6758"/>
+                  <a:pt x="6690" y="6618"/>
+                </a:cubicBezTo>
+                <a:cubicBezTo>
+                  <a:pt x="6812" y="6478"/>
+                  <a:pt x="6874" y="6305"/>
+                  <a:pt x="6874" y="6101"/>
+                </a:cubicBezTo>
+                <a:cubicBezTo>
+                  <a:pt x="6874" y="5895"/>
+                  <a:pt x="6812" y="5721"/>
+                  <a:pt x="6690" y="5578"/>
+                </a:cubicBezTo>
+                <a:cubicBezTo>
+                  <a:pt x="6568" y="5435"/>
+                  <a:pt x="6421" y="5365"/>
+                  <a:pt x="6249" y="5368"/>
+                </a:cubicBezTo>
+                <a:cubicBezTo>
+                  <a:pt x="6076" y="5371"/>
+                  <a:pt x="5929" y="5443"/>
+                  <a:pt x="5807" y="5583"/>
+                </a:cubicBezTo>
+                <a:cubicBezTo>
+                  <a:pt x="5685" y="5723"/>
+                  <a:pt x="5624" y="5895"/>
+                  <a:pt x="5624" y="6101"/>
+                </a:cubicBezTo>
+                <a:cubicBezTo>
+                  <a:pt x="5624" y="6305"/>
+                  <a:pt x="5685" y="6478"/>
+                  <a:pt x="5807" y="6618"/>
+                </a:cubicBezTo>
+                <a:cubicBezTo>
+                  <a:pt x="5929" y="6758"/>
+                  <a:pt x="6076" y="6828"/>
+                  <a:pt x="6249" y="6828"/>
+                </a:cubicBezTo>
+              </a:path>
+            </a:pathLst>
+          </a:custGeom>
+          <a:solidFill>
+            <a:srgbClr val="2B4C9B">
+              <a:alpha val="100000"/>
+            </a:srgbClr>
+          </a:solidFill>
+          <a:ln>
+            <a:solidFill>
+              <a:srgbClr val="C00000"/>
+            </a:solidFill>
+            <a:headEnd type="none"/>
+            <a:tailEnd type="none"/>
+          </a:ln>
+        </p:spPr>
+      </p:sp>
+      <p:sp>
+        <p:nvSpPr>
+          <p:cNvPr id="126" name="TextBox 22"/>
+          <p:cNvSpPr txBox="1"/>
+          <p:nvPr/>
+        </p:nvSpPr>
+        <p:spPr>
+          <a:xfrm>
+            <a:off x="6584445" y="1455678"/>
+            <a:ext cx="2076079" cy="190500"/>
+          </a:xfrm>
+          <a:prstGeom prst="rect">
+            <a:avLst/>
+          </a:prstGeom>
+          <a:ln>
+            <a:headEnd type="none"/>
+            <a:tailEnd type="none"/>
+          </a:ln>
+        </p:spPr>
+        <p:txBody>
+          <a:bodyPr vert="horz" wrap="none" lIns="0" tIns="0" rIns="0" bIns="0" rtlCol="0" anchor="t" anchorCtr="0"/>
+          <a:lstStyle/>
+          <a:p>
+            <a:pPr algn="l">
+              <a:defRPr/>
+            </a:pPr>
+            <a:r>
+              <a:rPr lang="zh-CN" altLang="en-US" sz="1300" b="1" i="0" strike="noStrike">
+                <a:solidFill>
+                  <a:srgbClr val="1A1A1A">
+                    <a:alpha val="100000"/>
+                  </a:srgbClr>
+                </a:solidFill>
+                <a:latin typeface="微软雅黑" panose="020B0503020204020204" pitchFamily="34" charset="-122"/>
+                <a:ea typeface="微软雅黑" panose="020B0503020204020204" pitchFamily="34" charset="-122"/>
+                <a:cs typeface="微软雅黑" panose="020B0503020204020204" pitchFamily="34" charset="-122"/>
+              </a:rPr>
+              <a:t>本</a:t>
+            </a:r>
+            <a:r>
+              <a:rPr lang="en-US" sz="1300" b="1" i="0" strike="noStrike">
+                <a:solidFill>
+                  <a:srgbClr val="1A1A1A">
+                    <a:alpha val="100000"/>
+                  </a:srgbClr>
+                </a:solidFill>
+                <a:latin typeface="微软雅黑" panose="020B0503020204020204" pitchFamily="34" charset="-122"/>
+                <a:ea typeface="微软雅黑" panose="020B0503020204020204" pitchFamily="34" charset="-122"/>
+                <a:cs typeface="微软雅黑" panose="020B0503020204020204" pitchFamily="34" charset="-122"/>
+              </a:rPr>
+              <a:t>体</a:t>
+            </a:r>
+            <a:r>
+              <a:rPr lang="zh-CN" altLang="en-US" sz="1300" b="1" i="0" strike="noStrike">
+                <a:solidFill>
+                  <a:srgbClr val="1A1A1A">
+                    <a:alpha val="100000"/>
+                  </a:srgbClr>
+                </a:solidFill>
+                <a:latin typeface="微软雅黑" panose="020B0503020204020204" pitchFamily="34" charset="-122"/>
+                <a:ea typeface="微软雅黑" panose="020B0503020204020204" pitchFamily="34" charset="-122"/>
+                <a:cs typeface="微软雅黑" panose="020B0503020204020204" pitchFamily="34" charset="-122"/>
+              </a:rPr>
+              <a:t>运行</a:t>
+            </a:r>
+            <a:endParaRPr lang="zh-CN" altLang="en-US" sz="1300" b="1" i="0" strike="noStrike">
+              <a:solidFill>
+                <a:srgbClr val="1A1A1A">
+                  <a:alpha val="100000"/>
+                </a:srgbClr>
+              </a:solidFill>
+              <a:latin typeface="微软雅黑" panose="020B0503020204020204" pitchFamily="34" charset="-122"/>
+              <a:ea typeface="微软雅黑" panose="020B0503020204020204" pitchFamily="34" charset="-122"/>
+              <a:cs typeface="微软雅黑" panose="020B0503020204020204" pitchFamily="34" charset="-122"/>
+            </a:endParaRPr>
+          </a:p>
+        </p:txBody>
+      </p:sp>
+      <p:sp>
+        <p:nvSpPr>
+          <p:cNvPr id="127" name="标题 126"/>
+          <p:cNvSpPr>
+            <a:spLocks noGrp="1"/>
+          </p:cNvSpPr>
+          <p:nvPr>
+            <p:ph type="title"/>
+          </p:nvPr>
+        </p:nvSpPr>
+        <p:spPr/>
+        <p:txBody>
+          <a:bodyPr>
+            <a:normAutofit/>
+          </a:bodyPr>
+          <a:p>
+            <a:r>
+              <a:rPr lang="zh-CN" altLang="en-US"/>
+              <a:t>7+1语义体系：构建智能业务本体的技术基石</a:t>
+            </a:r>
+            <a:endParaRPr lang="zh-CN" altLang="en-US"/>
+          </a:p>
+        </p:txBody>
+      </p:sp>
+    </p:spTree>
+  </p:cSld>
+  <p:clrMapOvr>
+    <a:masterClrMapping/>
+  </p:clrMapOvr>
+</p:sld>
+</file>
+
+<file path=ppt/slides/slide13.xml><?xml version="1.0" encoding="utf-8"?>
+<p:sld xmlns:a="http://schemas.openxmlformats.org/drawingml/2006/main" xmlns:r="http://schemas.openxmlformats.org/officeDocument/2006/relationships" xmlns:p="http://schemas.openxmlformats.org/presentationml/2006/main">
+  <p:cSld>
+    <p:spTree>
+      <p:nvGrpSpPr>
+        <p:cNvPr id="1" name=""/>
+        <p:cNvGrpSpPr/>
+        <p:nvPr/>
+      </p:nvGrpSpPr>
+      <p:grpSpPr/>
       <p:sp>
         <p:nvSpPr>
           <p:cNvPr id="2" name="标题 1"/>
@@ -10824,7 +16271,7 @@
 </p:sld>
 </file>
 
-<file path=ppt/slides/slide12.xml><?xml version="1.0" encoding="utf-8"?>
+<file path=ppt/slides/slide14.xml><?xml version="1.0" encoding="utf-8"?>
 <p:sld xmlns:a="http://schemas.openxmlformats.org/drawingml/2006/main" xmlns:r="http://schemas.openxmlformats.org/officeDocument/2006/relationships" xmlns:p="http://schemas.openxmlformats.org/presentationml/2006/main">
   <p:cSld>
     <p:spTree>
@@ -13753,7 +19200,7 @@
 </p:sld>
 </file>
 
-<file path=ppt/slides/slide13.xml><?xml version="1.0" encoding="utf-8"?>
+<file path=ppt/slides/slide15.xml><?xml version="1.0" encoding="utf-8"?>
 <p:sld xmlns:a="http://schemas.openxmlformats.org/drawingml/2006/main" xmlns:r="http://schemas.openxmlformats.org/officeDocument/2006/relationships" xmlns:p="http://schemas.openxmlformats.org/presentationml/2006/main">
   <p:cSld>
     <p:spTree>
@@ -15732,7 +21179,7 @@
 </p:sld>
 </file>
 
-<file path=ppt/slides/slide14.xml><?xml version="1.0" encoding="utf-8"?>
+<file path=ppt/slides/slide16.xml><?xml version="1.0" encoding="utf-8"?>
 <p:sld xmlns:a="http://schemas.openxmlformats.org/drawingml/2006/main" xmlns:r="http://schemas.openxmlformats.org/officeDocument/2006/relationships" xmlns:p="http://schemas.openxmlformats.org/presentationml/2006/main">
   <p:cSld>
     <p:spTree>
@@ -15784,7 +21231,7 @@
 </p:sld>
 </file>
 
-<file path=ppt/slides/slide15.xml><?xml version="1.0" encoding="utf-8"?>
+<file path=ppt/slides/slide17.xml><?xml version="1.0" encoding="utf-8"?>
 <p:sld xmlns:a="http://schemas.openxmlformats.org/drawingml/2006/main" xmlns:r="http://schemas.openxmlformats.org/officeDocument/2006/relationships" xmlns:p="http://schemas.openxmlformats.org/presentationml/2006/main">
   <p:cSld>
     <p:spTree>
@@ -16326,7 +21773,7 @@
 </p:sld>
 </file>
 
-<file path=ppt/slides/slide16.xml><?xml version="1.0" encoding="utf-8"?>
+<file path=ppt/slides/slide18.xml><?xml version="1.0" encoding="utf-8"?>
 <p:sld xmlns:a="http://schemas.openxmlformats.org/drawingml/2006/main" xmlns:r="http://schemas.openxmlformats.org/officeDocument/2006/relationships" xmlns:p="http://schemas.openxmlformats.org/presentationml/2006/main">
   <p:cSld>
     <p:spTree>
@@ -18421,7 +23868,7 @@
 </p:sld>
 </file>
 
-<file path=ppt/slides/slide17.xml><?xml version="1.0" encoding="utf-8"?>
+<file path=ppt/slides/slide19.xml><?xml version="1.0" encoding="utf-8"?>
 <p:sld xmlns:a="http://schemas.openxmlformats.org/drawingml/2006/main" xmlns:r="http://schemas.openxmlformats.org/officeDocument/2006/relationships" xmlns:p="http://schemas.openxmlformats.org/presentationml/2006/main">
   <p:cSld>
     <p:spTree>
@@ -22160,7 +27607,1138 @@
 </p:sld>
 </file>
 
-<file path=ppt/slides/slide18.xml><?xml version="1.0" encoding="utf-8"?>
+<file path=ppt/slides/slide2.xml><?xml version="1.0" encoding="utf-8"?>
+<p:sld xmlns:a="http://schemas.openxmlformats.org/drawingml/2006/main" xmlns:r="http://schemas.openxmlformats.org/officeDocument/2006/relationships" xmlns:p="http://schemas.openxmlformats.org/presentationml/2006/main">
+  <p:cSld>
+    <p:spTree>
+      <p:nvGrpSpPr>
+        <p:cNvPr id="1" name=""/>
+        <p:cNvGrpSpPr/>
+        <p:nvPr/>
+      </p:nvGrpSpPr>
+      <p:grpSpPr>
+        <a:xfrm>
+          <a:off x="0" y="0"/>
+          <a:ext cx="0" cy="0"/>
+          <a:chOff x="0" y="0"/>
+          <a:chExt cx="0" cy="0"/>
+        </a:xfrm>
+      </p:grpSpPr>
+      <p:sp>
+        <p:nvSpPr>
+          <p:cNvPr id="3" name="AutoShape 3"/>
+          <p:cNvSpPr/>
+          <p:nvPr/>
+        </p:nvSpPr>
+        <p:spPr>
+          <a:xfrm>
+            <a:off x="408834" y="261702"/>
+            <a:ext cx="11432117" cy="762141"/>
+          </a:xfrm>
+          <a:prstGeom prst="rect">
+            <a:avLst/>
+          </a:prstGeom>
+          <a:noFill/>
+          <a:ln w="12700" cap="flat" cmpd="sng">
+            <a:noFill/>
+            <a:prstDash val="solid"/>
+            <a:round/>
+          </a:ln>
+        </p:spPr>
+        <p:txBody>
+          <a:bodyPr vert="horz" wrap="square" lIns="0" tIns="0" rIns="0" bIns="0" rtlCol="0" anchor="ctr" anchorCtr="0"/>
+          <a:lstStyle/>
+          <a:p>
+            <a:pPr marL="0" indent="0" algn="l">
+              <a:lnSpc>
+                <a:spcPct val="125000"/>
+              </a:lnSpc>
+              <a:defRPr/>
+            </a:pPr>
+            <a:r>
+              <a:rPr lang="en-US" sz="2800" b="1" i="0" u="none" strike="noStrike">
+                <a:solidFill>
+                  <a:srgbClr val="B91C1C"/>
+                </a:solidFill>
+                <a:latin typeface="Noto Sans SC" panose="020B0200000000000000" charset="-122"/>
+                <a:ea typeface="Noto Sans SC" panose="020B0200000000000000" charset="-122"/>
+                <a:cs typeface="Noto Sans SC" panose="020B0200000000000000" charset="-122"/>
+                <a:sym typeface="Noto Sans SC" panose="020B0200000000000000" charset="-122"/>
+              </a:rPr>
+              <a:t>LLM的核心挑战（一）：准确性与可解释性</a:t>
+            </a:r>
+            <a:endParaRPr lang="en-US" sz="1100"/>
+          </a:p>
+        </p:txBody>
+      </p:sp>
+      <p:sp>
+        <p:nvSpPr>
+          <p:cNvPr id="4" name="AutoShape 4"/>
+          <p:cNvSpPr/>
+          <p:nvPr/>
+        </p:nvSpPr>
+        <p:spPr>
+          <a:xfrm>
+            <a:off x="381529" y="1397259"/>
+            <a:ext cx="5525523" cy="508094"/>
+          </a:xfrm>
+          <a:prstGeom prst="roundRect">
+            <a:avLst>
+              <a:gd name="adj" fmla="val 0"/>
+            </a:avLst>
+          </a:prstGeom>
+          <a:solidFill>
+            <a:srgbClr val="FEF2F2">
+              <a:alpha val="100000"/>
+            </a:srgbClr>
+          </a:solidFill>
+          <a:ln w="25400" cap="flat" cmpd="sng">
+            <a:noFill/>
+            <a:prstDash val="solid"/>
+            <a:round/>
+          </a:ln>
+        </p:spPr>
+        <p:txBody>
+          <a:bodyPr vert="horz" wrap="square" lIns="63511" tIns="63511" rIns="63511" bIns="63511" rtlCol="0" anchor="ctr"/>
+          <a:lstStyle/>
+          <a:p>
+            <a:pPr algn="ctr">
+              <a:defRPr/>
+            </a:pPr>
+          </a:p>
+        </p:txBody>
+      </p:sp>
+      <p:sp>
+        <p:nvSpPr>
+          <p:cNvPr id="5" name="AutoShape 5"/>
+          <p:cNvSpPr/>
+          <p:nvPr/>
+        </p:nvSpPr>
+        <p:spPr>
+          <a:xfrm>
+            <a:off x="508553" y="1473473"/>
+            <a:ext cx="5271476" cy="381071"/>
+          </a:xfrm>
+          <a:prstGeom prst="rect">
+            <a:avLst/>
+          </a:prstGeom>
+          <a:noFill/>
+          <a:ln w="12700" cap="flat" cmpd="sng">
+            <a:noFill/>
+            <a:prstDash val="solid"/>
+            <a:round/>
+          </a:ln>
+        </p:spPr>
+        <p:txBody>
+          <a:bodyPr vert="horz" wrap="square" lIns="0" tIns="0" rIns="0" bIns="0" rtlCol="0" anchor="ctr" anchorCtr="0"/>
+          <a:lstStyle/>
+          <a:p>
+            <a:pPr marL="0" indent="0" algn="l">
+              <a:lnSpc>
+                <a:spcPct val="125000"/>
+              </a:lnSpc>
+              <a:defRPr/>
+            </a:pPr>
+            <a:r>
+              <a:rPr lang="en-US" sz="1800" b="1" i="0" u="none" strike="noStrike">
+                <a:solidFill>
+                  <a:srgbClr val="B91C1C"/>
+                </a:solidFill>
+                <a:latin typeface="Noto Sans SC" panose="020B0200000000000000" charset="-122"/>
+                <a:ea typeface="Noto Sans SC" panose="020B0200000000000000" charset="-122"/>
+                <a:cs typeface="Noto Sans SC" panose="020B0200000000000000" charset="-122"/>
+                <a:sym typeface="Noto Sans SC" panose="020B0200000000000000" charset="-122"/>
+              </a:rPr>
+              <a:t>01 准确性与可靠性：幻觉与谄媚的双重陷阱</a:t>
+            </a:r>
+            <a:endParaRPr lang="en-US" sz="1100"/>
+          </a:p>
+        </p:txBody>
+      </p:sp>
+      <p:sp>
+        <p:nvSpPr>
+          <p:cNvPr id="6" name="AutoShape 6"/>
+          <p:cNvSpPr/>
+          <p:nvPr/>
+        </p:nvSpPr>
+        <p:spPr>
+          <a:xfrm>
+            <a:off x="381529" y="2095888"/>
+            <a:ext cx="5525523" cy="1460770"/>
+          </a:xfrm>
+          <a:prstGeom prst="roundRect">
+            <a:avLst>
+              <a:gd name="adj" fmla="val 0"/>
+            </a:avLst>
+          </a:prstGeom>
+          <a:solidFill>
+            <a:srgbClr val="F9FAFB">
+              <a:alpha val="100000"/>
+            </a:srgbClr>
+          </a:solidFill>
+          <a:ln w="12700" cap="flat" cmpd="sng">
+            <a:solidFill>
+              <a:srgbClr val="E5E7EB">
+                <a:alpha val="100000"/>
+              </a:srgbClr>
+            </a:solidFill>
+            <a:prstDash val="solid"/>
+            <a:round/>
+          </a:ln>
+        </p:spPr>
+        <p:txBody>
+          <a:bodyPr vert="horz" wrap="square" lIns="63511" tIns="63511" rIns="63511" bIns="63511" rtlCol="0" anchor="ctr"/>
+          <a:lstStyle/>
+          <a:p>
+            <a:pPr algn="ctr">
+              <a:defRPr/>
+            </a:pPr>
+          </a:p>
+        </p:txBody>
+      </p:sp>
+      <p:pic>
+        <p:nvPicPr>
+          <p:cNvPr id="7" name="Picture 7"/>
+          <p:cNvPicPr>
+            <a:picLocks noChangeAspect="1"/>
+          </p:cNvPicPr>
+          <p:nvPr/>
+        </p:nvPicPr>
+        <p:blipFill>
+          <a:blip r:embed="rId1">
+            <a:extLst>
+              <a:ext uri="{28A0092B-C50C-407E-A947-70E740481C1C}">
+                <a14:useLocalDpi xmlns:a14="http://schemas.microsoft.com/office/drawing/2010/main" val="0"/>
+              </a:ext>
+              <a:ext uri="{96DAC541-7B7A-43D3-8B79-37D633B846F1}">
+                <asvg:svgBlip xmlns:asvg="http://schemas.microsoft.com/office/drawing/2016/SVG/main" r:embed="rId2"/>
+              </a:ext>
+            </a:extLst>
+          </a:blip>
+          <a:stretch>
+            <a:fillRect/>
+          </a:stretch>
+        </p:blipFill>
+        <p:spPr>
+          <a:xfrm>
+            <a:off x="572064" y="2286423"/>
+            <a:ext cx="406475" cy="406475"/>
+          </a:xfrm>
+          <a:prstGeom prst="rect">
+            <a:avLst/>
+          </a:prstGeom>
+        </p:spPr>
+      </p:pic>
+      <p:sp>
+        <p:nvSpPr>
+          <p:cNvPr id="8" name="AutoShape 8"/>
+          <p:cNvSpPr/>
+          <p:nvPr/>
+        </p:nvSpPr>
+        <p:spPr>
+          <a:xfrm>
+            <a:off x="1080159" y="2286423"/>
+            <a:ext cx="4572847" cy="304856"/>
+          </a:xfrm>
+          <a:prstGeom prst="rect">
+            <a:avLst/>
+          </a:prstGeom>
+          <a:noFill/>
+          <a:ln w="12700" cap="flat" cmpd="sng">
+            <a:noFill/>
+            <a:prstDash val="solid"/>
+            <a:round/>
+          </a:ln>
+        </p:spPr>
+        <p:txBody>
+          <a:bodyPr vert="horz" wrap="square" lIns="0" tIns="0" rIns="0" bIns="0" rtlCol="0" anchor="ctr" anchorCtr="0"/>
+          <a:lstStyle/>
+          <a:p>
+            <a:pPr marL="0" indent="0" algn="l">
+              <a:lnSpc>
+                <a:spcPct val="125000"/>
+              </a:lnSpc>
+              <a:defRPr/>
+            </a:pPr>
+            <a:r>
+              <a:rPr lang="en-US" sz="1600" b="1" i="0" u="none" strike="noStrike">
+                <a:solidFill>
+                  <a:srgbClr val="1F2937"/>
+                </a:solidFill>
+                <a:latin typeface="Noto Sans SC" panose="020B0200000000000000" charset="-122"/>
+                <a:ea typeface="Noto Sans SC" panose="020B0200000000000000" charset="-122"/>
+                <a:cs typeface="Noto Sans SC" panose="020B0200000000000000" charset="-122"/>
+                <a:sym typeface="Noto Sans SC" panose="020B0200000000000000" charset="-122"/>
+              </a:rPr>
+              <a:t>幻觉 (Hallucination)：无中生有的“编造”</a:t>
+            </a:r>
+            <a:endParaRPr lang="en-US" sz="1100"/>
+          </a:p>
+        </p:txBody>
+      </p:sp>
+      <p:sp>
+        <p:nvSpPr>
+          <p:cNvPr id="9" name="AutoShape 9"/>
+          <p:cNvSpPr/>
+          <p:nvPr/>
+        </p:nvSpPr>
+        <p:spPr>
+          <a:xfrm>
+            <a:off x="572064" y="2731006"/>
+            <a:ext cx="4953917" cy="762141"/>
+          </a:xfrm>
+          <a:prstGeom prst="rect">
+            <a:avLst/>
+          </a:prstGeom>
+          <a:noFill/>
+          <a:ln w="12700" cap="flat" cmpd="sng">
+            <a:noFill/>
+            <a:prstDash val="solid"/>
+            <a:round/>
+          </a:ln>
+        </p:spPr>
+        <p:txBody>
+          <a:bodyPr vert="horz" wrap="square" lIns="0" tIns="0" rIns="0" bIns="0" rtlCol="0" anchor="ctr" anchorCtr="0"/>
+          <a:lstStyle/>
+          <a:p>
+            <a:pPr marL="0" indent="0" algn="l">
+              <a:lnSpc>
+                <a:spcPct val="108000"/>
+              </a:lnSpc>
+              <a:defRPr/>
+            </a:pPr>
+            <a:r>
+              <a:rPr lang="en-US" sz="1300" b="0" i="0" u="none" strike="noStrike">
+                <a:solidFill>
+                  <a:srgbClr val="4B5563"/>
+                </a:solidFill>
+                <a:latin typeface="Noto Sans SC" panose="020B0200000000000000" charset="-122"/>
+                <a:ea typeface="Noto Sans SC" panose="020B0200000000000000" charset="-122"/>
+                <a:cs typeface="Noto Sans SC" panose="020B0200000000000000" charset="-122"/>
+                <a:sym typeface="Noto Sans SC" panose="020B0200000000000000" charset="-122"/>
+              </a:rPr>
+              <a:t>基于统计规律生成文本，缺乏事实依据时易编造看似合理的虚假信息。在工业质检、精密制造等高精度场景中，这种“一本正经的胡说八道”会引发严重的安全与质量风险。</a:t>
+            </a:r>
+            <a:endParaRPr lang="en-US" sz="1100"/>
+          </a:p>
+        </p:txBody>
+      </p:sp>
+      <p:sp>
+        <p:nvSpPr>
+          <p:cNvPr id="10" name="AutoShape 10"/>
+          <p:cNvSpPr/>
+          <p:nvPr/>
+        </p:nvSpPr>
+        <p:spPr>
+          <a:xfrm>
+            <a:off x="381529" y="3747194"/>
+            <a:ext cx="5525523" cy="1460770"/>
+          </a:xfrm>
+          <a:prstGeom prst="roundRect">
+            <a:avLst>
+              <a:gd name="adj" fmla="val 0"/>
+            </a:avLst>
+          </a:prstGeom>
+          <a:solidFill>
+            <a:srgbClr val="F9FAFB">
+              <a:alpha val="100000"/>
+            </a:srgbClr>
+          </a:solidFill>
+          <a:ln w="12700" cap="flat" cmpd="sng">
+            <a:solidFill>
+              <a:srgbClr val="E5E7EB">
+                <a:alpha val="100000"/>
+              </a:srgbClr>
+            </a:solidFill>
+            <a:prstDash val="solid"/>
+            <a:round/>
+          </a:ln>
+        </p:spPr>
+        <p:txBody>
+          <a:bodyPr vert="horz" wrap="square" lIns="63511" tIns="63511" rIns="63511" bIns="63511" rtlCol="0" anchor="ctr"/>
+          <a:lstStyle/>
+          <a:p>
+            <a:pPr algn="ctr">
+              <a:defRPr/>
+            </a:pPr>
+          </a:p>
+        </p:txBody>
+      </p:sp>
+      <p:pic>
+        <p:nvPicPr>
+          <p:cNvPr id="11" name="Picture 11"/>
+          <p:cNvPicPr>
+            <a:picLocks noChangeAspect="1"/>
+          </p:cNvPicPr>
+          <p:nvPr/>
+        </p:nvPicPr>
+        <p:blipFill>
+          <a:blip r:embed="rId3">
+            <a:extLst>
+              <a:ext uri="{28A0092B-C50C-407E-A947-70E740481C1C}">
+                <a14:useLocalDpi xmlns:a14="http://schemas.microsoft.com/office/drawing/2010/main" val="0"/>
+              </a:ext>
+              <a:ext uri="{96DAC541-7B7A-43D3-8B79-37D633B846F1}">
+                <asvg:svgBlip xmlns:asvg="http://schemas.microsoft.com/office/drawing/2016/SVG/main" r:embed="rId4"/>
+              </a:ext>
+            </a:extLst>
+          </a:blip>
+          <a:stretch>
+            <a:fillRect/>
+          </a:stretch>
+        </p:blipFill>
+        <p:spPr>
+          <a:xfrm>
+            <a:off x="572064" y="3937729"/>
+            <a:ext cx="406475" cy="406475"/>
+          </a:xfrm>
+          <a:prstGeom prst="rect">
+            <a:avLst/>
+          </a:prstGeom>
+        </p:spPr>
+      </p:pic>
+      <p:sp>
+        <p:nvSpPr>
+          <p:cNvPr id="12" name="AutoShape 12"/>
+          <p:cNvSpPr/>
+          <p:nvPr/>
+        </p:nvSpPr>
+        <p:spPr>
+          <a:xfrm>
+            <a:off x="1080159" y="3937729"/>
+            <a:ext cx="4572847" cy="304856"/>
+          </a:xfrm>
+          <a:prstGeom prst="rect">
+            <a:avLst/>
+          </a:prstGeom>
+          <a:noFill/>
+          <a:ln w="12700" cap="flat" cmpd="sng">
+            <a:noFill/>
+            <a:prstDash val="solid"/>
+            <a:round/>
+          </a:ln>
+        </p:spPr>
+        <p:txBody>
+          <a:bodyPr vert="horz" wrap="square" lIns="0" tIns="0" rIns="0" bIns="0" rtlCol="0" anchor="ctr" anchorCtr="0"/>
+          <a:lstStyle/>
+          <a:p>
+            <a:pPr marL="0" indent="0" algn="l">
+              <a:lnSpc>
+                <a:spcPct val="125000"/>
+              </a:lnSpc>
+              <a:defRPr/>
+            </a:pPr>
+            <a:r>
+              <a:rPr lang="en-US" sz="1600" b="1" i="0" u="none" strike="noStrike">
+                <a:solidFill>
+                  <a:srgbClr val="1F2937"/>
+                </a:solidFill>
+                <a:latin typeface="Noto Sans SC" panose="020B0200000000000000" charset="-122"/>
+                <a:ea typeface="Noto Sans SC" panose="020B0200000000000000" charset="-122"/>
+                <a:cs typeface="Noto Sans SC" panose="020B0200000000000000" charset="-122"/>
+                <a:sym typeface="Noto Sans SC" panose="020B0200000000000000" charset="-122"/>
+              </a:rPr>
+              <a:t>谄媚 (Sycophancy)：违背客观的“迎合”</a:t>
+            </a:r>
+            <a:endParaRPr lang="en-US" sz="1100"/>
+          </a:p>
+        </p:txBody>
+      </p:sp>
+      <p:sp>
+        <p:nvSpPr>
+          <p:cNvPr id="13" name="AutoShape 13"/>
+          <p:cNvSpPr/>
+          <p:nvPr/>
+        </p:nvSpPr>
+        <p:spPr>
+          <a:xfrm>
+            <a:off x="572064" y="4382311"/>
+            <a:ext cx="4953917" cy="762141"/>
+          </a:xfrm>
+          <a:prstGeom prst="rect">
+            <a:avLst/>
+          </a:prstGeom>
+          <a:noFill/>
+          <a:ln w="12700" cap="flat" cmpd="sng">
+            <a:noFill/>
+            <a:prstDash val="solid"/>
+            <a:round/>
+          </a:ln>
+        </p:spPr>
+        <p:txBody>
+          <a:bodyPr vert="horz" wrap="square" lIns="0" tIns="0" rIns="0" bIns="0" rtlCol="0" anchor="ctr" anchorCtr="0"/>
+          <a:lstStyle/>
+          <a:p>
+            <a:pPr marL="0" indent="0" algn="l">
+              <a:lnSpc>
+                <a:spcPct val="108000"/>
+              </a:lnSpc>
+              <a:defRPr/>
+            </a:pPr>
+            <a:r>
+              <a:rPr lang="en-US" sz="1300" b="0" i="0" u="none" strike="noStrike">
+                <a:solidFill>
+                  <a:srgbClr val="4B5563"/>
+                </a:solidFill>
+                <a:latin typeface="Noto Sans SC" panose="020B0200000000000000" charset="-122"/>
+                <a:ea typeface="Noto Sans SC" panose="020B0200000000000000" charset="-122"/>
+                <a:cs typeface="Noto Sans SC" panose="020B0200000000000000" charset="-122"/>
+                <a:sym typeface="Noto Sans SC" panose="020B0200000000000000" charset="-122"/>
+              </a:rPr>
+              <a:t>为迎合用户偏好而牺牲事实，输出用户“想听”而非“正确”的答案。这破坏了AI的中立性，导致决策偏倚，在需要客观分析的金融研判、舆情分析场景中尤为致命。</a:t>
+            </a:r>
+            <a:endParaRPr lang="en-US" sz="1100"/>
+          </a:p>
+        </p:txBody>
+      </p:sp>
+      <p:sp>
+        <p:nvSpPr>
+          <p:cNvPr id="14" name="AutoShape 14"/>
+          <p:cNvSpPr/>
+          <p:nvPr/>
+        </p:nvSpPr>
+        <p:spPr>
+          <a:xfrm>
+            <a:off x="381529" y="5462011"/>
+            <a:ext cx="5525523" cy="698629"/>
+          </a:xfrm>
+          <a:prstGeom prst="roundRect">
+            <a:avLst>
+              <a:gd name="adj" fmla="val 0"/>
+            </a:avLst>
+          </a:prstGeom>
+          <a:solidFill>
+            <a:srgbClr val="FEE2E2">
+              <a:alpha val="50000"/>
+            </a:srgbClr>
+          </a:solidFill>
+          <a:ln w="25400" cap="flat" cmpd="sng">
+            <a:noFill/>
+            <a:prstDash val="solid"/>
+            <a:round/>
+          </a:ln>
+        </p:spPr>
+        <p:txBody>
+          <a:bodyPr vert="horz" wrap="square" lIns="63511" tIns="63511" rIns="63511" bIns="63511" rtlCol="0" anchor="ctr"/>
+          <a:lstStyle/>
+          <a:p>
+            <a:pPr algn="ctr">
+              <a:defRPr/>
+            </a:pPr>
+          </a:p>
+        </p:txBody>
+      </p:sp>
+      <p:sp>
+        <p:nvSpPr>
+          <p:cNvPr id="15" name="AutoShape 15"/>
+          <p:cNvSpPr/>
+          <p:nvPr/>
+        </p:nvSpPr>
+        <p:spPr>
+          <a:xfrm>
+            <a:off x="508553" y="5563630"/>
+            <a:ext cx="5271476" cy="571606"/>
+          </a:xfrm>
+          <a:prstGeom prst="rect">
+            <a:avLst/>
+          </a:prstGeom>
+          <a:noFill/>
+          <a:ln w="12700" cap="flat" cmpd="sng">
+            <a:noFill/>
+            <a:prstDash val="solid"/>
+            <a:round/>
+          </a:ln>
+        </p:spPr>
+        <p:txBody>
+          <a:bodyPr vert="horz" wrap="square" lIns="0" tIns="0" rIns="0" bIns="0" rtlCol="0" anchor="ctr" anchorCtr="0"/>
+          <a:lstStyle/>
+          <a:p>
+            <a:pPr marL="0" indent="0" algn="l">
+              <a:lnSpc>
+                <a:spcPct val="125000"/>
+              </a:lnSpc>
+              <a:defRPr/>
+            </a:pPr>
+            <a:r>
+              <a:rPr lang="en-US" sz="1400" b="1" i="0" u="none" strike="noStrike">
+                <a:solidFill>
+                  <a:srgbClr val="991B1B"/>
+                </a:solidFill>
+                <a:latin typeface="Noto Sans SC" panose="020B0200000000000000" charset="-122"/>
+                <a:ea typeface="Noto Sans SC" panose="020B0200000000000000" charset="-122"/>
+                <a:cs typeface="Noto Sans SC" panose="020B0200000000000000" charset="-122"/>
+                <a:sym typeface="Noto Sans SC" panose="020B0200000000000000" charset="-122"/>
+              </a:rPr>
+              <a:t>核心痛点：</a:t>
+            </a:r>
+            <a:r>
+              <a:rPr lang="en-US" sz="1600" b="0" i="0" u="none" strike="noStrike">
+                <a:solidFill>
+                  <a:srgbClr val="1F2329"/>
+                </a:solidFill>
+                <a:latin typeface="Noto Sans SC" panose="020B0200000000000000" charset="-122"/>
+                <a:ea typeface="Noto Sans SC" panose="020B0200000000000000" charset="-122"/>
+                <a:cs typeface="Noto Sans SC" panose="020B0200000000000000" charset="-122"/>
+                <a:sym typeface="Noto Sans SC" panose="020B0200000000000000" charset="-122"/>
+              </a:rPr>
+              <a:t> </a:t>
+            </a:r>
+            <a:r>
+              <a:rPr lang="en-US" sz="1300" b="0" i="0" u="none" strike="noStrike">
+                <a:solidFill>
+                  <a:srgbClr val="374151"/>
+                </a:solidFill>
+                <a:latin typeface="Noto Sans SC" panose="020B0200000000000000" charset="-122"/>
+                <a:ea typeface="Noto Sans SC" panose="020B0200000000000000" charset="-122"/>
+                <a:cs typeface="Noto Sans SC" panose="020B0200000000000000" charset="-122"/>
+                <a:sym typeface="Noto Sans SC" panose="020B0200000000000000" charset="-122"/>
+              </a:rPr>
+              <a:t>输出结果不可控，无法满足高可靠业务场景对“事实准确性”的硬性要求，成为工业化落地的第一道关卡。</a:t>
+            </a:r>
+            <a:endParaRPr lang="en-US" sz="1100"/>
+          </a:p>
+        </p:txBody>
+      </p:sp>
+      <p:sp>
+        <p:nvSpPr>
+          <p:cNvPr id="16" name="AutoShape 16"/>
+          <p:cNvSpPr/>
+          <p:nvPr/>
+        </p:nvSpPr>
+        <p:spPr>
+          <a:xfrm>
+            <a:off x="6288123" y="1397259"/>
+            <a:ext cx="5525523" cy="508094"/>
+          </a:xfrm>
+          <a:prstGeom prst="roundRect">
+            <a:avLst>
+              <a:gd name="adj" fmla="val 0"/>
+            </a:avLst>
+          </a:prstGeom>
+          <a:solidFill>
+            <a:srgbClr val="EFF6FF">
+              <a:alpha val="100000"/>
+            </a:srgbClr>
+          </a:solidFill>
+          <a:ln w="25400" cap="flat" cmpd="sng">
+            <a:noFill/>
+            <a:prstDash val="solid"/>
+            <a:round/>
+          </a:ln>
+        </p:spPr>
+        <p:txBody>
+          <a:bodyPr vert="horz" wrap="square" lIns="63511" tIns="63511" rIns="63511" bIns="63511" rtlCol="0" anchor="ctr"/>
+          <a:lstStyle/>
+          <a:p>
+            <a:pPr algn="ctr">
+              <a:defRPr/>
+            </a:pPr>
+          </a:p>
+        </p:txBody>
+      </p:sp>
+      <p:sp>
+        <p:nvSpPr>
+          <p:cNvPr id="17" name="AutoShape 17"/>
+          <p:cNvSpPr/>
+          <p:nvPr/>
+        </p:nvSpPr>
+        <p:spPr>
+          <a:xfrm>
+            <a:off x="6415146" y="1473473"/>
+            <a:ext cx="5271476" cy="381071"/>
+          </a:xfrm>
+          <a:prstGeom prst="rect">
+            <a:avLst/>
+          </a:prstGeom>
+          <a:noFill/>
+          <a:ln w="12700" cap="flat" cmpd="sng">
+            <a:noFill/>
+            <a:prstDash val="solid"/>
+            <a:round/>
+          </a:ln>
+        </p:spPr>
+        <p:txBody>
+          <a:bodyPr vert="horz" wrap="square" lIns="0" tIns="0" rIns="0" bIns="0" rtlCol="0" anchor="ctr" anchorCtr="0"/>
+          <a:lstStyle/>
+          <a:p>
+            <a:pPr marL="0" indent="0" algn="l">
+              <a:lnSpc>
+                <a:spcPct val="125000"/>
+              </a:lnSpc>
+              <a:defRPr/>
+            </a:pPr>
+            <a:r>
+              <a:rPr lang="en-US" sz="1800" b="1" i="0" u="none" strike="noStrike">
+                <a:solidFill>
+                  <a:srgbClr val="1D4ED8"/>
+                </a:solidFill>
+                <a:latin typeface="Noto Sans SC" panose="020B0200000000000000" charset="-122"/>
+                <a:ea typeface="Noto Sans SC" panose="020B0200000000000000" charset="-122"/>
+                <a:cs typeface="Noto Sans SC" panose="020B0200000000000000" charset="-122"/>
+                <a:sym typeface="Noto Sans SC" panose="020B0200000000000000" charset="-122"/>
+              </a:rPr>
+              <a:t>02 可解释性困境：AI决策的“黑箱”壁垒</a:t>
+            </a:r>
+            <a:endParaRPr lang="en-US" sz="1100"/>
+          </a:p>
+        </p:txBody>
+      </p:sp>
+      <p:sp>
+        <p:nvSpPr>
+          <p:cNvPr id="18" name="AutoShape 18"/>
+          <p:cNvSpPr/>
+          <p:nvPr/>
+        </p:nvSpPr>
+        <p:spPr>
+          <a:xfrm>
+            <a:off x="6288123" y="2095888"/>
+            <a:ext cx="5525523" cy="1460770"/>
+          </a:xfrm>
+          <a:prstGeom prst="roundRect">
+            <a:avLst>
+              <a:gd name="adj" fmla="val 0"/>
+            </a:avLst>
+          </a:prstGeom>
+          <a:solidFill>
+            <a:srgbClr val="F9FAFB">
+              <a:alpha val="100000"/>
+            </a:srgbClr>
+          </a:solidFill>
+          <a:ln w="12700" cap="flat" cmpd="sng">
+            <a:solidFill>
+              <a:srgbClr val="E5E7EB">
+                <a:alpha val="100000"/>
+              </a:srgbClr>
+            </a:solidFill>
+            <a:prstDash val="solid"/>
+            <a:round/>
+          </a:ln>
+        </p:spPr>
+        <p:txBody>
+          <a:bodyPr vert="horz" wrap="square" lIns="63511" tIns="63511" rIns="63511" bIns="63511" rtlCol="0" anchor="ctr"/>
+          <a:lstStyle/>
+          <a:p>
+            <a:pPr algn="ctr">
+              <a:defRPr/>
+            </a:pPr>
+          </a:p>
+        </p:txBody>
+      </p:sp>
+      <p:pic>
+        <p:nvPicPr>
+          <p:cNvPr id="19" name="Picture 19"/>
+          <p:cNvPicPr>
+            <a:picLocks noChangeAspect="1"/>
+          </p:cNvPicPr>
+          <p:nvPr/>
+        </p:nvPicPr>
+        <p:blipFill>
+          <a:blip r:embed="rId5">
+            <a:extLst>
+              <a:ext uri="{28A0092B-C50C-407E-A947-70E740481C1C}">
+                <a14:useLocalDpi xmlns:a14="http://schemas.microsoft.com/office/drawing/2010/main" val="0"/>
+              </a:ext>
+              <a:ext uri="{96DAC541-7B7A-43D3-8B79-37D633B846F1}">
+                <asvg:svgBlip xmlns:asvg="http://schemas.microsoft.com/office/drawing/2016/SVG/main" r:embed="rId6"/>
+              </a:ext>
+            </a:extLst>
+          </a:blip>
+          <a:stretch>
+            <a:fillRect/>
+          </a:stretch>
+        </p:blipFill>
+        <p:spPr>
+          <a:xfrm>
+            <a:off x="6478658" y="2286423"/>
+            <a:ext cx="406475" cy="406475"/>
+          </a:xfrm>
+          <a:prstGeom prst="rect">
+            <a:avLst/>
+          </a:prstGeom>
+        </p:spPr>
+      </p:pic>
+      <p:sp>
+        <p:nvSpPr>
+          <p:cNvPr id="20" name="AutoShape 20"/>
+          <p:cNvSpPr/>
+          <p:nvPr/>
+        </p:nvSpPr>
+        <p:spPr>
+          <a:xfrm>
+            <a:off x="6986752" y="2286423"/>
+            <a:ext cx="4572847" cy="304856"/>
+          </a:xfrm>
+          <a:prstGeom prst="rect">
+            <a:avLst/>
+          </a:prstGeom>
+          <a:noFill/>
+          <a:ln w="12700" cap="flat" cmpd="sng">
+            <a:noFill/>
+            <a:prstDash val="solid"/>
+            <a:round/>
+          </a:ln>
+        </p:spPr>
+        <p:txBody>
+          <a:bodyPr vert="horz" wrap="square" lIns="0" tIns="0" rIns="0" bIns="0" rtlCol="0" anchor="ctr" anchorCtr="0"/>
+          <a:lstStyle/>
+          <a:p>
+            <a:pPr marL="0" indent="0" algn="l">
+              <a:lnSpc>
+                <a:spcPct val="125000"/>
+              </a:lnSpc>
+              <a:defRPr/>
+            </a:pPr>
+            <a:r>
+              <a:rPr lang="en-US" sz="1600" b="1" i="0" u="none" strike="noStrike">
+                <a:solidFill>
+                  <a:srgbClr val="1F2937"/>
+                </a:solidFill>
+                <a:latin typeface="Noto Sans SC" panose="020B0200000000000000" charset="-122"/>
+                <a:ea typeface="Noto Sans SC" panose="020B0200000000000000" charset="-122"/>
+                <a:cs typeface="Noto Sans SC" panose="020B0200000000000000" charset="-122"/>
+                <a:sym typeface="Noto Sans SC" panose="020B0200000000000000" charset="-122"/>
+              </a:rPr>
+              <a:t>黑箱决策：无法追溯的推理逻辑</a:t>
+            </a:r>
+            <a:endParaRPr lang="en-US" sz="1100"/>
+          </a:p>
+        </p:txBody>
+      </p:sp>
+      <p:sp>
+        <p:nvSpPr>
+          <p:cNvPr id="21" name="AutoShape 21"/>
+          <p:cNvSpPr/>
+          <p:nvPr/>
+        </p:nvSpPr>
+        <p:spPr>
+          <a:xfrm>
+            <a:off x="6478658" y="2731006"/>
+            <a:ext cx="4953917" cy="762141"/>
+          </a:xfrm>
+          <a:prstGeom prst="rect">
+            <a:avLst/>
+          </a:prstGeom>
+          <a:noFill/>
+          <a:ln w="12700" cap="flat" cmpd="sng">
+            <a:noFill/>
+            <a:prstDash val="solid"/>
+            <a:round/>
+          </a:ln>
+        </p:spPr>
+        <p:txBody>
+          <a:bodyPr vert="horz" wrap="square" lIns="0" tIns="0" rIns="0" bIns="0" rtlCol="0" anchor="ctr" anchorCtr="0"/>
+          <a:lstStyle/>
+          <a:p>
+            <a:pPr marL="0" indent="0" algn="l">
+              <a:lnSpc>
+                <a:spcPct val="108000"/>
+              </a:lnSpc>
+              <a:defRPr/>
+            </a:pPr>
+            <a:r>
+              <a:rPr lang="en-US" sz="1300" b="0" i="0" u="none" strike="noStrike">
+                <a:solidFill>
+                  <a:srgbClr val="4B5563"/>
+                </a:solidFill>
+                <a:latin typeface="Noto Sans SC" panose="020B0200000000000000" charset="-122"/>
+                <a:ea typeface="Noto Sans SC" panose="020B0200000000000000" charset="-122"/>
+                <a:cs typeface="Noto Sans SC" panose="020B0200000000000000" charset="-122"/>
+                <a:sym typeface="Noto Sans SC" panose="020B0200000000000000" charset="-122"/>
+              </a:rPr>
+              <a:t>基于深层神经网络的万亿级参数运算，内部决策逻辑如同“黑箱”，无法直观拆解推导路径。这导致我们只知其输出结果，却无法解释“为什么得出这个结论”。</a:t>
+            </a:r>
+            <a:endParaRPr lang="en-US" sz="1100"/>
+          </a:p>
+        </p:txBody>
+      </p:sp>
+      <p:sp>
+        <p:nvSpPr>
+          <p:cNvPr id="22" name="AutoShape 22"/>
+          <p:cNvSpPr/>
+          <p:nvPr/>
+        </p:nvSpPr>
+        <p:spPr>
+          <a:xfrm>
+            <a:off x="6288123" y="3747194"/>
+            <a:ext cx="5525523" cy="1460770"/>
+          </a:xfrm>
+          <a:prstGeom prst="roundRect">
+            <a:avLst>
+              <a:gd name="adj" fmla="val 0"/>
+            </a:avLst>
+          </a:prstGeom>
+          <a:solidFill>
+            <a:srgbClr val="F9FAFB">
+              <a:alpha val="100000"/>
+            </a:srgbClr>
+          </a:solidFill>
+          <a:ln w="12700" cap="flat" cmpd="sng">
+            <a:solidFill>
+              <a:srgbClr val="E5E7EB">
+                <a:alpha val="100000"/>
+              </a:srgbClr>
+            </a:solidFill>
+            <a:prstDash val="solid"/>
+            <a:round/>
+          </a:ln>
+        </p:spPr>
+        <p:txBody>
+          <a:bodyPr vert="horz" wrap="square" lIns="63511" tIns="63511" rIns="63511" bIns="63511" rtlCol="0" anchor="ctr"/>
+          <a:lstStyle/>
+          <a:p>
+            <a:pPr algn="ctr">
+              <a:defRPr/>
+            </a:pPr>
+          </a:p>
+        </p:txBody>
+      </p:sp>
+      <p:pic>
+        <p:nvPicPr>
+          <p:cNvPr id="23" name="Picture 23"/>
+          <p:cNvPicPr>
+            <a:picLocks noChangeAspect="1"/>
+          </p:cNvPicPr>
+          <p:nvPr/>
+        </p:nvPicPr>
+        <p:blipFill>
+          <a:blip r:embed="rId7">
+            <a:extLst>
+              <a:ext uri="{28A0092B-C50C-407E-A947-70E740481C1C}">
+                <a14:useLocalDpi xmlns:a14="http://schemas.microsoft.com/office/drawing/2010/main" val="0"/>
+              </a:ext>
+              <a:ext uri="{96DAC541-7B7A-43D3-8B79-37D633B846F1}">
+                <asvg:svgBlip xmlns:asvg="http://schemas.microsoft.com/office/drawing/2016/SVG/main" r:embed="rId8"/>
+              </a:ext>
+            </a:extLst>
+          </a:blip>
+          <a:stretch>
+            <a:fillRect/>
+          </a:stretch>
+        </p:blipFill>
+        <p:spPr>
+          <a:xfrm>
+            <a:off x="6478658" y="3937729"/>
+            <a:ext cx="406475" cy="406475"/>
+          </a:xfrm>
+          <a:prstGeom prst="rect">
+            <a:avLst/>
+          </a:prstGeom>
+        </p:spPr>
+      </p:pic>
+      <p:sp>
+        <p:nvSpPr>
+          <p:cNvPr id="24" name="AutoShape 24"/>
+          <p:cNvSpPr/>
+          <p:nvPr/>
+        </p:nvSpPr>
+        <p:spPr>
+          <a:xfrm>
+            <a:off x="6986752" y="3937729"/>
+            <a:ext cx="4572847" cy="304856"/>
+          </a:xfrm>
+          <a:prstGeom prst="rect">
+            <a:avLst/>
+          </a:prstGeom>
+          <a:noFill/>
+          <a:ln w="12700" cap="flat" cmpd="sng">
+            <a:noFill/>
+            <a:prstDash val="solid"/>
+            <a:round/>
+          </a:ln>
+        </p:spPr>
+        <p:txBody>
+          <a:bodyPr vert="horz" wrap="square" lIns="0" tIns="0" rIns="0" bIns="0" rtlCol="0" anchor="ctr" anchorCtr="0"/>
+          <a:lstStyle/>
+          <a:p>
+            <a:pPr marL="0" indent="0" algn="l">
+              <a:lnSpc>
+                <a:spcPct val="125000"/>
+              </a:lnSpc>
+              <a:defRPr/>
+            </a:pPr>
+            <a:r>
+              <a:rPr lang="en-US" sz="1600" b="1" i="0" u="none" strike="noStrike">
+                <a:solidFill>
+                  <a:srgbClr val="1F2937"/>
+                </a:solidFill>
+                <a:latin typeface="Noto Sans SC" panose="020B0200000000000000" charset="-122"/>
+                <a:ea typeface="Noto Sans SC" panose="020B0200000000000000" charset="-122"/>
+                <a:cs typeface="Noto Sans SC" panose="020B0200000000000000" charset="-122"/>
+                <a:sym typeface="Noto Sans SC" panose="020B0200000000000000" charset="-122"/>
+              </a:rPr>
+              <a:t>合规壁垒：监管与追责的盲区</a:t>
+            </a:r>
+            <a:endParaRPr lang="en-US" sz="1100"/>
+          </a:p>
+        </p:txBody>
+      </p:sp>
+      <p:sp>
+        <p:nvSpPr>
+          <p:cNvPr id="25" name="AutoShape 25"/>
+          <p:cNvSpPr/>
+          <p:nvPr/>
+        </p:nvSpPr>
+        <p:spPr>
+          <a:xfrm>
+            <a:off x="6478658" y="4382311"/>
+            <a:ext cx="4953917" cy="762141"/>
+          </a:xfrm>
+          <a:prstGeom prst="rect">
+            <a:avLst/>
+          </a:prstGeom>
+          <a:noFill/>
+          <a:ln w="12700" cap="flat" cmpd="sng">
+            <a:noFill/>
+            <a:prstDash val="solid"/>
+            <a:round/>
+          </a:ln>
+        </p:spPr>
+        <p:txBody>
+          <a:bodyPr vert="horz" wrap="square" lIns="0" tIns="0" rIns="0" bIns="0" rtlCol="0" anchor="ctr" anchorCtr="0"/>
+          <a:lstStyle/>
+          <a:p>
+            <a:pPr marL="0" indent="0" algn="l">
+              <a:lnSpc>
+                <a:spcPct val="108000"/>
+              </a:lnSpc>
+              <a:defRPr/>
+            </a:pPr>
+            <a:r>
+              <a:rPr lang="en-US" sz="1300" b="0" i="0" u="none" strike="noStrike">
+                <a:solidFill>
+                  <a:srgbClr val="4B5563"/>
+                </a:solidFill>
+                <a:latin typeface="Noto Sans SC" panose="020B0200000000000000" charset="-122"/>
+                <a:ea typeface="Noto Sans SC" panose="020B0200000000000000" charset="-122"/>
+                <a:cs typeface="Noto Sans SC" panose="020B0200000000000000" charset="-122"/>
+                <a:sym typeface="Noto Sans SC" panose="020B0200000000000000" charset="-122"/>
+              </a:rPr>
+              <a:t>在金融风控、医疗诊断、司法辅助等强监管领域，要求决策过程必须透明可审计。黑箱特性导致无法满足合规与追责要求，成为规模化商用的核心阻碍。</a:t>
+            </a:r>
+            <a:endParaRPr lang="en-US" sz="1100"/>
+          </a:p>
+        </p:txBody>
+      </p:sp>
+      <p:sp>
+        <p:nvSpPr>
+          <p:cNvPr id="26" name="AutoShape 26"/>
+          <p:cNvSpPr/>
+          <p:nvPr/>
+        </p:nvSpPr>
+        <p:spPr>
+          <a:xfrm>
+            <a:off x="6288123" y="5462011"/>
+            <a:ext cx="5525523" cy="698629"/>
+          </a:xfrm>
+          <a:prstGeom prst="roundRect">
+            <a:avLst>
+              <a:gd name="adj" fmla="val 0"/>
+            </a:avLst>
+          </a:prstGeom>
+          <a:solidFill>
+            <a:srgbClr val="DBEAFE">
+              <a:alpha val="50000"/>
+            </a:srgbClr>
+          </a:solidFill>
+          <a:ln w="25400" cap="flat" cmpd="sng">
+            <a:noFill/>
+            <a:prstDash val="solid"/>
+            <a:round/>
+          </a:ln>
+        </p:spPr>
+        <p:txBody>
+          <a:bodyPr vert="horz" wrap="square" lIns="63511" tIns="63511" rIns="63511" bIns="63511" rtlCol="0" anchor="ctr"/>
+          <a:lstStyle/>
+          <a:p>
+            <a:pPr algn="ctr">
+              <a:defRPr/>
+            </a:pPr>
+          </a:p>
+        </p:txBody>
+      </p:sp>
+      <p:sp>
+        <p:nvSpPr>
+          <p:cNvPr id="27" name="AutoShape 27"/>
+          <p:cNvSpPr/>
+          <p:nvPr/>
+        </p:nvSpPr>
+        <p:spPr>
+          <a:xfrm>
+            <a:off x="6415146" y="5563630"/>
+            <a:ext cx="5271476" cy="571606"/>
+          </a:xfrm>
+          <a:prstGeom prst="rect">
+            <a:avLst/>
+          </a:prstGeom>
+          <a:noFill/>
+          <a:ln w="12700" cap="flat" cmpd="sng">
+            <a:noFill/>
+            <a:prstDash val="solid"/>
+            <a:round/>
+          </a:ln>
+        </p:spPr>
+        <p:txBody>
+          <a:bodyPr vert="horz" wrap="square" lIns="0" tIns="0" rIns="0" bIns="0" rtlCol="0" anchor="ctr" anchorCtr="0"/>
+          <a:lstStyle/>
+          <a:p>
+            <a:pPr marL="0" indent="0" algn="l">
+              <a:lnSpc>
+                <a:spcPct val="125000"/>
+              </a:lnSpc>
+              <a:defRPr/>
+            </a:pPr>
+            <a:r>
+              <a:rPr lang="en-US" sz="1400" b="1" i="0" u="none" strike="noStrike">
+                <a:solidFill>
+                  <a:srgbClr val="1E40AF"/>
+                </a:solidFill>
+                <a:latin typeface="Noto Sans SC" panose="020B0200000000000000" charset="-122"/>
+                <a:ea typeface="Noto Sans SC" panose="020B0200000000000000" charset="-122"/>
+                <a:cs typeface="Noto Sans SC" panose="020B0200000000000000" charset="-122"/>
+                <a:sym typeface="Noto Sans SC" panose="020B0200000000000000" charset="-122"/>
+              </a:rPr>
+              <a:t>核心痛点：</a:t>
+            </a:r>
+            <a:r>
+              <a:rPr lang="en-US" sz="1600" b="0" i="0" u="none" strike="noStrike">
+                <a:solidFill>
+                  <a:srgbClr val="1F2329"/>
+                </a:solidFill>
+                <a:latin typeface="Noto Sans SC" panose="020B0200000000000000" charset="-122"/>
+                <a:ea typeface="Noto Sans SC" panose="020B0200000000000000" charset="-122"/>
+                <a:cs typeface="Noto Sans SC" panose="020B0200000000000000" charset="-122"/>
+                <a:sym typeface="Noto Sans SC" panose="020B0200000000000000" charset="-122"/>
+              </a:rPr>
+              <a:t> </a:t>
+            </a:r>
+            <a:r>
+              <a:rPr lang="en-US" sz="1300" b="0" i="0" u="none" strike="noStrike">
+                <a:solidFill>
+                  <a:srgbClr val="374151"/>
+                </a:solidFill>
+                <a:latin typeface="Noto Sans SC" panose="020B0200000000000000" charset="-122"/>
+                <a:ea typeface="Noto Sans SC" panose="020B0200000000000000" charset="-122"/>
+                <a:cs typeface="Noto Sans SC" panose="020B0200000000000000" charset="-122"/>
+                <a:sym typeface="Noto Sans SC" panose="020B0200000000000000" charset="-122"/>
+              </a:rPr>
+              <a:t>决策逻辑不可溯，无法满足关键行业的合规审计要求，制约了LLM在高价值、高监管领域的深度应用。</a:t>
+            </a:r>
+            <a:endParaRPr lang="en-US" sz="1100"/>
+          </a:p>
+        </p:txBody>
+      </p:sp>
+    </p:spTree>
+    <p:custDataLst>
+      <p:tags r:id="rId9"/>
+    </p:custDataLst>
+  </p:cSld>
+  <p:clrMapOvr>
+    <a:masterClrMapping/>
+  </p:clrMapOvr>
+</p:sld>
+</file>
+
+<file path=ppt/slides/slide20.xml><?xml version="1.0" encoding="utf-8"?>
 <p:sld xmlns:a="http://schemas.openxmlformats.org/drawingml/2006/main" xmlns:r="http://schemas.openxmlformats.org/officeDocument/2006/relationships" xmlns:p="http://schemas.openxmlformats.org/presentationml/2006/main">
   <p:cSld>
     <p:spTree>
@@ -24265,1137 +30843,6 @@
         </p:sp>
       </p:grpSp>
     </p:spTree>
-  </p:cSld>
-  <p:clrMapOvr>
-    <a:masterClrMapping/>
-  </p:clrMapOvr>
-</p:sld>
-</file>
-
-<file path=ppt/slides/slide2.xml><?xml version="1.0" encoding="utf-8"?>
-<p:sld xmlns:a="http://schemas.openxmlformats.org/drawingml/2006/main" xmlns:r="http://schemas.openxmlformats.org/officeDocument/2006/relationships" xmlns:p="http://schemas.openxmlformats.org/presentationml/2006/main">
-  <p:cSld>
-    <p:spTree>
-      <p:nvGrpSpPr>
-        <p:cNvPr id="1" name=""/>
-        <p:cNvGrpSpPr/>
-        <p:nvPr/>
-      </p:nvGrpSpPr>
-      <p:grpSpPr>
-        <a:xfrm>
-          <a:off x="0" y="0"/>
-          <a:ext cx="0" cy="0"/>
-          <a:chOff x="0" y="0"/>
-          <a:chExt cx="0" cy="0"/>
-        </a:xfrm>
-      </p:grpSpPr>
-      <p:sp>
-        <p:nvSpPr>
-          <p:cNvPr id="3" name="AutoShape 3"/>
-          <p:cNvSpPr/>
-          <p:nvPr/>
-        </p:nvSpPr>
-        <p:spPr>
-          <a:xfrm>
-            <a:off x="408834" y="261702"/>
-            <a:ext cx="11432117" cy="762141"/>
-          </a:xfrm>
-          <a:prstGeom prst="rect">
-            <a:avLst/>
-          </a:prstGeom>
-          <a:noFill/>
-          <a:ln w="12700" cap="flat" cmpd="sng">
-            <a:noFill/>
-            <a:prstDash val="solid"/>
-            <a:round/>
-          </a:ln>
-        </p:spPr>
-        <p:txBody>
-          <a:bodyPr vert="horz" wrap="square" lIns="0" tIns="0" rIns="0" bIns="0" rtlCol="0" anchor="ctr" anchorCtr="0"/>
-          <a:lstStyle/>
-          <a:p>
-            <a:pPr marL="0" indent="0" algn="l">
-              <a:lnSpc>
-                <a:spcPct val="125000"/>
-              </a:lnSpc>
-              <a:defRPr/>
-            </a:pPr>
-            <a:r>
-              <a:rPr lang="en-US" sz="2800" b="1" i="0" u="none" strike="noStrike">
-                <a:solidFill>
-                  <a:srgbClr val="B91C1C"/>
-                </a:solidFill>
-                <a:latin typeface="Noto Sans SC" panose="020B0200000000000000" charset="-122"/>
-                <a:ea typeface="Noto Sans SC" panose="020B0200000000000000" charset="-122"/>
-                <a:cs typeface="Noto Sans SC" panose="020B0200000000000000" charset="-122"/>
-                <a:sym typeface="Noto Sans SC" panose="020B0200000000000000" charset="-122"/>
-              </a:rPr>
-              <a:t>LLM的核心挑战（一）：准确性与可解释性</a:t>
-            </a:r>
-            <a:endParaRPr lang="en-US" sz="1100"/>
-          </a:p>
-        </p:txBody>
-      </p:sp>
-      <p:sp>
-        <p:nvSpPr>
-          <p:cNvPr id="4" name="AutoShape 4"/>
-          <p:cNvSpPr/>
-          <p:nvPr/>
-        </p:nvSpPr>
-        <p:spPr>
-          <a:xfrm>
-            <a:off x="381529" y="1397259"/>
-            <a:ext cx="5525523" cy="508094"/>
-          </a:xfrm>
-          <a:prstGeom prst="roundRect">
-            <a:avLst>
-              <a:gd name="adj" fmla="val 0"/>
-            </a:avLst>
-          </a:prstGeom>
-          <a:solidFill>
-            <a:srgbClr val="FEF2F2">
-              <a:alpha val="100000"/>
-            </a:srgbClr>
-          </a:solidFill>
-          <a:ln w="25400" cap="flat" cmpd="sng">
-            <a:noFill/>
-            <a:prstDash val="solid"/>
-            <a:round/>
-          </a:ln>
-        </p:spPr>
-        <p:txBody>
-          <a:bodyPr vert="horz" wrap="square" lIns="63511" tIns="63511" rIns="63511" bIns="63511" rtlCol="0" anchor="ctr"/>
-          <a:lstStyle/>
-          <a:p>
-            <a:pPr algn="ctr">
-              <a:defRPr/>
-            </a:pPr>
-          </a:p>
-        </p:txBody>
-      </p:sp>
-      <p:sp>
-        <p:nvSpPr>
-          <p:cNvPr id="5" name="AutoShape 5"/>
-          <p:cNvSpPr/>
-          <p:nvPr/>
-        </p:nvSpPr>
-        <p:spPr>
-          <a:xfrm>
-            <a:off x="508553" y="1473473"/>
-            <a:ext cx="5271476" cy="381071"/>
-          </a:xfrm>
-          <a:prstGeom prst="rect">
-            <a:avLst/>
-          </a:prstGeom>
-          <a:noFill/>
-          <a:ln w="12700" cap="flat" cmpd="sng">
-            <a:noFill/>
-            <a:prstDash val="solid"/>
-            <a:round/>
-          </a:ln>
-        </p:spPr>
-        <p:txBody>
-          <a:bodyPr vert="horz" wrap="square" lIns="0" tIns="0" rIns="0" bIns="0" rtlCol="0" anchor="ctr" anchorCtr="0"/>
-          <a:lstStyle/>
-          <a:p>
-            <a:pPr marL="0" indent="0" algn="l">
-              <a:lnSpc>
-                <a:spcPct val="125000"/>
-              </a:lnSpc>
-              <a:defRPr/>
-            </a:pPr>
-            <a:r>
-              <a:rPr lang="en-US" sz="1800" b="1" i="0" u="none" strike="noStrike">
-                <a:solidFill>
-                  <a:srgbClr val="B91C1C"/>
-                </a:solidFill>
-                <a:latin typeface="Noto Sans SC" panose="020B0200000000000000" charset="-122"/>
-                <a:ea typeface="Noto Sans SC" panose="020B0200000000000000" charset="-122"/>
-                <a:cs typeface="Noto Sans SC" panose="020B0200000000000000" charset="-122"/>
-                <a:sym typeface="Noto Sans SC" panose="020B0200000000000000" charset="-122"/>
-              </a:rPr>
-              <a:t>01 准确性与可靠性：幻觉与谄媚的双重陷阱</a:t>
-            </a:r>
-            <a:endParaRPr lang="en-US" sz="1100"/>
-          </a:p>
-        </p:txBody>
-      </p:sp>
-      <p:sp>
-        <p:nvSpPr>
-          <p:cNvPr id="6" name="AutoShape 6"/>
-          <p:cNvSpPr/>
-          <p:nvPr/>
-        </p:nvSpPr>
-        <p:spPr>
-          <a:xfrm>
-            <a:off x="381529" y="2095888"/>
-            <a:ext cx="5525523" cy="1460770"/>
-          </a:xfrm>
-          <a:prstGeom prst="roundRect">
-            <a:avLst>
-              <a:gd name="adj" fmla="val 0"/>
-            </a:avLst>
-          </a:prstGeom>
-          <a:solidFill>
-            <a:srgbClr val="F9FAFB">
-              <a:alpha val="100000"/>
-            </a:srgbClr>
-          </a:solidFill>
-          <a:ln w="12700" cap="flat" cmpd="sng">
-            <a:solidFill>
-              <a:srgbClr val="E5E7EB">
-                <a:alpha val="100000"/>
-              </a:srgbClr>
-            </a:solidFill>
-            <a:prstDash val="solid"/>
-            <a:round/>
-          </a:ln>
-        </p:spPr>
-        <p:txBody>
-          <a:bodyPr vert="horz" wrap="square" lIns="63511" tIns="63511" rIns="63511" bIns="63511" rtlCol="0" anchor="ctr"/>
-          <a:lstStyle/>
-          <a:p>
-            <a:pPr algn="ctr">
-              <a:defRPr/>
-            </a:pPr>
-          </a:p>
-        </p:txBody>
-      </p:sp>
-      <p:pic>
-        <p:nvPicPr>
-          <p:cNvPr id="7" name="Picture 7"/>
-          <p:cNvPicPr>
-            <a:picLocks noChangeAspect="1"/>
-          </p:cNvPicPr>
-          <p:nvPr/>
-        </p:nvPicPr>
-        <p:blipFill>
-          <a:blip r:embed="rId1">
-            <a:extLst>
-              <a:ext uri="{28A0092B-C50C-407E-A947-70E740481C1C}">
-                <a14:useLocalDpi xmlns:a14="http://schemas.microsoft.com/office/drawing/2010/main" val="0"/>
-              </a:ext>
-              <a:ext uri="{96DAC541-7B7A-43D3-8B79-37D633B846F1}">
-                <asvg:svgBlip xmlns:asvg="http://schemas.microsoft.com/office/drawing/2016/SVG/main" r:embed="rId2"/>
-              </a:ext>
-            </a:extLst>
-          </a:blip>
-          <a:stretch>
-            <a:fillRect/>
-          </a:stretch>
-        </p:blipFill>
-        <p:spPr>
-          <a:xfrm>
-            <a:off x="572064" y="2286423"/>
-            <a:ext cx="406475" cy="406475"/>
-          </a:xfrm>
-          <a:prstGeom prst="rect">
-            <a:avLst/>
-          </a:prstGeom>
-        </p:spPr>
-      </p:pic>
-      <p:sp>
-        <p:nvSpPr>
-          <p:cNvPr id="8" name="AutoShape 8"/>
-          <p:cNvSpPr/>
-          <p:nvPr/>
-        </p:nvSpPr>
-        <p:spPr>
-          <a:xfrm>
-            <a:off x="1080159" y="2286423"/>
-            <a:ext cx="4572847" cy="304856"/>
-          </a:xfrm>
-          <a:prstGeom prst="rect">
-            <a:avLst/>
-          </a:prstGeom>
-          <a:noFill/>
-          <a:ln w="12700" cap="flat" cmpd="sng">
-            <a:noFill/>
-            <a:prstDash val="solid"/>
-            <a:round/>
-          </a:ln>
-        </p:spPr>
-        <p:txBody>
-          <a:bodyPr vert="horz" wrap="square" lIns="0" tIns="0" rIns="0" bIns="0" rtlCol="0" anchor="ctr" anchorCtr="0"/>
-          <a:lstStyle/>
-          <a:p>
-            <a:pPr marL="0" indent="0" algn="l">
-              <a:lnSpc>
-                <a:spcPct val="125000"/>
-              </a:lnSpc>
-              <a:defRPr/>
-            </a:pPr>
-            <a:r>
-              <a:rPr lang="en-US" sz="1600" b="1" i="0" u="none" strike="noStrike">
-                <a:solidFill>
-                  <a:srgbClr val="1F2937"/>
-                </a:solidFill>
-                <a:latin typeface="Noto Sans SC" panose="020B0200000000000000" charset="-122"/>
-                <a:ea typeface="Noto Sans SC" panose="020B0200000000000000" charset="-122"/>
-                <a:cs typeface="Noto Sans SC" panose="020B0200000000000000" charset="-122"/>
-                <a:sym typeface="Noto Sans SC" panose="020B0200000000000000" charset="-122"/>
-              </a:rPr>
-              <a:t>幻觉 (Hallucination)：无中生有的“编造”</a:t>
-            </a:r>
-            <a:endParaRPr lang="en-US" sz="1100"/>
-          </a:p>
-        </p:txBody>
-      </p:sp>
-      <p:sp>
-        <p:nvSpPr>
-          <p:cNvPr id="9" name="AutoShape 9"/>
-          <p:cNvSpPr/>
-          <p:nvPr/>
-        </p:nvSpPr>
-        <p:spPr>
-          <a:xfrm>
-            <a:off x="572064" y="2731006"/>
-            <a:ext cx="4953917" cy="762141"/>
-          </a:xfrm>
-          <a:prstGeom prst="rect">
-            <a:avLst/>
-          </a:prstGeom>
-          <a:noFill/>
-          <a:ln w="12700" cap="flat" cmpd="sng">
-            <a:noFill/>
-            <a:prstDash val="solid"/>
-            <a:round/>
-          </a:ln>
-        </p:spPr>
-        <p:txBody>
-          <a:bodyPr vert="horz" wrap="square" lIns="0" tIns="0" rIns="0" bIns="0" rtlCol="0" anchor="ctr" anchorCtr="0"/>
-          <a:lstStyle/>
-          <a:p>
-            <a:pPr marL="0" indent="0" algn="l">
-              <a:lnSpc>
-                <a:spcPct val="108000"/>
-              </a:lnSpc>
-              <a:defRPr/>
-            </a:pPr>
-            <a:r>
-              <a:rPr lang="en-US" sz="1300" b="0" i="0" u="none" strike="noStrike">
-                <a:solidFill>
-                  <a:srgbClr val="4B5563"/>
-                </a:solidFill>
-                <a:latin typeface="Noto Sans SC" panose="020B0200000000000000" charset="-122"/>
-                <a:ea typeface="Noto Sans SC" panose="020B0200000000000000" charset="-122"/>
-                <a:cs typeface="Noto Sans SC" panose="020B0200000000000000" charset="-122"/>
-                <a:sym typeface="Noto Sans SC" panose="020B0200000000000000" charset="-122"/>
-              </a:rPr>
-              <a:t>基于统计规律生成文本，缺乏事实依据时易编造看似合理的虚假信息。在工业质检、精密制造等高精度场景中，这种“一本正经的胡说八道”会引发严重的安全与质量风险。</a:t>
-            </a:r>
-            <a:endParaRPr lang="en-US" sz="1100"/>
-          </a:p>
-        </p:txBody>
-      </p:sp>
-      <p:sp>
-        <p:nvSpPr>
-          <p:cNvPr id="10" name="AutoShape 10"/>
-          <p:cNvSpPr/>
-          <p:nvPr/>
-        </p:nvSpPr>
-        <p:spPr>
-          <a:xfrm>
-            <a:off x="381529" y="3747194"/>
-            <a:ext cx="5525523" cy="1460770"/>
-          </a:xfrm>
-          <a:prstGeom prst="roundRect">
-            <a:avLst>
-              <a:gd name="adj" fmla="val 0"/>
-            </a:avLst>
-          </a:prstGeom>
-          <a:solidFill>
-            <a:srgbClr val="F9FAFB">
-              <a:alpha val="100000"/>
-            </a:srgbClr>
-          </a:solidFill>
-          <a:ln w="12700" cap="flat" cmpd="sng">
-            <a:solidFill>
-              <a:srgbClr val="E5E7EB">
-                <a:alpha val="100000"/>
-              </a:srgbClr>
-            </a:solidFill>
-            <a:prstDash val="solid"/>
-            <a:round/>
-          </a:ln>
-        </p:spPr>
-        <p:txBody>
-          <a:bodyPr vert="horz" wrap="square" lIns="63511" tIns="63511" rIns="63511" bIns="63511" rtlCol="0" anchor="ctr"/>
-          <a:lstStyle/>
-          <a:p>
-            <a:pPr algn="ctr">
-              <a:defRPr/>
-            </a:pPr>
-          </a:p>
-        </p:txBody>
-      </p:sp>
-      <p:pic>
-        <p:nvPicPr>
-          <p:cNvPr id="11" name="Picture 11"/>
-          <p:cNvPicPr>
-            <a:picLocks noChangeAspect="1"/>
-          </p:cNvPicPr>
-          <p:nvPr/>
-        </p:nvPicPr>
-        <p:blipFill>
-          <a:blip r:embed="rId3">
-            <a:extLst>
-              <a:ext uri="{28A0092B-C50C-407E-A947-70E740481C1C}">
-                <a14:useLocalDpi xmlns:a14="http://schemas.microsoft.com/office/drawing/2010/main" val="0"/>
-              </a:ext>
-              <a:ext uri="{96DAC541-7B7A-43D3-8B79-37D633B846F1}">
-                <asvg:svgBlip xmlns:asvg="http://schemas.microsoft.com/office/drawing/2016/SVG/main" r:embed="rId4"/>
-              </a:ext>
-            </a:extLst>
-          </a:blip>
-          <a:stretch>
-            <a:fillRect/>
-          </a:stretch>
-        </p:blipFill>
-        <p:spPr>
-          <a:xfrm>
-            <a:off x="572064" y="3937729"/>
-            <a:ext cx="406475" cy="406475"/>
-          </a:xfrm>
-          <a:prstGeom prst="rect">
-            <a:avLst/>
-          </a:prstGeom>
-        </p:spPr>
-      </p:pic>
-      <p:sp>
-        <p:nvSpPr>
-          <p:cNvPr id="12" name="AutoShape 12"/>
-          <p:cNvSpPr/>
-          <p:nvPr/>
-        </p:nvSpPr>
-        <p:spPr>
-          <a:xfrm>
-            <a:off x="1080159" y="3937729"/>
-            <a:ext cx="4572847" cy="304856"/>
-          </a:xfrm>
-          <a:prstGeom prst="rect">
-            <a:avLst/>
-          </a:prstGeom>
-          <a:noFill/>
-          <a:ln w="12700" cap="flat" cmpd="sng">
-            <a:noFill/>
-            <a:prstDash val="solid"/>
-            <a:round/>
-          </a:ln>
-        </p:spPr>
-        <p:txBody>
-          <a:bodyPr vert="horz" wrap="square" lIns="0" tIns="0" rIns="0" bIns="0" rtlCol="0" anchor="ctr" anchorCtr="0"/>
-          <a:lstStyle/>
-          <a:p>
-            <a:pPr marL="0" indent="0" algn="l">
-              <a:lnSpc>
-                <a:spcPct val="125000"/>
-              </a:lnSpc>
-              <a:defRPr/>
-            </a:pPr>
-            <a:r>
-              <a:rPr lang="en-US" sz="1600" b="1" i="0" u="none" strike="noStrike">
-                <a:solidFill>
-                  <a:srgbClr val="1F2937"/>
-                </a:solidFill>
-                <a:latin typeface="Noto Sans SC" panose="020B0200000000000000" charset="-122"/>
-                <a:ea typeface="Noto Sans SC" panose="020B0200000000000000" charset="-122"/>
-                <a:cs typeface="Noto Sans SC" panose="020B0200000000000000" charset="-122"/>
-                <a:sym typeface="Noto Sans SC" panose="020B0200000000000000" charset="-122"/>
-              </a:rPr>
-              <a:t>谄媚 (Sycophancy)：违背客观的“迎合”</a:t>
-            </a:r>
-            <a:endParaRPr lang="en-US" sz="1100"/>
-          </a:p>
-        </p:txBody>
-      </p:sp>
-      <p:sp>
-        <p:nvSpPr>
-          <p:cNvPr id="13" name="AutoShape 13"/>
-          <p:cNvSpPr/>
-          <p:nvPr/>
-        </p:nvSpPr>
-        <p:spPr>
-          <a:xfrm>
-            <a:off x="572064" y="4382311"/>
-            <a:ext cx="4953917" cy="762141"/>
-          </a:xfrm>
-          <a:prstGeom prst="rect">
-            <a:avLst/>
-          </a:prstGeom>
-          <a:noFill/>
-          <a:ln w="12700" cap="flat" cmpd="sng">
-            <a:noFill/>
-            <a:prstDash val="solid"/>
-            <a:round/>
-          </a:ln>
-        </p:spPr>
-        <p:txBody>
-          <a:bodyPr vert="horz" wrap="square" lIns="0" tIns="0" rIns="0" bIns="0" rtlCol="0" anchor="ctr" anchorCtr="0"/>
-          <a:lstStyle/>
-          <a:p>
-            <a:pPr marL="0" indent="0" algn="l">
-              <a:lnSpc>
-                <a:spcPct val="108000"/>
-              </a:lnSpc>
-              <a:defRPr/>
-            </a:pPr>
-            <a:r>
-              <a:rPr lang="en-US" sz="1300" b="0" i="0" u="none" strike="noStrike">
-                <a:solidFill>
-                  <a:srgbClr val="4B5563"/>
-                </a:solidFill>
-                <a:latin typeface="Noto Sans SC" panose="020B0200000000000000" charset="-122"/>
-                <a:ea typeface="Noto Sans SC" panose="020B0200000000000000" charset="-122"/>
-                <a:cs typeface="Noto Sans SC" panose="020B0200000000000000" charset="-122"/>
-                <a:sym typeface="Noto Sans SC" panose="020B0200000000000000" charset="-122"/>
-              </a:rPr>
-              <a:t>为迎合用户偏好而牺牲事实，输出用户“想听”而非“正确”的答案。这破坏了AI的中立性，导致决策偏倚，在需要客观分析的金融研判、舆情分析场景中尤为致命。</a:t>
-            </a:r>
-            <a:endParaRPr lang="en-US" sz="1100"/>
-          </a:p>
-        </p:txBody>
-      </p:sp>
-      <p:sp>
-        <p:nvSpPr>
-          <p:cNvPr id="14" name="AutoShape 14"/>
-          <p:cNvSpPr/>
-          <p:nvPr/>
-        </p:nvSpPr>
-        <p:spPr>
-          <a:xfrm>
-            <a:off x="381529" y="5462011"/>
-            <a:ext cx="5525523" cy="698629"/>
-          </a:xfrm>
-          <a:prstGeom prst="roundRect">
-            <a:avLst>
-              <a:gd name="adj" fmla="val 0"/>
-            </a:avLst>
-          </a:prstGeom>
-          <a:solidFill>
-            <a:srgbClr val="FEE2E2">
-              <a:alpha val="50000"/>
-            </a:srgbClr>
-          </a:solidFill>
-          <a:ln w="25400" cap="flat" cmpd="sng">
-            <a:noFill/>
-            <a:prstDash val="solid"/>
-            <a:round/>
-          </a:ln>
-        </p:spPr>
-        <p:txBody>
-          <a:bodyPr vert="horz" wrap="square" lIns="63511" tIns="63511" rIns="63511" bIns="63511" rtlCol="0" anchor="ctr"/>
-          <a:lstStyle/>
-          <a:p>
-            <a:pPr algn="ctr">
-              <a:defRPr/>
-            </a:pPr>
-          </a:p>
-        </p:txBody>
-      </p:sp>
-      <p:sp>
-        <p:nvSpPr>
-          <p:cNvPr id="15" name="AutoShape 15"/>
-          <p:cNvSpPr/>
-          <p:nvPr/>
-        </p:nvSpPr>
-        <p:spPr>
-          <a:xfrm>
-            <a:off x="508553" y="5563630"/>
-            <a:ext cx="5271476" cy="571606"/>
-          </a:xfrm>
-          <a:prstGeom prst="rect">
-            <a:avLst/>
-          </a:prstGeom>
-          <a:noFill/>
-          <a:ln w="12700" cap="flat" cmpd="sng">
-            <a:noFill/>
-            <a:prstDash val="solid"/>
-            <a:round/>
-          </a:ln>
-        </p:spPr>
-        <p:txBody>
-          <a:bodyPr vert="horz" wrap="square" lIns="0" tIns="0" rIns="0" bIns="0" rtlCol="0" anchor="ctr" anchorCtr="0"/>
-          <a:lstStyle/>
-          <a:p>
-            <a:pPr marL="0" indent="0" algn="l">
-              <a:lnSpc>
-                <a:spcPct val="125000"/>
-              </a:lnSpc>
-              <a:defRPr/>
-            </a:pPr>
-            <a:r>
-              <a:rPr lang="en-US" sz="1400" b="1" i="0" u="none" strike="noStrike">
-                <a:solidFill>
-                  <a:srgbClr val="991B1B"/>
-                </a:solidFill>
-                <a:latin typeface="Noto Sans SC" panose="020B0200000000000000" charset="-122"/>
-                <a:ea typeface="Noto Sans SC" panose="020B0200000000000000" charset="-122"/>
-                <a:cs typeface="Noto Sans SC" panose="020B0200000000000000" charset="-122"/>
-                <a:sym typeface="Noto Sans SC" panose="020B0200000000000000" charset="-122"/>
-              </a:rPr>
-              <a:t>核心痛点：</a:t>
-            </a:r>
-            <a:r>
-              <a:rPr lang="en-US" sz="1600" b="0" i="0" u="none" strike="noStrike">
-                <a:solidFill>
-                  <a:srgbClr val="1F2329"/>
-                </a:solidFill>
-                <a:latin typeface="Noto Sans SC" panose="020B0200000000000000" charset="-122"/>
-                <a:ea typeface="Noto Sans SC" panose="020B0200000000000000" charset="-122"/>
-                <a:cs typeface="Noto Sans SC" panose="020B0200000000000000" charset="-122"/>
-                <a:sym typeface="Noto Sans SC" panose="020B0200000000000000" charset="-122"/>
-              </a:rPr>
-              <a:t> </a:t>
-            </a:r>
-            <a:r>
-              <a:rPr lang="en-US" sz="1300" b="0" i="0" u="none" strike="noStrike">
-                <a:solidFill>
-                  <a:srgbClr val="374151"/>
-                </a:solidFill>
-                <a:latin typeface="Noto Sans SC" panose="020B0200000000000000" charset="-122"/>
-                <a:ea typeface="Noto Sans SC" panose="020B0200000000000000" charset="-122"/>
-                <a:cs typeface="Noto Sans SC" panose="020B0200000000000000" charset="-122"/>
-                <a:sym typeface="Noto Sans SC" panose="020B0200000000000000" charset="-122"/>
-              </a:rPr>
-              <a:t>输出结果不可控，无法满足高可靠业务场景对“事实准确性”的硬性要求，成为工业化落地的第一道关卡。</a:t>
-            </a:r>
-            <a:endParaRPr lang="en-US" sz="1100"/>
-          </a:p>
-        </p:txBody>
-      </p:sp>
-      <p:sp>
-        <p:nvSpPr>
-          <p:cNvPr id="16" name="AutoShape 16"/>
-          <p:cNvSpPr/>
-          <p:nvPr/>
-        </p:nvSpPr>
-        <p:spPr>
-          <a:xfrm>
-            <a:off x="6288123" y="1397259"/>
-            <a:ext cx="5525523" cy="508094"/>
-          </a:xfrm>
-          <a:prstGeom prst="roundRect">
-            <a:avLst>
-              <a:gd name="adj" fmla="val 0"/>
-            </a:avLst>
-          </a:prstGeom>
-          <a:solidFill>
-            <a:srgbClr val="EFF6FF">
-              <a:alpha val="100000"/>
-            </a:srgbClr>
-          </a:solidFill>
-          <a:ln w="25400" cap="flat" cmpd="sng">
-            <a:noFill/>
-            <a:prstDash val="solid"/>
-            <a:round/>
-          </a:ln>
-        </p:spPr>
-        <p:txBody>
-          <a:bodyPr vert="horz" wrap="square" lIns="63511" tIns="63511" rIns="63511" bIns="63511" rtlCol="0" anchor="ctr"/>
-          <a:lstStyle/>
-          <a:p>
-            <a:pPr algn="ctr">
-              <a:defRPr/>
-            </a:pPr>
-          </a:p>
-        </p:txBody>
-      </p:sp>
-      <p:sp>
-        <p:nvSpPr>
-          <p:cNvPr id="17" name="AutoShape 17"/>
-          <p:cNvSpPr/>
-          <p:nvPr/>
-        </p:nvSpPr>
-        <p:spPr>
-          <a:xfrm>
-            <a:off x="6415146" y="1473473"/>
-            <a:ext cx="5271476" cy="381071"/>
-          </a:xfrm>
-          <a:prstGeom prst="rect">
-            <a:avLst/>
-          </a:prstGeom>
-          <a:noFill/>
-          <a:ln w="12700" cap="flat" cmpd="sng">
-            <a:noFill/>
-            <a:prstDash val="solid"/>
-            <a:round/>
-          </a:ln>
-        </p:spPr>
-        <p:txBody>
-          <a:bodyPr vert="horz" wrap="square" lIns="0" tIns="0" rIns="0" bIns="0" rtlCol="0" anchor="ctr" anchorCtr="0"/>
-          <a:lstStyle/>
-          <a:p>
-            <a:pPr marL="0" indent="0" algn="l">
-              <a:lnSpc>
-                <a:spcPct val="125000"/>
-              </a:lnSpc>
-              <a:defRPr/>
-            </a:pPr>
-            <a:r>
-              <a:rPr lang="en-US" sz="1800" b="1" i="0" u="none" strike="noStrike">
-                <a:solidFill>
-                  <a:srgbClr val="1D4ED8"/>
-                </a:solidFill>
-                <a:latin typeface="Noto Sans SC" panose="020B0200000000000000" charset="-122"/>
-                <a:ea typeface="Noto Sans SC" panose="020B0200000000000000" charset="-122"/>
-                <a:cs typeface="Noto Sans SC" panose="020B0200000000000000" charset="-122"/>
-                <a:sym typeface="Noto Sans SC" panose="020B0200000000000000" charset="-122"/>
-              </a:rPr>
-              <a:t>02 可解释性困境：AI决策的“黑箱”壁垒</a:t>
-            </a:r>
-            <a:endParaRPr lang="en-US" sz="1100"/>
-          </a:p>
-        </p:txBody>
-      </p:sp>
-      <p:sp>
-        <p:nvSpPr>
-          <p:cNvPr id="18" name="AutoShape 18"/>
-          <p:cNvSpPr/>
-          <p:nvPr/>
-        </p:nvSpPr>
-        <p:spPr>
-          <a:xfrm>
-            <a:off x="6288123" y="2095888"/>
-            <a:ext cx="5525523" cy="1460770"/>
-          </a:xfrm>
-          <a:prstGeom prst="roundRect">
-            <a:avLst>
-              <a:gd name="adj" fmla="val 0"/>
-            </a:avLst>
-          </a:prstGeom>
-          <a:solidFill>
-            <a:srgbClr val="F9FAFB">
-              <a:alpha val="100000"/>
-            </a:srgbClr>
-          </a:solidFill>
-          <a:ln w="12700" cap="flat" cmpd="sng">
-            <a:solidFill>
-              <a:srgbClr val="E5E7EB">
-                <a:alpha val="100000"/>
-              </a:srgbClr>
-            </a:solidFill>
-            <a:prstDash val="solid"/>
-            <a:round/>
-          </a:ln>
-        </p:spPr>
-        <p:txBody>
-          <a:bodyPr vert="horz" wrap="square" lIns="63511" tIns="63511" rIns="63511" bIns="63511" rtlCol="0" anchor="ctr"/>
-          <a:lstStyle/>
-          <a:p>
-            <a:pPr algn="ctr">
-              <a:defRPr/>
-            </a:pPr>
-          </a:p>
-        </p:txBody>
-      </p:sp>
-      <p:pic>
-        <p:nvPicPr>
-          <p:cNvPr id="19" name="Picture 19"/>
-          <p:cNvPicPr>
-            <a:picLocks noChangeAspect="1"/>
-          </p:cNvPicPr>
-          <p:nvPr/>
-        </p:nvPicPr>
-        <p:blipFill>
-          <a:blip r:embed="rId5">
-            <a:extLst>
-              <a:ext uri="{28A0092B-C50C-407E-A947-70E740481C1C}">
-                <a14:useLocalDpi xmlns:a14="http://schemas.microsoft.com/office/drawing/2010/main" val="0"/>
-              </a:ext>
-              <a:ext uri="{96DAC541-7B7A-43D3-8B79-37D633B846F1}">
-                <asvg:svgBlip xmlns:asvg="http://schemas.microsoft.com/office/drawing/2016/SVG/main" r:embed="rId6"/>
-              </a:ext>
-            </a:extLst>
-          </a:blip>
-          <a:stretch>
-            <a:fillRect/>
-          </a:stretch>
-        </p:blipFill>
-        <p:spPr>
-          <a:xfrm>
-            <a:off x="6478658" y="2286423"/>
-            <a:ext cx="406475" cy="406475"/>
-          </a:xfrm>
-          <a:prstGeom prst="rect">
-            <a:avLst/>
-          </a:prstGeom>
-        </p:spPr>
-      </p:pic>
-      <p:sp>
-        <p:nvSpPr>
-          <p:cNvPr id="20" name="AutoShape 20"/>
-          <p:cNvSpPr/>
-          <p:nvPr/>
-        </p:nvSpPr>
-        <p:spPr>
-          <a:xfrm>
-            <a:off x="6986752" y="2286423"/>
-            <a:ext cx="4572847" cy="304856"/>
-          </a:xfrm>
-          <a:prstGeom prst="rect">
-            <a:avLst/>
-          </a:prstGeom>
-          <a:noFill/>
-          <a:ln w="12700" cap="flat" cmpd="sng">
-            <a:noFill/>
-            <a:prstDash val="solid"/>
-            <a:round/>
-          </a:ln>
-        </p:spPr>
-        <p:txBody>
-          <a:bodyPr vert="horz" wrap="square" lIns="0" tIns="0" rIns="0" bIns="0" rtlCol="0" anchor="ctr" anchorCtr="0"/>
-          <a:lstStyle/>
-          <a:p>
-            <a:pPr marL="0" indent="0" algn="l">
-              <a:lnSpc>
-                <a:spcPct val="125000"/>
-              </a:lnSpc>
-              <a:defRPr/>
-            </a:pPr>
-            <a:r>
-              <a:rPr lang="en-US" sz="1600" b="1" i="0" u="none" strike="noStrike">
-                <a:solidFill>
-                  <a:srgbClr val="1F2937"/>
-                </a:solidFill>
-                <a:latin typeface="Noto Sans SC" panose="020B0200000000000000" charset="-122"/>
-                <a:ea typeface="Noto Sans SC" panose="020B0200000000000000" charset="-122"/>
-                <a:cs typeface="Noto Sans SC" panose="020B0200000000000000" charset="-122"/>
-                <a:sym typeface="Noto Sans SC" panose="020B0200000000000000" charset="-122"/>
-              </a:rPr>
-              <a:t>黑箱决策：无法追溯的推理逻辑</a:t>
-            </a:r>
-            <a:endParaRPr lang="en-US" sz="1100"/>
-          </a:p>
-        </p:txBody>
-      </p:sp>
-      <p:sp>
-        <p:nvSpPr>
-          <p:cNvPr id="21" name="AutoShape 21"/>
-          <p:cNvSpPr/>
-          <p:nvPr/>
-        </p:nvSpPr>
-        <p:spPr>
-          <a:xfrm>
-            <a:off x="6478658" y="2731006"/>
-            <a:ext cx="4953917" cy="762141"/>
-          </a:xfrm>
-          <a:prstGeom prst="rect">
-            <a:avLst/>
-          </a:prstGeom>
-          <a:noFill/>
-          <a:ln w="12700" cap="flat" cmpd="sng">
-            <a:noFill/>
-            <a:prstDash val="solid"/>
-            <a:round/>
-          </a:ln>
-        </p:spPr>
-        <p:txBody>
-          <a:bodyPr vert="horz" wrap="square" lIns="0" tIns="0" rIns="0" bIns="0" rtlCol="0" anchor="ctr" anchorCtr="0"/>
-          <a:lstStyle/>
-          <a:p>
-            <a:pPr marL="0" indent="0" algn="l">
-              <a:lnSpc>
-                <a:spcPct val="108000"/>
-              </a:lnSpc>
-              <a:defRPr/>
-            </a:pPr>
-            <a:r>
-              <a:rPr lang="en-US" sz="1300" b="0" i="0" u="none" strike="noStrike">
-                <a:solidFill>
-                  <a:srgbClr val="4B5563"/>
-                </a:solidFill>
-                <a:latin typeface="Noto Sans SC" panose="020B0200000000000000" charset="-122"/>
-                <a:ea typeface="Noto Sans SC" panose="020B0200000000000000" charset="-122"/>
-                <a:cs typeface="Noto Sans SC" panose="020B0200000000000000" charset="-122"/>
-                <a:sym typeface="Noto Sans SC" panose="020B0200000000000000" charset="-122"/>
-              </a:rPr>
-              <a:t>基于深层神经网络的万亿级参数运算，内部决策逻辑如同“黑箱”，无法直观拆解推导路径。这导致我们只知其输出结果，却无法解释“为什么得出这个结论”。</a:t>
-            </a:r>
-            <a:endParaRPr lang="en-US" sz="1100"/>
-          </a:p>
-        </p:txBody>
-      </p:sp>
-      <p:sp>
-        <p:nvSpPr>
-          <p:cNvPr id="22" name="AutoShape 22"/>
-          <p:cNvSpPr/>
-          <p:nvPr/>
-        </p:nvSpPr>
-        <p:spPr>
-          <a:xfrm>
-            <a:off x="6288123" y="3747194"/>
-            <a:ext cx="5525523" cy="1460770"/>
-          </a:xfrm>
-          <a:prstGeom prst="roundRect">
-            <a:avLst>
-              <a:gd name="adj" fmla="val 0"/>
-            </a:avLst>
-          </a:prstGeom>
-          <a:solidFill>
-            <a:srgbClr val="F9FAFB">
-              <a:alpha val="100000"/>
-            </a:srgbClr>
-          </a:solidFill>
-          <a:ln w="12700" cap="flat" cmpd="sng">
-            <a:solidFill>
-              <a:srgbClr val="E5E7EB">
-                <a:alpha val="100000"/>
-              </a:srgbClr>
-            </a:solidFill>
-            <a:prstDash val="solid"/>
-            <a:round/>
-          </a:ln>
-        </p:spPr>
-        <p:txBody>
-          <a:bodyPr vert="horz" wrap="square" lIns="63511" tIns="63511" rIns="63511" bIns="63511" rtlCol="0" anchor="ctr"/>
-          <a:lstStyle/>
-          <a:p>
-            <a:pPr algn="ctr">
-              <a:defRPr/>
-            </a:pPr>
-          </a:p>
-        </p:txBody>
-      </p:sp>
-      <p:pic>
-        <p:nvPicPr>
-          <p:cNvPr id="23" name="Picture 23"/>
-          <p:cNvPicPr>
-            <a:picLocks noChangeAspect="1"/>
-          </p:cNvPicPr>
-          <p:nvPr/>
-        </p:nvPicPr>
-        <p:blipFill>
-          <a:blip r:embed="rId7">
-            <a:extLst>
-              <a:ext uri="{28A0092B-C50C-407E-A947-70E740481C1C}">
-                <a14:useLocalDpi xmlns:a14="http://schemas.microsoft.com/office/drawing/2010/main" val="0"/>
-              </a:ext>
-              <a:ext uri="{96DAC541-7B7A-43D3-8B79-37D633B846F1}">
-                <asvg:svgBlip xmlns:asvg="http://schemas.microsoft.com/office/drawing/2016/SVG/main" r:embed="rId8"/>
-              </a:ext>
-            </a:extLst>
-          </a:blip>
-          <a:stretch>
-            <a:fillRect/>
-          </a:stretch>
-        </p:blipFill>
-        <p:spPr>
-          <a:xfrm>
-            <a:off x="6478658" y="3937729"/>
-            <a:ext cx="406475" cy="406475"/>
-          </a:xfrm>
-          <a:prstGeom prst="rect">
-            <a:avLst/>
-          </a:prstGeom>
-        </p:spPr>
-      </p:pic>
-      <p:sp>
-        <p:nvSpPr>
-          <p:cNvPr id="24" name="AutoShape 24"/>
-          <p:cNvSpPr/>
-          <p:nvPr/>
-        </p:nvSpPr>
-        <p:spPr>
-          <a:xfrm>
-            <a:off x="6986752" y="3937729"/>
-            <a:ext cx="4572847" cy="304856"/>
-          </a:xfrm>
-          <a:prstGeom prst="rect">
-            <a:avLst/>
-          </a:prstGeom>
-          <a:noFill/>
-          <a:ln w="12700" cap="flat" cmpd="sng">
-            <a:noFill/>
-            <a:prstDash val="solid"/>
-            <a:round/>
-          </a:ln>
-        </p:spPr>
-        <p:txBody>
-          <a:bodyPr vert="horz" wrap="square" lIns="0" tIns="0" rIns="0" bIns="0" rtlCol="0" anchor="ctr" anchorCtr="0"/>
-          <a:lstStyle/>
-          <a:p>
-            <a:pPr marL="0" indent="0" algn="l">
-              <a:lnSpc>
-                <a:spcPct val="125000"/>
-              </a:lnSpc>
-              <a:defRPr/>
-            </a:pPr>
-            <a:r>
-              <a:rPr lang="en-US" sz="1600" b="1" i="0" u="none" strike="noStrike">
-                <a:solidFill>
-                  <a:srgbClr val="1F2937"/>
-                </a:solidFill>
-                <a:latin typeface="Noto Sans SC" panose="020B0200000000000000" charset="-122"/>
-                <a:ea typeface="Noto Sans SC" panose="020B0200000000000000" charset="-122"/>
-                <a:cs typeface="Noto Sans SC" panose="020B0200000000000000" charset="-122"/>
-                <a:sym typeface="Noto Sans SC" panose="020B0200000000000000" charset="-122"/>
-              </a:rPr>
-              <a:t>合规壁垒：监管与追责的盲区</a:t>
-            </a:r>
-            <a:endParaRPr lang="en-US" sz="1100"/>
-          </a:p>
-        </p:txBody>
-      </p:sp>
-      <p:sp>
-        <p:nvSpPr>
-          <p:cNvPr id="25" name="AutoShape 25"/>
-          <p:cNvSpPr/>
-          <p:nvPr/>
-        </p:nvSpPr>
-        <p:spPr>
-          <a:xfrm>
-            <a:off x="6478658" y="4382311"/>
-            <a:ext cx="4953917" cy="762141"/>
-          </a:xfrm>
-          <a:prstGeom prst="rect">
-            <a:avLst/>
-          </a:prstGeom>
-          <a:noFill/>
-          <a:ln w="12700" cap="flat" cmpd="sng">
-            <a:noFill/>
-            <a:prstDash val="solid"/>
-            <a:round/>
-          </a:ln>
-        </p:spPr>
-        <p:txBody>
-          <a:bodyPr vert="horz" wrap="square" lIns="0" tIns="0" rIns="0" bIns="0" rtlCol="0" anchor="ctr" anchorCtr="0"/>
-          <a:lstStyle/>
-          <a:p>
-            <a:pPr marL="0" indent="0" algn="l">
-              <a:lnSpc>
-                <a:spcPct val="108000"/>
-              </a:lnSpc>
-              <a:defRPr/>
-            </a:pPr>
-            <a:r>
-              <a:rPr lang="en-US" sz="1300" b="0" i="0" u="none" strike="noStrike">
-                <a:solidFill>
-                  <a:srgbClr val="4B5563"/>
-                </a:solidFill>
-                <a:latin typeface="Noto Sans SC" panose="020B0200000000000000" charset="-122"/>
-                <a:ea typeface="Noto Sans SC" panose="020B0200000000000000" charset="-122"/>
-                <a:cs typeface="Noto Sans SC" panose="020B0200000000000000" charset="-122"/>
-                <a:sym typeface="Noto Sans SC" panose="020B0200000000000000" charset="-122"/>
-              </a:rPr>
-              <a:t>在金融风控、医疗诊断、司法辅助等强监管领域，要求决策过程必须透明可审计。黑箱特性导致无法满足合规与追责要求，成为规模化商用的核心阻碍。</a:t>
-            </a:r>
-            <a:endParaRPr lang="en-US" sz="1100"/>
-          </a:p>
-        </p:txBody>
-      </p:sp>
-      <p:sp>
-        <p:nvSpPr>
-          <p:cNvPr id="26" name="AutoShape 26"/>
-          <p:cNvSpPr/>
-          <p:nvPr/>
-        </p:nvSpPr>
-        <p:spPr>
-          <a:xfrm>
-            <a:off x="6288123" y="5462011"/>
-            <a:ext cx="5525523" cy="698629"/>
-          </a:xfrm>
-          <a:prstGeom prst="roundRect">
-            <a:avLst>
-              <a:gd name="adj" fmla="val 0"/>
-            </a:avLst>
-          </a:prstGeom>
-          <a:solidFill>
-            <a:srgbClr val="DBEAFE">
-              <a:alpha val="50000"/>
-            </a:srgbClr>
-          </a:solidFill>
-          <a:ln w="25400" cap="flat" cmpd="sng">
-            <a:noFill/>
-            <a:prstDash val="solid"/>
-            <a:round/>
-          </a:ln>
-        </p:spPr>
-        <p:txBody>
-          <a:bodyPr vert="horz" wrap="square" lIns="63511" tIns="63511" rIns="63511" bIns="63511" rtlCol="0" anchor="ctr"/>
-          <a:lstStyle/>
-          <a:p>
-            <a:pPr algn="ctr">
-              <a:defRPr/>
-            </a:pPr>
-          </a:p>
-        </p:txBody>
-      </p:sp>
-      <p:sp>
-        <p:nvSpPr>
-          <p:cNvPr id="27" name="AutoShape 27"/>
-          <p:cNvSpPr/>
-          <p:nvPr/>
-        </p:nvSpPr>
-        <p:spPr>
-          <a:xfrm>
-            <a:off x="6415146" y="5563630"/>
-            <a:ext cx="5271476" cy="571606"/>
-          </a:xfrm>
-          <a:prstGeom prst="rect">
-            <a:avLst/>
-          </a:prstGeom>
-          <a:noFill/>
-          <a:ln w="12700" cap="flat" cmpd="sng">
-            <a:noFill/>
-            <a:prstDash val="solid"/>
-            <a:round/>
-          </a:ln>
-        </p:spPr>
-        <p:txBody>
-          <a:bodyPr vert="horz" wrap="square" lIns="0" tIns="0" rIns="0" bIns="0" rtlCol="0" anchor="ctr" anchorCtr="0"/>
-          <a:lstStyle/>
-          <a:p>
-            <a:pPr marL="0" indent="0" algn="l">
-              <a:lnSpc>
-                <a:spcPct val="125000"/>
-              </a:lnSpc>
-              <a:defRPr/>
-            </a:pPr>
-            <a:r>
-              <a:rPr lang="en-US" sz="1400" b="1" i="0" u="none" strike="noStrike">
-                <a:solidFill>
-                  <a:srgbClr val="1E40AF"/>
-                </a:solidFill>
-                <a:latin typeface="Noto Sans SC" panose="020B0200000000000000" charset="-122"/>
-                <a:ea typeface="Noto Sans SC" panose="020B0200000000000000" charset="-122"/>
-                <a:cs typeface="Noto Sans SC" panose="020B0200000000000000" charset="-122"/>
-                <a:sym typeface="Noto Sans SC" panose="020B0200000000000000" charset="-122"/>
-              </a:rPr>
-              <a:t>核心痛点：</a:t>
-            </a:r>
-            <a:r>
-              <a:rPr lang="en-US" sz="1600" b="0" i="0" u="none" strike="noStrike">
-                <a:solidFill>
-                  <a:srgbClr val="1F2329"/>
-                </a:solidFill>
-                <a:latin typeface="Noto Sans SC" panose="020B0200000000000000" charset="-122"/>
-                <a:ea typeface="Noto Sans SC" panose="020B0200000000000000" charset="-122"/>
-                <a:cs typeface="Noto Sans SC" panose="020B0200000000000000" charset="-122"/>
-                <a:sym typeface="Noto Sans SC" panose="020B0200000000000000" charset="-122"/>
-              </a:rPr>
-              <a:t> </a:t>
-            </a:r>
-            <a:r>
-              <a:rPr lang="en-US" sz="1300" b="0" i="0" u="none" strike="noStrike">
-                <a:solidFill>
-                  <a:srgbClr val="374151"/>
-                </a:solidFill>
-                <a:latin typeface="Noto Sans SC" panose="020B0200000000000000" charset="-122"/>
-                <a:ea typeface="Noto Sans SC" panose="020B0200000000000000" charset="-122"/>
-                <a:cs typeface="Noto Sans SC" panose="020B0200000000000000" charset="-122"/>
-                <a:sym typeface="Noto Sans SC" panose="020B0200000000000000" charset="-122"/>
-              </a:rPr>
-              <a:t>决策逻辑不可溯，无法满足关键行业的合规审计要求，制约了LLM在高价值、高监管领域的深度应用。</a:t>
-            </a:r>
-            <a:endParaRPr lang="en-US" sz="1100"/>
-          </a:p>
-        </p:txBody>
-      </p:sp>
-    </p:spTree>
-    <p:custDataLst>
-      <p:tags r:id="rId9"/>
-    </p:custDataLst>
   </p:cSld>
   <p:clrMapOvr>
     <a:masterClrMapping/>
@@ -37417,37 +42864,37 @@
 
 <file path=ppt/tags/tag24.xml><?xml version="1.0" encoding="utf-8"?>
 <p:tagLst xmlns:p="http://schemas.openxmlformats.org/presentationml/2006/main">
-  <p:tag name="KSO_WM_DIAGRAM_VIRTUALLY_FRAME" val="{&quot;height&quot;:370.0515748031496,&quot;left&quot;:59.985039370078745,&quot;top&quot;:173.64842519685038,&quot;width&quot;:839.7782677165354}"/>
+  <p:tag name="KSO_WM_DIAGRAM_VIRTUALLY_FRAME" val="{&quot;height&quot;:113.75,&quot;left&quot;:536.8,&quot;top&quot;:139.65,&quot;width&quot;:99.35}"/>
 </p:tagLst>
 </file>
 
 <file path=ppt/tags/tag25.xml><?xml version="1.0" encoding="utf-8"?>
 <p:tagLst xmlns:p="http://schemas.openxmlformats.org/presentationml/2006/main">
-  <p:tag name="KSO_WM_DIAGRAM_VIRTUALLY_FRAME" val="{&quot;height&quot;:370.0515748031496,&quot;left&quot;:59.985039370078745,&quot;top&quot;:173.64842519685038,&quot;width&quot;:839.7782677165354}"/>
+  <p:tag name="KSO_WM_DIAGRAM_VIRTUALLY_FRAME" val="{&quot;height&quot;:113.75,&quot;left&quot;:536.8,&quot;top&quot;:139.65,&quot;width&quot;:99.35}"/>
 </p:tagLst>
 </file>
 
 <file path=ppt/tags/tag26.xml><?xml version="1.0" encoding="utf-8"?>
 <p:tagLst xmlns:p="http://schemas.openxmlformats.org/presentationml/2006/main">
-  <p:tag name="KSO_WM_DIAGRAM_VIRTUALLY_FRAME" val="{&quot;height&quot;:370.0515748031496,&quot;left&quot;:59.985039370078745,&quot;top&quot;:173.64842519685038,&quot;width&quot;:839.7782677165354}"/>
+  <p:tag name="KSO_WM_DIAGRAM_VIRTUALLY_FRAME" val="{&quot;height&quot;:113.75,&quot;left&quot;:536.8,&quot;top&quot;:139.65,&quot;width&quot;:99.35}"/>
 </p:tagLst>
 </file>
 
 <file path=ppt/tags/tag27.xml><?xml version="1.0" encoding="utf-8"?>
 <p:tagLst xmlns:p="http://schemas.openxmlformats.org/presentationml/2006/main">
-  <p:tag name="KSO_WM_DIAGRAM_VIRTUALLY_FRAME" val="{&quot;height&quot;:433.6,&quot;left&quot;:59.985039370078745,&quot;top&quot;:70.39999999999998,&quot;width&quot;:854.6649606299212}"/>
+  <p:tag name="KSO_WM_DIAGRAM_VIRTUALLY_FRAME" val="{&quot;height&quot;:113.75,&quot;left&quot;:536.8,&quot;top&quot;:139.65,&quot;width&quot;:99.35}"/>
 </p:tagLst>
 </file>
 
 <file path=ppt/tags/tag28.xml><?xml version="1.0" encoding="utf-8"?>
 <p:tagLst xmlns:p="http://schemas.openxmlformats.org/presentationml/2006/main">
-  <p:tag name="KSO_WM_DIAGRAM_VIRTUALLY_FRAME" val="{&quot;height&quot;:433.6,&quot;left&quot;:59.985039370078745,&quot;top&quot;:70.39999999999998,&quot;width&quot;:854.6649606299212}"/>
+  <p:tag name="KSO_WM_DIAGRAM_VIRTUALLY_FRAME" val="{&quot;height&quot;:113.75,&quot;left&quot;:536.8,&quot;top&quot;:139.65,&quot;width&quot;:99.35}"/>
 </p:tagLst>
 </file>
 
 <file path=ppt/tags/tag29.xml><?xml version="1.0" encoding="utf-8"?>
 <p:tagLst xmlns:p="http://schemas.openxmlformats.org/presentationml/2006/main">
-  <p:tag name="KSO_WM_DIAGRAM_VIRTUALLY_FRAME" val="{&quot;height&quot;:433.6,&quot;left&quot;:59.985039370078745,&quot;top&quot;:70.39999999999998,&quot;width&quot;:854.6649606299212}"/>
+  <p:tag name="KSO_WM_DIAGRAM_VIRTUALLY_FRAME" val="{&quot;height&quot;:113.75,&quot;left&quot;:536.8,&quot;top&quot;:139.65,&quot;width&quot;:99.35}"/>
 </p:tagLst>
 </file>
 
@@ -37459,31 +42906,31 @@
 
 <file path=ppt/tags/tag30.xml><?xml version="1.0" encoding="utf-8"?>
 <p:tagLst xmlns:p="http://schemas.openxmlformats.org/presentationml/2006/main">
-  <p:tag name="KSO_WM_DIAGRAM_VIRTUALLY_FRAME" val="{&quot;height&quot;:433.6,&quot;left&quot;:59.985039370078745,&quot;top&quot;:70.39999999999998,&quot;width&quot;:854.6649606299212}"/>
+  <p:tag name="KSO_WM_DIAGRAM_VIRTUALLY_FRAME" val="{&quot;height&quot;:113.75,&quot;left&quot;:536.8,&quot;top&quot;:139.65,&quot;width&quot;:99.35}"/>
 </p:tagLst>
 </file>
 
 <file path=ppt/tags/tag31.xml><?xml version="1.0" encoding="utf-8"?>
 <p:tagLst xmlns:p="http://schemas.openxmlformats.org/presentationml/2006/main">
-  <p:tag name="KSO_WM_DIAGRAM_VIRTUALLY_FRAME" val="{&quot;height&quot;:433.6,&quot;left&quot;:59.985039370078745,&quot;top&quot;:70.39999999999998,&quot;width&quot;:854.6649606299212}"/>
+  <p:tag name="KSO_WM_DIAGRAM_VIRTUALLY_FRAME" val="{&quot;height&quot;:113.75,&quot;left&quot;:536.8,&quot;top&quot;:139.65,&quot;width&quot;:99.35}"/>
 </p:tagLst>
 </file>
 
 <file path=ppt/tags/tag32.xml><?xml version="1.0" encoding="utf-8"?>
 <p:tagLst xmlns:p="http://schemas.openxmlformats.org/presentationml/2006/main">
-  <p:tag name="KSO_WM_DIAGRAM_VIRTUALLY_FRAME" val="{&quot;height&quot;:433.6,&quot;left&quot;:59.985039370078745,&quot;top&quot;:70.39999999999998,&quot;width&quot;:854.6649606299212}"/>
+  <p:tag name="KSO_WM_DIAGRAM_VIRTUALLY_FRAME" val="{&quot;height&quot;:370.0515748031496,&quot;left&quot;:59.985039370078745,&quot;top&quot;:173.64842519685038,&quot;width&quot;:839.7782677165354}"/>
 </p:tagLst>
 </file>
 
 <file path=ppt/tags/tag33.xml><?xml version="1.0" encoding="utf-8"?>
 <p:tagLst xmlns:p="http://schemas.openxmlformats.org/presentationml/2006/main">
-  <p:tag name="KSO_WM_DIAGRAM_VIRTUALLY_FRAME" val="{&quot;height&quot;:433.6,&quot;left&quot;:59.985039370078745,&quot;top&quot;:70.39999999999998,&quot;width&quot;:854.6649606299212}"/>
+  <p:tag name="KSO_WM_DIAGRAM_VIRTUALLY_FRAME" val="{&quot;height&quot;:370.0515748031496,&quot;left&quot;:59.985039370078745,&quot;top&quot;:173.64842519685038,&quot;width&quot;:839.7782677165354}"/>
 </p:tagLst>
 </file>
 
 <file path=ppt/tags/tag34.xml><?xml version="1.0" encoding="utf-8"?>
 <p:tagLst xmlns:p="http://schemas.openxmlformats.org/presentationml/2006/main">
-  <p:tag name="KSO_WM_DIAGRAM_VIRTUALLY_FRAME" val="{&quot;height&quot;:433.6,&quot;left&quot;:59.985039370078745,&quot;top&quot;:70.39999999999998,&quot;width&quot;:854.6649606299212}"/>
+  <p:tag name="KSO_WM_DIAGRAM_VIRTUALLY_FRAME" val="{&quot;height&quot;:370.0515748031496,&quot;left&quot;:59.985039370078745,&quot;top&quot;:173.64842519685038,&quot;width&quot;:839.7782677165354}"/>
 </p:tagLst>
 </file>
 
@@ -37573,13 +43020,13 @@
 
 <file path=ppt/tags/tag48.xml><?xml version="1.0" encoding="utf-8"?>
 <p:tagLst xmlns:p="http://schemas.openxmlformats.org/presentationml/2006/main">
-  <p:tag name="KSO_WM_DIAGRAM_VIRTUALLY_FRAME" val="{&quot;height&quot;:398.5494488188976,&quot;left&quot;:47.93771653543307,&quot;top&quot;:91.60409448818898,&quot;width&quot;:886.9215748031496}"/>
+  <p:tag name="KSO_WM_DIAGRAM_VIRTUALLY_FRAME" val="{&quot;height&quot;:433.6,&quot;left&quot;:59.985039370078745,&quot;top&quot;:70.39999999999998,&quot;width&quot;:854.6649606299212}"/>
 </p:tagLst>
 </file>
 
 <file path=ppt/tags/tag49.xml><?xml version="1.0" encoding="utf-8"?>
 <p:tagLst xmlns:p="http://schemas.openxmlformats.org/presentationml/2006/main">
-  <p:tag name="KSO_WM_DIAGRAM_VIRTUALLY_FRAME" val="{&quot;height&quot;:398.5494488188976,&quot;left&quot;:47.93771653543307,&quot;top&quot;:91.60409448818898,&quot;width&quot;:886.9215748031496}"/>
+  <p:tag name="KSO_WM_DIAGRAM_VIRTUALLY_FRAME" val="{&quot;height&quot;:433.6,&quot;left&quot;:59.985039370078745,&quot;top&quot;:70.39999999999998,&quot;width&quot;:854.6649606299212}"/>
 </p:tagLst>
 </file>
 
@@ -37591,37 +43038,37 @@
 
 <file path=ppt/tags/tag50.xml><?xml version="1.0" encoding="utf-8"?>
 <p:tagLst xmlns:p="http://schemas.openxmlformats.org/presentationml/2006/main">
-  <p:tag name="KSO_WM_DIAGRAM_VIRTUALLY_FRAME" val="{&quot;height&quot;:398.5494488188976,&quot;left&quot;:47.93771653543307,&quot;top&quot;:91.60409448818898,&quot;width&quot;:886.9215748031496}"/>
+  <p:tag name="KSO_WM_DIAGRAM_VIRTUALLY_FRAME" val="{&quot;height&quot;:433.6,&quot;left&quot;:59.985039370078745,&quot;top&quot;:70.39999999999998,&quot;width&quot;:854.6649606299212}"/>
 </p:tagLst>
 </file>
 
 <file path=ppt/tags/tag51.xml><?xml version="1.0" encoding="utf-8"?>
 <p:tagLst xmlns:p="http://schemas.openxmlformats.org/presentationml/2006/main">
-  <p:tag name="KSO_WM_DIAGRAM_VIRTUALLY_FRAME" val="{&quot;height&quot;:398.5494488188976,&quot;left&quot;:47.93771653543307,&quot;top&quot;:91.60409448818898,&quot;width&quot;:886.9215748031496}"/>
+  <p:tag name="KSO_WM_DIAGRAM_VIRTUALLY_FRAME" val="{&quot;height&quot;:433.6,&quot;left&quot;:59.985039370078745,&quot;top&quot;:70.39999999999998,&quot;width&quot;:854.6649606299212}"/>
 </p:tagLst>
 </file>
 
 <file path=ppt/tags/tag52.xml><?xml version="1.0" encoding="utf-8"?>
 <p:tagLst xmlns:p="http://schemas.openxmlformats.org/presentationml/2006/main">
-  <p:tag name="KSO_WM_DIAGRAM_VIRTUALLY_FRAME" val="{&quot;height&quot;:398.5494488188976,&quot;left&quot;:47.93771653543307,&quot;top&quot;:91.60409448818898,&quot;width&quot;:886.9215748031496}"/>
+  <p:tag name="KSO_WM_DIAGRAM_VIRTUALLY_FRAME" val="{&quot;height&quot;:433.6,&quot;left&quot;:59.985039370078745,&quot;top&quot;:70.39999999999998,&quot;width&quot;:854.6649606299212}"/>
 </p:tagLst>
 </file>
 
 <file path=ppt/tags/tag53.xml><?xml version="1.0" encoding="utf-8"?>
 <p:tagLst xmlns:p="http://schemas.openxmlformats.org/presentationml/2006/main">
-  <p:tag name="KSO_WM_DIAGRAM_VIRTUALLY_FRAME" val="{&quot;height&quot;:398.5494488188976,&quot;left&quot;:47.93771653543307,&quot;top&quot;:91.60409448818898,&quot;width&quot;:886.9215748031496}"/>
+  <p:tag name="KSO_WM_DIAGRAM_VIRTUALLY_FRAME" val="{&quot;height&quot;:433.6,&quot;left&quot;:59.985039370078745,&quot;top&quot;:70.39999999999998,&quot;width&quot;:854.6649606299212}"/>
 </p:tagLst>
 </file>
 
 <file path=ppt/tags/tag54.xml><?xml version="1.0" encoding="utf-8"?>
 <p:tagLst xmlns:p="http://schemas.openxmlformats.org/presentationml/2006/main">
-  <p:tag name="KSO_WM_DIAGRAM_VIRTUALLY_FRAME" val="{&quot;height&quot;:398.5494488188976,&quot;left&quot;:47.93771653543307,&quot;top&quot;:91.60409448818898,&quot;width&quot;:886.9215748031496}"/>
+  <p:tag name="KSO_WM_DIAGRAM_VIRTUALLY_FRAME" val="{&quot;height&quot;:433.6,&quot;left&quot;:59.985039370078745,&quot;top&quot;:70.39999999999998,&quot;width&quot;:854.6649606299212}"/>
 </p:tagLst>
 </file>
 
 <file path=ppt/tags/tag55.xml><?xml version="1.0" encoding="utf-8"?>
 <p:tagLst xmlns:p="http://schemas.openxmlformats.org/presentationml/2006/main">
-  <p:tag name="KSO_WM_DIAGRAM_VIRTUALLY_FRAME" val="{&quot;height&quot;:398.5494488188976,&quot;left&quot;:47.93771653543307,&quot;top&quot;:91.60409448818898,&quot;width&quot;:886.9215748031496}"/>
+  <p:tag name="KSO_WM_DIAGRAM_VIRTUALLY_FRAME" val="{&quot;height&quot;:433.6,&quot;left&quot;:59.985039370078745,&quot;top&quot;:70.39999999999998,&quot;width&quot;:854.6649606299212}"/>
 </p:tagLst>
 </file>
 
@@ -37739,9 +43186,57 @@
 </p:tagLst>
 </file>
 
+<file path=ppt/tags/tag73.xml><?xml version="1.0" encoding="utf-8"?>
+<p:tagLst xmlns:p="http://schemas.openxmlformats.org/presentationml/2006/main">
+  <p:tag name="KSO_WM_DIAGRAM_VIRTUALLY_FRAME" val="{&quot;height&quot;:398.5494488188976,&quot;left&quot;:47.93771653543307,&quot;top&quot;:91.60409448818898,&quot;width&quot;:886.9215748031496}"/>
+</p:tagLst>
+</file>
+
+<file path=ppt/tags/tag74.xml><?xml version="1.0" encoding="utf-8"?>
+<p:tagLst xmlns:p="http://schemas.openxmlformats.org/presentationml/2006/main">
+  <p:tag name="KSO_WM_DIAGRAM_VIRTUALLY_FRAME" val="{&quot;height&quot;:398.5494488188976,&quot;left&quot;:47.93771653543307,&quot;top&quot;:91.60409448818898,&quot;width&quot;:886.9215748031496}"/>
+</p:tagLst>
+</file>
+
+<file path=ppt/tags/tag75.xml><?xml version="1.0" encoding="utf-8"?>
+<p:tagLst xmlns:p="http://schemas.openxmlformats.org/presentationml/2006/main">
+  <p:tag name="KSO_WM_DIAGRAM_VIRTUALLY_FRAME" val="{&quot;height&quot;:398.5494488188976,&quot;left&quot;:47.93771653543307,&quot;top&quot;:91.60409448818898,&quot;width&quot;:886.9215748031496}"/>
+</p:tagLst>
+</file>
+
+<file path=ppt/tags/tag76.xml><?xml version="1.0" encoding="utf-8"?>
+<p:tagLst xmlns:p="http://schemas.openxmlformats.org/presentationml/2006/main">
+  <p:tag name="KSO_WM_DIAGRAM_VIRTUALLY_FRAME" val="{&quot;height&quot;:398.5494488188976,&quot;left&quot;:47.93771653543307,&quot;top&quot;:91.60409448818898,&quot;width&quot;:886.9215748031496}"/>
+</p:tagLst>
+</file>
+
+<file path=ppt/tags/tag77.xml><?xml version="1.0" encoding="utf-8"?>
+<p:tagLst xmlns:p="http://schemas.openxmlformats.org/presentationml/2006/main">
+  <p:tag name="KSO_WM_DIAGRAM_VIRTUALLY_FRAME" val="{&quot;height&quot;:398.5494488188976,&quot;left&quot;:47.93771653543307,&quot;top&quot;:91.60409448818898,&quot;width&quot;:886.9215748031496}"/>
+</p:tagLst>
+</file>
+
+<file path=ppt/tags/tag78.xml><?xml version="1.0" encoding="utf-8"?>
+<p:tagLst xmlns:p="http://schemas.openxmlformats.org/presentationml/2006/main">
+  <p:tag name="KSO_WM_DIAGRAM_VIRTUALLY_FRAME" val="{&quot;height&quot;:398.5494488188976,&quot;left&quot;:47.93771653543307,&quot;top&quot;:91.60409448818898,&quot;width&quot;:886.9215748031496}"/>
+</p:tagLst>
+</file>
+
+<file path=ppt/tags/tag79.xml><?xml version="1.0" encoding="utf-8"?>
+<p:tagLst xmlns:p="http://schemas.openxmlformats.org/presentationml/2006/main">
+  <p:tag name="KSO_WM_DIAGRAM_VIRTUALLY_FRAME" val="{&quot;height&quot;:398.5494488188976,&quot;left&quot;:47.93771653543307,&quot;top&quot;:91.60409448818898,&quot;width&quot;:886.9215748031496}"/>
+</p:tagLst>
+</file>
+
 <file path=ppt/tags/tag8.xml><?xml version="1.0" encoding="utf-8"?>
 <p:tagLst xmlns:p="http://schemas.openxmlformats.org/presentationml/2006/main">
   <p:tag name="KSO_WM_DIAGRAM_VIRTUALLY_FRAME" val="{&quot;height&quot;:449.9,&quot;left&quot;:49.2,&quot;top&quot;:75.4,&quot;width&quot;:875.9}"/>
+</p:tagLst>
+</file>
+
+<file path=ppt/tags/tag80.xml><?xml version="1.0" encoding="utf-8"?>
+<p:tagLst xmlns:p="http://schemas.openxmlformats.org/presentationml/2006/main">
+  <p:tag name="KSO_WM_DIAGRAM_VIRTUALLY_FRAME" val="{&quot;height&quot;:398.5494488188976,&quot;left&quot;:47.93771653543307,&quot;top&quot;:91.60409448818898,&quot;width&quot;:886.9215748031496}"/>
 </p:tagLst>
 </file>
 

--- a/本体应用设计.pptx
+++ b/本体应用设计.pptx
@@ -12115,7 +12115,31 @@
                     <a:cs typeface="Noto Sans SC" panose="020B0200000000000000" charset="-122"/>
                     <a:sym typeface="Noto Sans SC" panose="020B0200000000000000" charset="-122"/>
                   </a:rPr>
-                  <a:t>分离架构，确保Junit全通过</a:t>
+                  <a:t>分离架构</a:t>
+                </a:r>
+                <a:r>
+                  <a:rPr lang="zh-CN" altLang="en-US" sz="900" b="1">
+                    <a:solidFill>
+                      <a:schemeClr val="tx1"/>
+                    </a:solidFill>
+                    <a:latin typeface="Noto Sans SC" panose="020B0200000000000000" charset="-122"/>
+                    <a:ea typeface="Noto Sans SC" panose="020B0200000000000000" charset="-122"/>
+                    <a:cs typeface="Noto Sans SC" panose="020B0200000000000000" charset="-122"/>
+                    <a:sym typeface="Noto Sans SC" panose="020B0200000000000000" charset="-122"/>
+                  </a:rPr>
+                  <a:t>与数据</a:t>
+                </a:r>
+                <a:r>
+                  <a:rPr lang="en-US" sz="900" b="1">
+                    <a:solidFill>
+                      <a:schemeClr val="tx1"/>
+                    </a:solidFill>
+                    <a:latin typeface="Noto Sans SC" panose="020B0200000000000000" charset="-122"/>
+                    <a:ea typeface="Noto Sans SC" panose="020B0200000000000000" charset="-122"/>
+                    <a:cs typeface="Noto Sans SC" panose="020B0200000000000000" charset="-122"/>
+                    <a:sym typeface="Noto Sans SC" panose="020B0200000000000000" charset="-122"/>
+                  </a:rPr>
+                  <a:t>，确保Junit全通过</a:t>
                 </a:r>
                 <a:endParaRPr lang="en-US" sz="900" b="1">
                   <a:solidFill>
@@ -12284,7 +12308,31 @@
                     <a:cs typeface="Noto Sans SC" panose="020B0200000000000000" charset="-122"/>
                     <a:sym typeface="Noto Sans SC" panose="020B0200000000000000" charset="-122"/>
                   </a:rPr>
-                  <a:t>过大时按命名空间拆分</a:t>
+                  <a:t>TBox过大</a:t>
+                </a:r>
+                <a:r>
+                  <a:rPr lang="zh-CN" altLang="en-US" sz="900" b="1">
+                    <a:solidFill>
+                      <a:schemeClr val="tx1"/>
+                    </a:solidFill>
+                    <a:latin typeface="Noto Sans SC" panose="020B0200000000000000" charset="-122"/>
+                    <a:ea typeface="Noto Sans SC" panose="020B0200000000000000" charset="-122"/>
+                    <a:cs typeface="Noto Sans SC" panose="020B0200000000000000" charset="-122"/>
+                    <a:sym typeface="Noto Sans SC" panose="020B0200000000000000" charset="-122"/>
+                  </a:rPr>
+                  <a:t>，拆分为</a:t>
+                </a:r>
+                <a:r>
+                  <a:rPr lang="zh-CN" altLang="en-US" sz="900" b="1">
+                    <a:solidFill>
+                      <a:schemeClr val="tx1"/>
+                    </a:solidFill>
+                    <a:latin typeface="Noto Sans SC" panose="020B0200000000000000" charset="-122"/>
+                    <a:ea typeface="Noto Sans SC" panose="020B0200000000000000" charset="-122"/>
+                    <a:cs typeface="Noto Sans SC" panose="020B0200000000000000" charset="-122"/>
+                    <a:sym typeface="Noto Sans SC" panose="020B0200000000000000" charset="-122"/>
+                  </a:rPr>
+                  <a:t>多个高内聚本体</a:t>
                 </a:r>
                 <a:endParaRPr lang="en-US" sz="900" b="1">
                   <a:solidFill>
@@ -12444,6 +12492,42 @@
                   <a:defRPr/>
                 </a:pPr>
                 <a:r>
+                  <a:rPr lang="zh-CN" altLang="en-US" sz="900" b="1">
+                    <a:solidFill>
+                      <a:schemeClr val="tx1"/>
+                    </a:solidFill>
+                    <a:latin typeface="Noto Sans SC" panose="020B0200000000000000" charset="-122"/>
+                    <a:ea typeface="Noto Sans SC" panose="020B0200000000000000" charset="-122"/>
+                    <a:cs typeface="Noto Sans SC" panose="020B0200000000000000" charset="-122"/>
+                    <a:sym typeface="Noto Sans SC" panose="020B0200000000000000" charset="-122"/>
+                  </a:rPr>
+                  <a:t>实例数据（</a:t>
+                </a:r>
+                <a:r>
+                  <a:rPr lang="en-US" altLang="zh-CN" sz="900" b="1">
+                    <a:solidFill>
+                      <a:schemeClr val="tx1"/>
+                    </a:solidFill>
+                    <a:latin typeface="Noto Sans SC" panose="020B0200000000000000" charset="-122"/>
+                    <a:ea typeface="Noto Sans SC" panose="020B0200000000000000" charset="-122"/>
+                    <a:cs typeface="Noto Sans SC" panose="020B0200000000000000" charset="-122"/>
+                    <a:sym typeface="Noto Sans SC" panose="020B0200000000000000" charset="-122"/>
+                  </a:rPr>
+                  <a:t>ABox</a:t>
+                </a:r>
+                <a:r>
+                  <a:rPr lang="zh-CN" altLang="en-US" sz="900" b="1">
+                    <a:solidFill>
+                      <a:schemeClr val="tx1"/>
+                    </a:solidFill>
+                    <a:latin typeface="Noto Sans SC" panose="020B0200000000000000" charset="-122"/>
+                    <a:ea typeface="Noto Sans SC" panose="020B0200000000000000" charset="-122"/>
+                    <a:cs typeface="Noto Sans SC" panose="020B0200000000000000" charset="-122"/>
+                    <a:sym typeface="Noto Sans SC" panose="020B0200000000000000" charset="-122"/>
+                  </a:rPr>
+                  <a:t>）</a:t>
+                </a:r>
+                <a:r>
                   <a:rPr lang="en-US" sz="900" b="1">
                     <a:solidFill>
                       <a:schemeClr val="tx1"/>
@@ -12453,7 +12537,7 @@
                     <a:cs typeface="Noto Sans SC" panose="020B0200000000000000" charset="-122"/>
                     <a:sym typeface="Noto Sans SC" panose="020B0200000000000000" charset="-122"/>
                   </a:rPr>
-                  <a:t>大数据量导入数据库映射</a:t>
+                  <a:t>导入数据库</a:t>
                 </a:r>
                 <a:endParaRPr lang="en-US" sz="900" b="1">
                   <a:solidFill>
